--- a/正月集まり_プランニング提案書.pptx
+++ b/正月集まり_プランニング提案書.pptx
@@ -3110,7 +3110,7 @@
         </p:nvSpPr>
         <p:spPr>
           <a:xfrm>
-            <a:off x="0" y="5303520"/>
+            <a:off x="0" y="5257800"/>
             <a:ext cx="12188952" cy="73152"/>
           </a:xfrm>
           <a:prstGeom prst="rect">
@@ -3153,8 +3153,8 @@
         </p:nvSpPr>
         <p:spPr>
           <a:xfrm>
-            <a:off x="0" y="5486400"/>
-            <a:ext cx="12188952" cy="1371600"/>
+            <a:off x="0" y="5394960"/>
+            <a:ext cx="12188952" cy="1463040"/>
           </a:xfrm>
           <a:prstGeom prst="rect">
             <a:avLst/>
@@ -3196,23 +3196,23 @@
         </p:nvSpPr>
         <p:spPr>
           <a:xfrm>
-            <a:off x="1097280" y="1280160"/>
-            <a:ext cx="10058400" cy="1097280"/>
-          </a:xfrm>
-          <a:prstGeom prst="rect">
-            <a:avLst/>
-          </a:prstGeom>
-          <a:noFill/>
-        </p:spPr>
-        <p:txBody>
-          <a:bodyPr wrap="square">
-            <a:spAutoFit/>
-          </a:bodyPr>
-          <a:lstStyle/>
-          <a:p>
-            <a:pPr algn="ctr"/>
-            <a:r>
-              <a:rPr sz="4800" b="1" i="0">
+            <a:off x="914400" y="1188720"/>
+            <a:ext cx="10360152" cy="1005840"/>
+          </a:xfrm>
+          <a:prstGeom prst="rect">
+            <a:avLst/>
+          </a:prstGeom>
+          <a:noFill/>
+        </p:spPr>
+        <p:txBody>
+          <a:bodyPr wrap="square" tIns="0" bIns="0" lIns="25400" rIns="25400">
+            <a:spAutoFit/>
+          </a:bodyPr>
+          <a:lstStyle/>
+          <a:p>
+            <a:pPr algn="ctr"/>
+            <a:r>
+              <a:rPr sz="5000" b="1" i="0">
                 <a:solidFill>
                   <a:srgbClr val="FFFFFF"/>
                 </a:solidFill>
@@ -3230,23 +3230,23 @@
         </p:nvSpPr>
         <p:spPr>
           <a:xfrm>
-            <a:off x="1097280" y="2286000"/>
-            <a:ext cx="10058400" cy="822960"/>
-          </a:xfrm>
-          <a:prstGeom prst="rect">
-            <a:avLst/>
-          </a:prstGeom>
-          <a:noFill/>
-        </p:spPr>
-        <p:txBody>
-          <a:bodyPr wrap="square">
-            <a:spAutoFit/>
-          </a:bodyPr>
-          <a:lstStyle/>
-          <a:p>
-            <a:pPr algn="ctr"/>
-            <a:r>
-              <a:rPr sz="3600" b="1" i="0">
+            <a:off x="914400" y="2194560"/>
+            <a:ext cx="10360152" cy="822960"/>
+          </a:xfrm>
+          <a:prstGeom prst="rect">
+            <a:avLst/>
+          </a:prstGeom>
+          <a:noFill/>
+        </p:spPr>
+        <p:txBody>
+          <a:bodyPr wrap="square" tIns="0" bIns="0" lIns="25400" rIns="25400">
+            <a:spAutoFit/>
+          </a:bodyPr>
+          <a:lstStyle/>
+          <a:p>
+            <a:pPr algn="ctr"/>
+            <a:r>
+              <a:rPr sz="3400" b="1" i="0">
                 <a:solidFill>
                   <a:srgbClr val="C89B3C"/>
                 </a:solidFill>
@@ -3264,23 +3264,23 @@
         </p:nvSpPr>
         <p:spPr>
           <a:xfrm>
-            <a:off x="1097280" y="3154680"/>
-            <a:ext cx="10058400" cy="502920"/>
-          </a:xfrm>
-          <a:prstGeom prst="rect">
-            <a:avLst/>
-          </a:prstGeom>
-          <a:noFill/>
-        </p:spPr>
-        <p:txBody>
-          <a:bodyPr wrap="square">
-            <a:spAutoFit/>
-          </a:bodyPr>
-          <a:lstStyle/>
-          <a:p>
-            <a:pPr algn="ctr"/>
-            <a:r>
-              <a:rPr sz="1800" b="0" i="0">
+            <a:off x="914400" y="3108960"/>
+            <a:ext cx="10360152" cy="475488"/>
+          </a:xfrm>
+          <a:prstGeom prst="rect">
+            <a:avLst/>
+          </a:prstGeom>
+          <a:noFill/>
+        </p:spPr>
+        <p:txBody>
+          <a:bodyPr wrap="square" tIns="0" bIns="0" lIns="25400" rIns="25400">
+            <a:spAutoFit/>
+          </a:bodyPr>
+          <a:lstStyle/>
+          <a:p>
+            <a:pPr algn="ctr"/>
+            <a:r>
+              <a:rPr sz="1700" b="0" i="0">
                 <a:solidFill>
                   <a:srgbClr val="FFFFFF"/>
                 </a:solidFill>
@@ -3298,23 +3298,23 @@
         </p:nvSpPr>
         <p:spPr>
           <a:xfrm>
-            <a:off x="1097280" y="3611880"/>
-            <a:ext cx="10058400" cy="457200"/>
-          </a:xfrm>
-          <a:prstGeom prst="rect">
-            <a:avLst/>
-          </a:prstGeom>
-          <a:noFill/>
-        </p:spPr>
-        <p:txBody>
-          <a:bodyPr wrap="square">
-            <a:spAutoFit/>
-          </a:bodyPr>
-          <a:lstStyle/>
-          <a:p>
-            <a:pPr algn="ctr"/>
-            <a:r>
-              <a:rPr sz="1600" b="0" i="0">
+            <a:off x="914400" y="3566160"/>
+            <a:ext cx="10360152" cy="438912"/>
+          </a:xfrm>
+          <a:prstGeom prst="rect">
+            <a:avLst/>
+          </a:prstGeom>
+          <a:noFill/>
+        </p:spPr>
+        <p:txBody>
+          <a:bodyPr wrap="square" tIns="0" bIns="0" lIns="25400" rIns="25400">
+            <a:spAutoFit/>
+          </a:bodyPr>
+          <a:lstStyle/>
+          <a:p>
+            <a:pPr algn="ctr"/>
+            <a:r>
+              <a:rPr sz="1500" b="0" i="0">
                 <a:solidFill>
                   <a:srgbClr val="AACCEE"/>
                 </a:solidFill>
@@ -3332,16 +3332,16 @@
         </p:nvSpPr>
         <p:spPr>
           <a:xfrm>
-            <a:off x="457200" y="6309360"/>
-            <a:ext cx="11247120" cy="365760"/>
-          </a:xfrm>
-          <a:prstGeom prst="rect">
-            <a:avLst/>
-          </a:prstGeom>
-          <a:noFill/>
-        </p:spPr>
-        <p:txBody>
-          <a:bodyPr wrap="square">
+            <a:off x="914400" y="6400800"/>
+            <a:ext cx="10360152" cy="329184"/>
+          </a:xfrm>
+          <a:prstGeom prst="rect">
+            <a:avLst/>
+          </a:prstGeom>
+          <a:noFill/>
+        </p:spPr>
+        <p:txBody>
+          <a:bodyPr wrap="square" tIns="0" bIns="0" lIns="25400" rIns="25400">
             <a:spAutoFit/>
           </a:bodyPr>
           <a:lstStyle/>
@@ -3353,7 +3353,7 @@
                   <a:srgbClr val="6C757D"/>
                 </a:solidFill>
               </a:rPr>
-              <a:t>Confidential – Family Planning Document</a:t>
+              <a:t>Family Planning Document  —  Confidential</a:t>
             </a:r>
           </a:p>
         </p:txBody>
@@ -3478,23 +3478,23 @@
         </p:nvSpPr>
         <p:spPr>
           <a:xfrm>
-            <a:off x="365760" y="109728"/>
-            <a:ext cx="9144000" cy="640080"/>
-          </a:xfrm>
-          <a:prstGeom prst="rect">
-            <a:avLst/>
-          </a:prstGeom>
-          <a:noFill/>
-        </p:spPr>
-        <p:txBody>
-          <a:bodyPr wrap="square">
+            <a:off x="320040" y="91440"/>
+            <a:ext cx="11430000" cy="566928"/>
+          </a:xfrm>
+          <a:prstGeom prst="rect">
+            <a:avLst/>
+          </a:prstGeom>
+          <a:noFill/>
+        </p:spPr>
+        <p:txBody>
+          <a:bodyPr wrap="square" tIns="0" bIns="0" lIns="25400" rIns="25400">
             <a:spAutoFit/>
           </a:bodyPr>
           <a:lstStyle/>
           <a:p>
             <a:pPr algn="l"/>
             <a:r>
-              <a:rPr sz="2600" b="1" i="0">
+              <a:rPr sz="2400" b="1" i="0">
                 <a:solidFill>
                   <a:srgbClr val="FFFFFF"/>
                 </a:solidFill>
@@ -3512,23 +3512,23 @@
         </p:nvSpPr>
         <p:spPr>
           <a:xfrm>
-            <a:off x="365760" y="621792"/>
-            <a:ext cx="9144000" cy="365760"/>
-          </a:xfrm>
-          <a:prstGeom prst="rect">
-            <a:avLst/>
-          </a:prstGeom>
-          <a:noFill/>
-        </p:spPr>
-        <p:txBody>
-          <a:bodyPr wrap="square">
+            <a:off x="320040" y="621792"/>
+            <a:ext cx="11430000" cy="329184"/>
+          </a:xfrm>
+          <a:prstGeom prst="rect">
+            <a:avLst/>
+          </a:prstGeom>
+          <a:noFill/>
+        </p:spPr>
+        <p:txBody>
+          <a:bodyPr wrap="square" tIns="0" bIns="0" lIns="25400" rIns="25400">
             <a:spAutoFit/>
           </a:bodyPr>
           <a:lstStyle/>
           <a:p>
             <a:pPr algn="l"/>
             <a:r>
-              <a:rPr sz="1200" b="0" i="0">
+              <a:rPr sz="1100" b="0" i="0">
                 <a:solidFill>
                   <a:srgbClr val="C89B3C"/>
                 </a:solidFill>
@@ -3546,8 +3546,8 @@
         </p:nvSpPr>
         <p:spPr>
           <a:xfrm>
-            <a:off x="320040" y="1371600"/>
-            <a:ext cx="3657600" cy="1920240"/>
+            <a:off x="228600" y="1170432"/>
+            <a:ext cx="3749039" cy="1828800"/>
           </a:xfrm>
           <a:prstGeom prst="rect">
             <a:avLst/>
@@ -3591,16 +3591,16 @@
         </p:nvSpPr>
         <p:spPr>
           <a:xfrm>
-            <a:off x="457200" y="1481328"/>
-            <a:ext cx="3383280" cy="411480"/>
-          </a:xfrm>
-          <a:prstGeom prst="rect">
-            <a:avLst/>
-          </a:prstGeom>
-          <a:noFill/>
-        </p:spPr>
-        <p:txBody>
-          <a:bodyPr wrap="square">
+            <a:off x="356616" y="1261872"/>
+            <a:ext cx="3493007" cy="384048"/>
+          </a:xfrm>
+          <a:prstGeom prst="rect">
+            <a:avLst/>
+          </a:prstGeom>
+          <a:noFill/>
+        </p:spPr>
+        <p:txBody>
+          <a:bodyPr wrap="square" tIns="0" bIns="0" lIns="25400" rIns="25400">
             <a:spAutoFit/>
           </a:bodyPr>
           <a:lstStyle/>
@@ -3625,8 +3625,8 @@
         </p:nvSpPr>
         <p:spPr>
           <a:xfrm>
-            <a:off x="320040" y="1847088"/>
-            <a:ext cx="3657600" cy="36576"/>
+            <a:off x="228600" y="1645920"/>
+            <a:ext cx="3749039" cy="36576"/>
           </a:xfrm>
           <a:prstGeom prst="rect">
             <a:avLst/>
@@ -3668,23 +3668,23 @@
         </p:nvSpPr>
         <p:spPr>
           <a:xfrm>
-            <a:off x="457200" y="1965960"/>
-            <a:ext cx="3383280" cy="1097280"/>
-          </a:xfrm>
-          <a:prstGeom prst="rect">
-            <a:avLst/>
-          </a:prstGeom>
-          <a:noFill/>
-        </p:spPr>
-        <p:txBody>
-          <a:bodyPr wrap="square">
+            <a:off x="356616" y="1737360"/>
+            <a:ext cx="3493007" cy="1170432"/>
+          </a:xfrm>
+          <a:prstGeom prst="rect">
+            <a:avLst/>
+          </a:prstGeom>
+          <a:noFill/>
+        </p:spPr>
+        <p:txBody>
+          <a:bodyPr wrap="square" tIns="0" bIns="0" lIns="25400" rIns="25400">
             <a:spAutoFit/>
           </a:bodyPr>
           <a:lstStyle/>
           <a:p>
             <a:pPr algn="l"/>
             <a:r>
-              <a:rPr sz="1300" b="0" i="0">
+              <a:rPr sz="1200" b="0" i="0">
                 <a:solidFill>
                   <a:srgbClr val="1A1A2E"/>
                 </a:solidFill>
@@ -3702,8 +3702,8 @@
         </p:nvSpPr>
         <p:spPr>
           <a:xfrm>
-            <a:off x="4251959" y="1371600"/>
-            <a:ext cx="3657600" cy="1920240"/>
+            <a:off x="4096512" y="1170432"/>
+            <a:ext cx="3749039" cy="1828800"/>
           </a:xfrm>
           <a:prstGeom prst="rect">
             <a:avLst/>
@@ -3747,16 +3747,16 @@
         </p:nvSpPr>
         <p:spPr>
           <a:xfrm>
-            <a:off x="4389120" y="1481328"/>
-            <a:ext cx="3383280" cy="411480"/>
-          </a:xfrm>
-          <a:prstGeom prst="rect">
-            <a:avLst/>
-          </a:prstGeom>
-          <a:noFill/>
-        </p:spPr>
-        <p:txBody>
-          <a:bodyPr wrap="square">
+            <a:off x="4224528" y="1261872"/>
+            <a:ext cx="3493007" cy="384048"/>
+          </a:xfrm>
+          <a:prstGeom prst="rect">
+            <a:avLst/>
+          </a:prstGeom>
+          <a:noFill/>
+        </p:spPr>
+        <p:txBody>
+          <a:bodyPr wrap="square" tIns="0" bIns="0" lIns="25400" rIns="25400">
             <a:spAutoFit/>
           </a:bodyPr>
           <a:lstStyle/>
@@ -3781,8 +3781,8 @@
         </p:nvSpPr>
         <p:spPr>
           <a:xfrm>
-            <a:off x="4251959" y="1847088"/>
-            <a:ext cx="3657600" cy="36576"/>
+            <a:off x="4096512" y="1645920"/>
+            <a:ext cx="3749039" cy="36576"/>
           </a:xfrm>
           <a:prstGeom prst="rect">
             <a:avLst/>
@@ -3824,29 +3824,29 @@
         </p:nvSpPr>
         <p:spPr>
           <a:xfrm>
-            <a:off x="4389120" y="1965960"/>
-            <a:ext cx="3383280" cy="1097280"/>
-          </a:xfrm>
-          <a:prstGeom prst="rect">
-            <a:avLst/>
-          </a:prstGeom>
-          <a:noFill/>
-        </p:spPr>
-        <p:txBody>
-          <a:bodyPr wrap="square">
+            <a:off x="4224528" y="1737360"/>
+            <a:ext cx="3493007" cy="1170432"/>
+          </a:xfrm>
+          <a:prstGeom prst="rect">
+            <a:avLst/>
+          </a:prstGeom>
+          <a:noFill/>
+        </p:spPr>
+        <p:txBody>
+          <a:bodyPr wrap="square" tIns="0" bIns="0" lIns="25400" rIns="25400">
             <a:spAutoFit/>
           </a:bodyPr>
           <a:lstStyle/>
           <a:p>
             <a:pPr algn="l"/>
             <a:r>
-              <a:rPr sz="1300" b="0" i="0">
+              <a:rPr sz="1200" b="0" i="0">
                 <a:solidFill>
                   <a:srgbClr val="1A1A2E"/>
                 </a:solidFill>
               </a:rPr>
               <a:t>大人10名・子供4名
-計14名</a:t>
+計 14名</a:t>
             </a:r>
           </a:p>
         </p:txBody>
@@ -3859,8 +3859,8 @@
         </p:nvSpPr>
         <p:spPr>
           <a:xfrm>
-            <a:off x="8183879" y="1371600"/>
-            <a:ext cx="3657600" cy="1920240"/>
+            <a:off x="7964424" y="1170432"/>
+            <a:ext cx="3749039" cy="1828800"/>
           </a:xfrm>
           <a:prstGeom prst="rect">
             <a:avLst/>
@@ -3904,16 +3904,16 @@
         </p:nvSpPr>
         <p:spPr>
           <a:xfrm>
-            <a:off x="8321040" y="1481328"/>
-            <a:ext cx="3383280" cy="411480"/>
-          </a:xfrm>
-          <a:prstGeom prst="rect">
-            <a:avLst/>
-          </a:prstGeom>
-          <a:noFill/>
-        </p:spPr>
-        <p:txBody>
-          <a:bodyPr wrap="square">
+            <a:off x="8092440" y="1261872"/>
+            <a:ext cx="3493007" cy="384048"/>
+          </a:xfrm>
+          <a:prstGeom prst="rect">
+            <a:avLst/>
+          </a:prstGeom>
+          <a:noFill/>
+        </p:spPr>
+        <p:txBody>
+          <a:bodyPr wrap="square" tIns="0" bIns="0" lIns="25400" rIns="25400">
             <a:spAutoFit/>
           </a:bodyPr>
           <a:lstStyle/>
@@ -3938,8 +3938,8 @@
         </p:nvSpPr>
         <p:spPr>
           <a:xfrm>
-            <a:off x="8183879" y="1847088"/>
-            <a:ext cx="3657600" cy="36576"/>
+            <a:off x="7964424" y="1645920"/>
+            <a:ext cx="3749039" cy="36576"/>
           </a:xfrm>
           <a:prstGeom prst="rect">
             <a:avLst/>
@@ -3981,29 +3981,28 @@
         </p:nvSpPr>
         <p:spPr>
           <a:xfrm>
-            <a:off x="8321040" y="1965960"/>
-            <a:ext cx="3383280" cy="1097280"/>
-          </a:xfrm>
-          <a:prstGeom prst="rect">
-            <a:avLst/>
-          </a:prstGeom>
-          <a:noFill/>
-        </p:spPr>
-        <p:txBody>
-          <a:bodyPr wrap="square">
+            <a:off x="8092440" y="1737360"/>
+            <a:ext cx="3493007" cy="1170432"/>
+          </a:xfrm>
+          <a:prstGeom prst="rect">
+            <a:avLst/>
+          </a:prstGeom>
+          <a:noFill/>
+        </p:spPr>
+        <p:txBody>
+          <a:bodyPr wrap="square" tIns="0" bIns="0" lIns="25400" rIns="25400">
             <a:spAutoFit/>
           </a:bodyPr>
           <a:lstStyle/>
           <a:p>
             <a:pPr algn="l"/>
             <a:r>
-              <a:rPr sz="1300" b="0" i="0">
+              <a:rPr sz="1200" b="0" i="0">
                 <a:solidFill>
                   <a:srgbClr val="1A1A2E"/>
                 </a:solidFill>
               </a:rPr>
-              <a:t>兵庫県
-加古川・明石周辺</a:t>
+              <a:t>兵庫県 加古川・明石周辺</a:t>
             </a:r>
           </a:p>
         </p:txBody>
@@ -4016,8 +4015,8 @@
         </p:nvSpPr>
         <p:spPr>
           <a:xfrm>
-            <a:off x="320040" y="3657600"/>
-            <a:ext cx="3657600" cy="1920240"/>
+            <a:off x="228600" y="3127248"/>
+            <a:ext cx="3749039" cy="1828800"/>
           </a:xfrm>
           <a:prstGeom prst="rect">
             <a:avLst/>
@@ -4061,16 +4060,16 @@
         </p:nvSpPr>
         <p:spPr>
           <a:xfrm>
-            <a:off x="457200" y="3767328"/>
-            <a:ext cx="3383280" cy="411480"/>
-          </a:xfrm>
-          <a:prstGeom prst="rect">
-            <a:avLst/>
-          </a:prstGeom>
-          <a:noFill/>
-        </p:spPr>
-        <p:txBody>
-          <a:bodyPr wrap="square">
+            <a:off x="356616" y="3218688"/>
+            <a:ext cx="3493007" cy="384048"/>
+          </a:xfrm>
+          <a:prstGeom prst="rect">
+            <a:avLst/>
+          </a:prstGeom>
+          <a:noFill/>
+        </p:spPr>
+        <p:txBody>
+          <a:bodyPr wrap="square" tIns="0" bIns="0" lIns="25400" rIns="25400">
             <a:spAutoFit/>
           </a:bodyPr>
           <a:lstStyle/>
@@ -4095,8 +4094,8 @@
         </p:nvSpPr>
         <p:spPr>
           <a:xfrm>
-            <a:off x="320040" y="4133087"/>
-            <a:ext cx="3657600" cy="36576"/>
+            <a:off x="228600" y="3602736"/>
+            <a:ext cx="3749039" cy="36576"/>
           </a:xfrm>
           <a:prstGeom prst="rect">
             <a:avLst/>
@@ -4138,28 +4137,28 @@
         </p:nvSpPr>
         <p:spPr>
           <a:xfrm>
-            <a:off x="457200" y="4251960"/>
-            <a:ext cx="3383280" cy="1097280"/>
-          </a:xfrm>
-          <a:prstGeom prst="rect">
-            <a:avLst/>
-          </a:prstGeom>
-          <a:noFill/>
-        </p:spPr>
-        <p:txBody>
-          <a:bodyPr wrap="square">
+            <a:off x="356616" y="3694176"/>
+            <a:ext cx="3493007" cy="1170432"/>
+          </a:xfrm>
+          <a:prstGeom prst="rect">
+            <a:avLst/>
+          </a:prstGeom>
+          <a:noFill/>
+        </p:spPr>
+        <p:txBody>
+          <a:bodyPr wrap="square" tIns="0" bIns="0" lIns="25400" rIns="25400">
             <a:spAutoFit/>
           </a:bodyPr>
           <a:lstStyle/>
           <a:p>
             <a:pPr algn="l"/>
             <a:r>
-              <a:rPr sz="1300" b="0" i="0">
+              <a:rPr sz="1200" b="0" i="0">
                 <a:solidFill>
                   <a:srgbClr val="1A1A2E"/>
                 </a:solidFill>
               </a:rPr>
-              <a:t>自前の集まれる場所なし
+              <a:t>自前の場所なし
 会場は別途確保が必要</a:t>
             </a:r>
           </a:p>
@@ -4173,8 +4172,8 @@
         </p:nvSpPr>
         <p:spPr>
           <a:xfrm>
-            <a:off x="4251959" y="3657600"/>
-            <a:ext cx="3657600" cy="1920240"/>
+            <a:off x="4096512" y="3127248"/>
+            <a:ext cx="3749039" cy="1828800"/>
           </a:xfrm>
           <a:prstGeom prst="rect">
             <a:avLst/>
@@ -4218,16 +4217,16 @@
         </p:nvSpPr>
         <p:spPr>
           <a:xfrm>
-            <a:off x="4389120" y="3767328"/>
-            <a:ext cx="3383280" cy="411480"/>
-          </a:xfrm>
-          <a:prstGeom prst="rect">
-            <a:avLst/>
-          </a:prstGeom>
-          <a:noFill/>
-        </p:spPr>
-        <p:txBody>
-          <a:bodyPr wrap="square">
+            <a:off x="4224528" y="3218688"/>
+            <a:ext cx="3493007" cy="384048"/>
+          </a:xfrm>
+          <a:prstGeom prst="rect">
+            <a:avLst/>
+          </a:prstGeom>
+          <a:noFill/>
+        </p:spPr>
+        <p:txBody>
+          <a:bodyPr wrap="square" tIns="0" bIns="0" lIns="25400" rIns="25400">
             <a:spAutoFit/>
           </a:bodyPr>
           <a:lstStyle/>
@@ -4252,8 +4251,8 @@
         </p:nvSpPr>
         <p:spPr>
           <a:xfrm>
-            <a:off x="4251959" y="4133087"/>
-            <a:ext cx="3657600" cy="36576"/>
+            <a:off x="4096512" y="3602736"/>
+            <a:ext cx="3749039" cy="36576"/>
           </a:xfrm>
           <a:prstGeom prst="rect">
             <a:avLst/>
@@ -4295,23 +4294,23 @@
         </p:nvSpPr>
         <p:spPr>
           <a:xfrm>
-            <a:off x="4389120" y="4251960"/>
-            <a:ext cx="3383280" cy="1097280"/>
-          </a:xfrm>
-          <a:prstGeom prst="rect">
-            <a:avLst/>
-          </a:prstGeom>
-          <a:noFill/>
-        </p:spPr>
-        <p:txBody>
-          <a:bodyPr wrap="square">
+            <a:off x="4224528" y="3694176"/>
+            <a:ext cx="3493007" cy="1170432"/>
+          </a:xfrm>
+          <a:prstGeom prst="rect">
+            <a:avLst/>
+          </a:prstGeom>
+          <a:noFill/>
+        </p:spPr>
+        <p:txBody>
+          <a:bodyPr wrap="square" tIns="0" bIns="0" lIns="25400" rIns="25400">
             <a:spAutoFit/>
           </a:bodyPr>
           <a:lstStyle/>
           <a:p>
             <a:pPr algn="l"/>
             <a:r>
-              <a:rPr sz="1300" b="0" i="0">
+              <a:rPr sz="1200" b="0" i="0">
                 <a:solidFill>
                   <a:srgbClr val="1A1A2E"/>
                 </a:solidFill>
@@ -4330,8 +4329,8 @@
         </p:nvSpPr>
         <p:spPr>
           <a:xfrm>
-            <a:off x="8183879" y="3657600"/>
-            <a:ext cx="3657600" cy="1920240"/>
+            <a:off x="7964424" y="3127248"/>
+            <a:ext cx="3749039" cy="1828800"/>
           </a:xfrm>
           <a:prstGeom prst="rect">
             <a:avLst/>
@@ -4375,16 +4374,16 @@
         </p:nvSpPr>
         <p:spPr>
           <a:xfrm>
-            <a:off x="8321040" y="3767328"/>
-            <a:ext cx="3383280" cy="411480"/>
-          </a:xfrm>
-          <a:prstGeom prst="rect">
-            <a:avLst/>
-          </a:prstGeom>
-          <a:noFill/>
-        </p:spPr>
-        <p:txBody>
-          <a:bodyPr wrap="square">
+            <a:off x="8092440" y="3218688"/>
+            <a:ext cx="3493007" cy="384048"/>
+          </a:xfrm>
+          <a:prstGeom prst="rect">
+            <a:avLst/>
+          </a:prstGeom>
+          <a:noFill/>
+        </p:spPr>
+        <p:txBody>
+          <a:bodyPr wrap="square" tIns="0" bIns="0" lIns="25400" rIns="25400">
             <a:spAutoFit/>
           </a:bodyPr>
           <a:lstStyle/>
@@ -4409,8 +4408,8 @@
         </p:nvSpPr>
         <p:spPr>
           <a:xfrm>
-            <a:off x="8183879" y="4133087"/>
-            <a:ext cx="3657600" cy="36576"/>
+            <a:off x="7964424" y="3602736"/>
+            <a:ext cx="3749039" cy="36576"/>
           </a:xfrm>
           <a:prstGeom prst="rect">
             <a:avLst/>
@@ -4452,23 +4451,23 @@
         </p:nvSpPr>
         <p:spPr>
           <a:xfrm>
-            <a:off x="8321040" y="4251960"/>
-            <a:ext cx="3383280" cy="1097280"/>
-          </a:xfrm>
-          <a:prstGeom prst="rect">
-            <a:avLst/>
-          </a:prstGeom>
-          <a:noFill/>
-        </p:spPr>
-        <p:txBody>
-          <a:bodyPr wrap="square">
+            <a:off x="8092440" y="3694176"/>
+            <a:ext cx="3493007" cy="1170432"/>
+          </a:xfrm>
+          <a:prstGeom prst="rect">
+            <a:avLst/>
+          </a:prstGeom>
+          <a:noFill/>
+        </p:spPr>
+        <p:txBody>
+          <a:bodyPr wrap="square" tIns="0" bIns="0" lIns="25400" rIns="25400">
             <a:spAutoFit/>
           </a:bodyPr>
           <a:lstStyle/>
           <a:p>
             <a:pPr algn="l"/>
             <a:r>
-              <a:rPr sz="1300" b="0" i="0">
+              <a:rPr sz="1200" b="0" i="0">
                 <a:solidFill>
                   <a:srgbClr val="1A1A2E"/>
                 </a:solidFill>
@@ -4599,23 +4598,23 @@
         </p:nvSpPr>
         <p:spPr>
           <a:xfrm>
-            <a:off x="365760" y="109728"/>
-            <a:ext cx="9144000" cy="640080"/>
-          </a:xfrm>
-          <a:prstGeom prst="rect">
-            <a:avLst/>
-          </a:prstGeom>
-          <a:noFill/>
-        </p:spPr>
-        <p:txBody>
-          <a:bodyPr wrap="square">
+            <a:off x="320040" y="91440"/>
+            <a:ext cx="11430000" cy="566928"/>
+          </a:xfrm>
+          <a:prstGeom prst="rect">
+            <a:avLst/>
+          </a:prstGeom>
+          <a:noFill/>
+        </p:spPr>
+        <p:txBody>
+          <a:bodyPr wrap="square" tIns="0" bIns="0" lIns="25400" rIns="25400">
             <a:spAutoFit/>
           </a:bodyPr>
           <a:lstStyle/>
           <a:p>
             <a:pPr algn="l"/>
             <a:r>
-              <a:rPr sz="2600" b="1" i="0">
+              <a:rPr sz="2400" b="1" i="0">
                 <a:solidFill>
                   <a:srgbClr val="FFFFFF"/>
                 </a:solidFill>
@@ -4633,23 +4632,23 @@
         </p:nvSpPr>
         <p:spPr>
           <a:xfrm>
-            <a:off x="365760" y="621792"/>
-            <a:ext cx="9144000" cy="365760"/>
-          </a:xfrm>
-          <a:prstGeom prst="rect">
-            <a:avLst/>
-          </a:prstGeom>
-          <a:noFill/>
-        </p:spPr>
-        <p:txBody>
-          <a:bodyPr wrap="square">
+            <a:off x="320040" y="621792"/>
+            <a:ext cx="11430000" cy="329184"/>
+          </a:xfrm>
+          <a:prstGeom prst="rect">
+            <a:avLst/>
+          </a:prstGeom>
+          <a:noFill/>
+        </p:spPr>
+        <p:txBody>
+          <a:bodyPr wrap="square" tIns="0" bIns="0" lIns="25400" rIns="25400">
             <a:spAutoFit/>
           </a:bodyPr>
           <a:lstStyle/>
           <a:p>
             <a:pPr algn="l"/>
             <a:r>
-              <a:rPr sz="1200" b="0" i="0">
+              <a:rPr sz="1100" b="0" i="0">
                 <a:solidFill>
                   <a:srgbClr val="C89B3C"/>
                 </a:solidFill>
@@ -4667,8 +4666,8 @@
         </p:nvSpPr>
         <p:spPr>
           <a:xfrm>
-            <a:off x="274320" y="1188720"/>
-            <a:ext cx="3840480" cy="5303520"/>
+            <a:off x="228600" y="1170432"/>
+            <a:ext cx="3749039" cy="5486400"/>
           </a:xfrm>
           <a:prstGeom prst="rect">
             <a:avLst/>
@@ -4712,28 +4711,28 @@
         </p:nvSpPr>
         <p:spPr>
           <a:xfrm>
-            <a:off x="411480" y="1280160"/>
-            <a:ext cx="3566160" cy="411480"/>
-          </a:xfrm>
-          <a:prstGeom prst="rect">
-            <a:avLst/>
-          </a:prstGeom>
-          <a:noFill/>
-        </p:spPr>
-        <p:txBody>
-          <a:bodyPr wrap="square">
+            <a:off x="356616" y="1261872"/>
+            <a:ext cx="3493007" cy="365760"/>
+          </a:xfrm>
+          <a:prstGeom prst="rect">
+            <a:avLst/>
+          </a:prstGeom>
+          <a:noFill/>
+        </p:spPr>
+        <p:txBody>
+          <a:bodyPr wrap="square" tIns="0" bIns="0" lIns="25400" rIns="25400">
             <a:spAutoFit/>
           </a:bodyPr>
           <a:lstStyle/>
           <a:p>
             <a:pPr algn="l"/>
             <a:r>
-              <a:rPr sz="1400" b="1" i="0">
+              <a:rPr sz="1300" b="1" i="0">
                 <a:solidFill>
                   <a:srgbClr val="216BAE"/>
                 </a:solidFill>
               </a:rPr>
-              <a:t>特徴</a:t>
+              <a:t>プランAの特徴</a:t>
             </a:r>
           </a:p>
         </p:txBody>
@@ -4746,8 +4745,8 @@
         </p:nvSpPr>
         <p:spPr>
           <a:xfrm>
-            <a:off x="274320" y="1664208"/>
-            <a:ext cx="3840480" cy="36576"/>
+            <a:off x="228600" y="1627632"/>
+            <a:ext cx="3749039" cy="36576"/>
           </a:xfrm>
           <a:prstGeom prst="rect">
             <a:avLst/>
@@ -4789,28 +4788,28 @@
         </p:nvSpPr>
         <p:spPr>
           <a:xfrm>
-            <a:off x="457200" y="1783080"/>
-            <a:ext cx="3474720" cy="438912"/>
-          </a:xfrm>
-          <a:prstGeom prst="rect">
-            <a:avLst/>
-          </a:prstGeom>
-          <a:noFill/>
-        </p:spPr>
-        <p:txBody>
-          <a:bodyPr wrap="square">
+            <a:off x="356616" y="1764792"/>
+            <a:ext cx="3493007" cy="475488"/>
+          </a:xfrm>
+          <a:prstGeom prst="rect">
+            <a:avLst/>
+          </a:prstGeom>
+          <a:noFill/>
+        </p:spPr>
+        <p:txBody>
+          <a:bodyPr wrap="square" tIns="0" bIns="0" lIns="25400" rIns="25400">
             <a:spAutoFit/>
           </a:bodyPr>
           <a:lstStyle/>
           <a:p>
             <a:pPr algn="l"/>
             <a:r>
-              <a:rPr sz="1200" b="0" i="0">
+              <a:rPr sz="1100" b="0" i="0">
                 <a:solidFill>
                   <a:srgbClr val="277D52"/>
                 </a:solidFill>
               </a:rPr>
-              <a:t>◎ コストが最も安い</a:t>
+              <a:t>◎  コストが最も安い</a:t>
             </a:r>
           </a:p>
         </p:txBody>
@@ -4823,28 +4822,28 @@
         </p:nvSpPr>
         <p:spPr>
           <a:xfrm>
-            <a:off x="457200" y="2286000"/>
-            <a:ext cx="3474720" cy="438912"/>
-          </a:xfrm>
-          <a:prstGeom prst="rect">
-            <a:avLst/>
-          </a:prstGeom>
-          <a:noFill/>
-        </p:spPr>
-        <p:txBody>
-          <a:bodyPr wrap="square">
+            <a:off x="356616" y="2340864"/>
+            <a:ext cx="3493007" cy="475488"/>
+          </a:xfrm>
+          <a:prstGeom prst="rect">
+            <a:avLst/>
+          </a:prstGeom>
+          <a:noFill/>
+        </p:spPr>
+        <p:txBody>
+          <a:bodyPr wrap="square" tIns="0" bIns="0" lIns="25400" rIns="25400">
             <a:spAutoFit/>
           </a:bodyPr>
           <a:lstStyle/>
           <a:p>
             <a:pPr algn="l"/>
             <a:r>
-              <a:rPr sz="1200" b="0" i="0">
+              <a:rPr sz="1100" b="0" i="0">
                 <a:solidFill>
                   <a:srgbClr val="277D52"/>
                 </a:solidFill>
               </a:rPr>
-              <a:t>◎ 時間を自由に使える</a:t>
+              <a:t>◎  時間を自由に使える</a:t>
             </a:r>
           </a:p>
         </p:txBody>
@@ -4857,28 +4856,28 @@
         </p:nvSpPr>
         <p:spPr>
           <a:xfrm>
-            <a:off x="457200" y="2788920"/>
-            <a:ext cx="3474720" cy="438912"/>
-          </a:xfrm>
-          <a:prstGeom prst="rect">
-            <a:avLst/>
-          </a:prstGeom>
-          <a:noFill/>
-        </p:spPr>
-        <p:txBody>
-          <a:bodyPr wrap="square">
+            <a:off x="356616" y="2916936"/>
+            <a:ext cx="3493007" cy="475488"/>
+          </a:xfrm>
+          <a:prstGeom prst="rect">
+            <a:avLst/>
+          </a:prstGeom>
+          <a:noFill/>
+        </p:spPr>
+        <p:txBody>
+          <a:bodyPr wrap="square" tIns="0" bIns="0" lIns="25400" rIns="25400">
             <a:spAutoFit/>
           </a:bodyPr>
           <a:lstStyle/>
           <a:p>
             <a:pPr algn="l"/>
             <a:r>
-              <a:rPr sz="1200" b="0" i="0">
+              <a:rPr sz="1100" b="0" i="0">
                 <a:solidFill>
                   <a:srgbClr val="277D52"/>
                 </a:solidFill>
               </a:rPr>
-              <a:t>◎ トランプ・ゲームOK</a:t>
+              <a:t>◎  トランプ・ゲームOK</a:t>
             </a:r>
           </a:p>
         </p:txBody>
@@ -4891,28 +4890,28 @@
         </p:nvSpPr>
         <p:spPr>
           <a:xfrm>
-            <a:off x="457200" y="3291840"/>
-            <a:ext cx="3474720" cy="438912"/>
-          </a:xfrm>
-          <a:prstGeom prst="rect">
-            <a:avLst/>
-          </a:prstGeom>
-          <a:noFill/>
-        </p:spPr>
-        <p:txBody>
-          <a:bodyPr wrap="square">
+            <a:off x="356616" y="3493008"/>
+            <a:ext cx="3493007" cy="475488"/>
+          </a:xfrm>
+          <a:prstGeom prst="rect">
+            <a:avLst/>
+          </a:prstGeom>
+          <a:noFill/>
+        </p:spPr>
+        <p:txBody>
+          <a:bodyPr wrap="square" tIns="0" bIns="0" lIns="25400" rIns="25400">
             <a:spAutoFit/>
           </a:bodyPr>
           <a:lstStyle/>
           <a:p>
             <a:pPr algn="l"/>
             <a:r>
-              <a:rPr sz="1200" b="0" i="0">
+              <a:rPr sz="1100" b="0" i="0">
                 <a:solidFill>
                   <a:srgbClr val="277D52"/>
                 </a:solidFill>
               </a:rPr>
-              <a:t>◎ 子供が騒いでも大丈夫</a:t>
+              <a:t>◎  子供が騒いでも大丈夫</a:t>
             </a:r>
           </a:p>
         </p:txBody>
@@ -4925,28 +4924,28 @@
         </p:nvSpPr>
         <p:spPr>
           <a:xfrm>
-            <a:off x="457200" y="3794760"/>
-            <a:ext cx="3474720" cy="438912"/>
-          </a:xfrm>
-          <a:prstGeom prst="rect">
-            <a:avLst/>
-          </a:prstGeom>
-          <a:noFill/>
-        </p:spPr>
-        <p:txBody>
-          <a:bodyPr wrap="square">
+            <a:off x="356616" y="4069080"/>
+            <a:ext cx="3493007" cy="475488"/>
+          </a:xfrm>
+          <a:prstGeom prst="rect">
+            <a:avLst/>
+          </a:prstGeom>
+          <a:noFill/>
+        </p:spPr>
+        <p:txBody>
+          <a:bodyPr wrap="square" tIns="0" bIns="0" lIns="25400" rIns="25400">
             <a:spAutoFit/>
           </a:bodyPr>
           <a:lstStyle/>
           <a:p>
             <a:pPr algn="l"/>
             <a:r>
-              <a:rPr sz="1200" b="0" i="0">
+              <a:rPr sz="1100" b="0" i="0">
                 <a:solidFill>
                   <a:srgbClr val="277D52"/>
                 </a:solidFill>
               </a:rPr>
-              <a:t>◎ 持込自由</a:t>
+              <a:t>◎  飲食物の持込自由</a:t>
             </a:r>
           </a:p>
         </p:txBody>
@@ -4959,28 +4958,28 @@
         </p:nvSpPr>
         <p:spPr>
           <a:xfrm>
-            <a:off x="457200" y="4297680"/>
-            <a:ext cx="3474720" cy="438912"/>
-          </a:xfrm>
-          <a:prstGeom prst="rect">
-            <a:avLst/>
-          </a:prstGeom>
-          <a:noFill/>
-        </p:spPr>
-        <p:txBody>
-          <a:bodyPr wrap="square">
+            <a:off x="356616" y="4645152"/>
+            <a:ext cx="3493007" cy="475488"/>
+          </a:xfrm>
+          <a:prstGeom prst="rect">
+            <a:avLst/>
+          </a:prstGeom>
+          <a:noFill/>
+        </p:spPr>
+        <p:txBody>
+          <a:bodyPr wrap="square" tIns="0" bIns="0" lIns="25400" rIns="25400">
             <a:spAutoFit/>
           </a:bodyPr>
           <a:lstStyle/>
           <a:p>
             <a:pPr algn="l"/>
             <a:r>
-              <a:rPr sz="1200" b="0" i="0">
+              <a:rPr sz="1100" b="0" i="0">
                 <a:solidFill>
                   <a:srgbClr val="6C757D"/>
                 </a:solidFill>
               </a:rPr>
-              <a:t>△ 食事・飲み物の手配が必要</a:t>
+              <a:t>△  食事・飲み物の手配が必要</a:t>
             </a:r>
           </a:p>
         </p:txBody>
@@ -4993,28 +4992,28 @@
         </p:nvSpPr>
         <p:spPr>
           <a:xfrm>
-            <a:off x="457200" y="4800600"/>
-            <a:ext cx="3474720" cy="438912"/>
-          </a:xfrm>
-          <a:prstGeom prst="rect">
-            <a:avLst/>
-          </a:prstGeom>
-          <a:noFill/>
-        </p:spPr>
-        <p:txBody>
-          <a:bodyPr wrap="square">
+            <a:off x="356616" y="5221224"/>
+            <a:ext cx="3493007" cy="475488"/>
+          </a:xfrm>
+          <a:prstGeom prst="rect">
+            <a:avLst/>
+          </a:prstGeom>
+          <a:noFill/>
+        </p:spPr>
+        <p:txBody>
+          <a:bodyPr wrap="square" tIns="0" bIns="0" lIns="25400" rIns="25400">
             <a:spAutoFit/>
           </a:bodyPr>
           <a:lstStyle/>
           <a:p>
             <a:pPr algn="l"/>
             <a:r>
-              <a:rPr sz="1200" b="0" i="0">
+              <a:rPr sz="1100" b="0" i="0">
                 <a:solidFill>
                   <a:srgbClr val="6C757D"/>
                 </a:solidFill>
               </a:rPr>
-              <a:t>△ 準備・片付けが発生</a:t>
+              <a:t>△  準備・片付けが発生</a:t>
             </a:r>
           </a:p>
         </p:txBody>
@@ -5027,28 +5026,28 @@
         </p:nvSpPr>
         <p:spPr>
           <a:xfrm>
-            <a:off x="457200" y="5303520"/>
-            <a:ext cx="3474720" cy="438912"/>
-          </a:xfrm>
-          <a:prstGeom prst="rect">
-            <a:avLst/>
-          </a:prstGeom>
-          <a:noFill/>
-        </p:spPr>
-        <p:txBody>
-          <a:bodyPr wrap="square">
+            <a:off x="356616" y="5797296"/>
+            <a:ext cx="3493007" cy="475488"/>
+          </a:xfrm>
+          <a:prstGeom prst="rect">
+            <a:avLst/>
+          </a:prstGeom>
+          <a:noFill/>
+        </p:spPr>
+        <p:txBody>
+          <a:bodyPr wrap="square" tIns="0" bIns="0" lIns="25400" rIns="25400">
             <a:spAutoFit/>
           </a:bodyPr>
           <a:lstStyle/>
           <a:p>
             <a:pPr algn="l"/>
             <a:r>
-              <a:rPr sz="1200" b="0" i="0">
+              <a:rPr sz="1100" b="0" i="0">
                 <a:solidFill>
                   <a:srgbClr val="6C757D"/>
                 </a:solidFill>
               </a:rPr>
-              <a:t>△ 正月の選択肢は限られる</a:t>
+              <a:t>△  正月は選択肢が限られる</a:t>
             </a:r>
           </a:p>
         </p:txBody>
@@ -5061,8 +5060,8 @@
         </p:nvSpPr>
         <p:spPr>
           <a:xfrm>
-            <a:off x="4343400" y="1188720"/>
-            <a:ext cx="7498079" cy="1691640"/>
+            <a:off x="4160520" y="1170432"/>
+            <a:ext cx="7818120" cy="1664208"/>
           </a:xfrm>
           <a:prstGeom prst="rect">
             <a:avLst/>
@@ -5070,7 +5069,7 @@
           <a:solidFill>
             <a:srgbClr val="FFF3CD"/>
           </a:solidFill>
-          <a:ln w="19050">
+          <a:ln w="25400">
             <a:solidFill>
               <a:srgbClr val="C89B3C"/>
             </a:solidFill>
@@ -5106,8 +5105,8 @@
         </p:nvSpPr>
         <p:spPr>
           <a:xfrm>
-            <a:off x="10607040" y="1261872"/>
-            <a:ext cx="1143000" cy="256032"/>
+            <a:off x="10789920" y="1261872"/>
+            <a:ext cx="1115568" cy="256032"/>
           </a:xfrm>
           <a:prstGeom prst="rect">
             <a:avLst/>
@@ -5134,7 +5133,7 @@
           </a:fontRef>
         </p:style>
         <p:txBody>
-          <a:bodyPr rtlCol="0" anchor="ctr" wrap="none"/>
+          <a:bodyPr rtlCol="0" anchor="ctr" wrap="none" tIns="0" bIns="0"/>
           <a:lstStyle/>
           <a:p>
             <a:pPr algn="ctr"/>
@@ -5157,16 +5156,16 @@
         </p:nvSpPr>
         <p:spPr>
           <a:xfrm>
-            <a:off x="4480560" y="1261872"/>
-            <a:ext cx="5943600" cy="384048"/>
-          </a:xfrm>
-          <a:prstGeom prst="rect">
-            <a:avLst/>
-          </a:prstGeom>
-          <a:noFill/>
-        </p:spPr>
-        <p:txBody>
-          <a:bodyPr wrap="square">
+            <a:off x="4297680" y="1243584"/>
+            <a:ext cx="6446520" cy="365760"/>
+          </a:xfrm>
+          <a:prstGeom prst="rect">
+            <a:avLst/>
+          </a:prstGeom>
+          <a:noFill/>
+        </p:spPr>
+        <p:txBody>
+          <a:bodyPr wrap="square" tIns="0" bIns="0" lIns="25400" rIns="25400">
             <a:spAutoFit/>
           </a:bodyPr>
           <a:lstStyle/>
@@ -5191,16 +5190,16 @@
         </p:nvSpPr>
         <p:spPr>
           <a:xfrm>
-            <a:off x="4480560" y="1627632"/>
-            <a:ext cx="7132320" cy="274320"/>
-          </a:xfrm>
-          <a:prstGeom prst="rect">
-            <a:avLst/>
-          </a:prstGeom>
-          <a:noFill/>
-        </p:spPr>
-        <p:txBody>
-          <a:bodyPr wrap="square">
+            <a:off x="4297680" y="1627632"/>
+            <a:ext cx="7543800" cy="274320"/>
+          </a:xfrm>
+          <a:prstGeom prst="rect">
+            <a:avLst/>
+          </a:prstGeom>
+          <a:noFill/>
+        </p:spPr>
+        <p:txBody>
+          <a:bodyPr wrap="square" tIns="0" bIns="0" lIns="25400" rIns="25400">
             <a:spAutoFit/>
           </a:bodyPr>
           <a:lstStyle/>
@@ -5212,7 +5211,7 @@
                   <a:srgbClr val="6C757D"/>
                 </a:solidFill>
               </a:rPr>
-              <a:t>加古川駅 徒歩8分 ｜ インスタベース掲載</a:t>
+              <a:t>加古川駅 徒歩8分｜インスタベース掲載</a:t>
             </a:r>
           </a:p>
         </p:txBody>
@@ -5225,16 +5224,16 @@
         </p:nvSpPr>
         <p:spPr>
           <a:xfrm>
-            <a:off x="4480560" y="1901952"/>
-            <a:ext cx="7132320" cy="320040"/>
-          </a:xfrm>
-          <a:prstGeom prst="rect">
-            <a:avLst/>
-          </a:prstGeom>
-          <a:noFill/>
-        </p:spPr>
-        <p:txBody>
-          <a:bodyPr wrap="square">
+            <a:off x="4297680" y="1920240"/>
+            <a:ext cx="7543800" cy="310896"/>
+          </a:xfrm>
+          <a:prstGeom prst="rect">
+            <a:avLst/>
+          </a:prstGeom>
+          <a:noFill/>
+        </p:spPr>
+        <p:txBody>
+          <a:bodyPr wrap="square" tIns="0" bIns="0" lIns="25400" rIns="25400">
             <a:spAutoFit/>
           </a:bodyPr>
           <a:lstStyle/>
@@ -5259,16 +5258,16 @@
         </p:nvSpPr>
         <p:spPr>
           <a:xfrm>
-            <a:off x="4480560" y="2194560"/>
-            <a:ext cx="7132320" cy="548640"/>
-          </a:xfrm>
-          <a:prstGeom prst="rect">
-            <a:avLst/>
-          </a:prstGeom>
-          <a:noFill/>
-        </p:spPr>
-        <p:txBody>
-          <a:bodyPr wrap="square">
+            <a:off x="4297680" y="2249424"/>
+            <a:ext cx="7543800" cy="475488"/>
+          </a:xfrm>
+          <a:prstGeom prst="rect">
+            <a:avLst/>
+          </a:prstGeom>
+          <a:noFill/>
+        </p:spPr>
+        <p:txBody>
+          <a:bodyPr wrap="square" tIns="0" bIns="0" lIns="25400" rIns="25400">
             <a:spAutoFit/>
           </a:bodyPr>
           <a:lstStyle/>
@@ -5293,8 +5292,8 @@
         </p:nvSpPr>
         <p:spPr>
           <a:xfrm>
-            <a:off x="4343400" y="3063239"/>
-            <a:ext cx="7498079" cy="1691640"/>
+            <a:off x="4160520" y="2935224"/>
+            <a:ext cx="7818120" cy="1664208"/>
           </a:xfrm>
           <a:prstGeom prst="rect">
             <a:avLst/>
@@ -5338,16 +5337,16 @@
         </p:nvSpPr>
         <p:spPr>
           <a:xfrm>
-            <a:off x="4480560" y="3136391"/>
-            <a:ext cx="5943600" cy="384048"/>
-          </a:xfrm>
-          <a:prstGeom prst="rect">
-            <a:avLst/>
-          </a:prstGeom>
-          <a:noFill/>
-        </p:spPr>
-        <p:txBody>
-          <a:bodyPr wrap="square">
+            <a:off x="4297680" y="3008376"/>
+            <a:ext cx="6446520" cy="365760"/>
+          </a:xfrm>
+          <a:prstGeom prst="rect">
+            <a:avLst/>
+          </a:prstGeom>
+          <a:noFill/>
+        </p:spPr>
+        <p:txBody>
+          <a:bodyPr wrap="square" tIns="0" bIns="0" lIns="25400" rIns="25400">
             <a:spAutoFit/>
           </a:bodyPr>
           <a:lstStyle/>
@@ -5372,16 +5371,16 @@
         </p:nvSpPr>
         <p:spPr>
           <a:xfrm>
-            <a:off x="4480560" y="3502151"/>
-            <a:ext cx="7132320" cy="274320"/>
-          </a:xfrm>
-          <a:prstGeom prst="rect">
-            <a:avLst/>
-          </a:prstGeom>
-          <a:noFill/>
-        </p:spPr>
-        <p:txBody>
-          <a:bodyPr wrap="square">
+            <a:off x="4297680" y="3392424"/>
+            <a:ext cx="7543800" cy="274320"/>
+          </a:xfrm>
+          <a:prstGeom prst="rect">
+            <a:avLst/>
+          </a:prstGeom>
+          <a:noFill/>
+        </p:spPr>
+        <p:txBody>
+          <a:bodyPr wrap="square" tIns="0" bIns="0" lIns="25400" rIns="25400">
             <a:spAutoFit/>
           </a:bodyPr>
           <a:lstStyle/>
@@ -5393,7 +5392,7 @@
                   <a:srgbClr val="6C757D"/>
                 </a:solidFill>
               </a:rPr>
-              <a:t>JR加古川駅 徒歩3分 ｜ インスタベース掲載</a:t>
+              <a:t>JR加古川駅 徒歩3分｜インスタベース掲載</a:t>
             </a:r>
           </a:p>
         </p:txBody>
@@ -5406,16 +5405,16 @@
         </p:nvSpPr>
         <p:spPr>
           <a:xfrm>
-            <a:off x="4480560" y="3776472"/>
-            <a:ext cx="7132320" cy="320040"/>
-          </a:xfrm>
-          <a:prstGeom prst="rect">
-            <a:avLst/>
-          </a:prstGeom>
-          <a:noFill/>
-        </p:spPr>
-        <p:txBody>
-          <a:bodyPr wrap="square">
+            <a:off x="4297680" y="3685032"/>
+            <a:ext cx="7543800" cy="310896"/>
+          </a:xfrm>
+          <a:prstGeom prst="rect">
+            <a:avLst/>
+          </a:prstGeom>
+          <a:noFill/>
+        </p:spPr>
+        <p:txBody>
+          <a:bodyPr wrap="square" tIns="0" bIns="0" lIns="25400" rIns="25400">
             <a:spAutoFit/>
           </a:bodyPr>
           <a:lstStyle/>
@@ -5427,7 +5426,7 @@
                   <a:srgbClr val="1A1A2E"/>
                 </a:solidFill>
               </a:rPr>
-              <a:t>収容: 最大 20名　　料金: 要確認（平均 435円/人/時）</a:t>
+              <a:t>収容: 最大 20名　　料金: 要確認（平均 435円/人・時）</a:t>
             </a:r>
           </a:p>
         </p:txBody>
@@ -5440,16 +5439,16 @@
         </p:nvSpPr>
         <p:spPr>
           <a:xfrm>
-            <a:off x="4480560" y="4069079"/>
-            <a:ext cx="7132320" cy="548640"/>
-          </a:xfrm>
-          <a:prstGeom prst="rect">
-            <a:avLst/>
-          </a:prstGeom>
-          <a:noFill/>
-        </p:spPr>
-        <p:txBody>
-          <a:bodyPr wrap="square">
+            <a:off x="4297680" y="4014215"/>
+            <a:ext cx="7543800" cy="475488"/>
+          </a:xfrm>
+          <a:prstGeom prst="rect">
+            <a:avLst/>
+          </a:prstGeom>
+          <a:noFill/>
+        </p:spPr>
+        <p:txBody>
+          <a:bodyPr wrap="square" tIns="0" bIns="0" lIns="25400" rIns="25400">
             <a:spAutoFit/>
           </a:bodyPr>
           <a:lstStyle/>
@@ -5474,8 +5473,8 @@
         </p:nvSpPr>
         <p:spPr>
           <a:xfrm>
-            <a:off x="4343400" y="4937759"/>
-            <a:ext cx="7498079" cy="1691640"/>
+            <a:off x="4160520" y="4700016"/>
+            <a:ext cx="7818120" cy="1664208"/>
           </a:xfrm>
           <a:prstGeom prst="rect">
             <a:avLst/>
@@ -5519,16 +5518,16 @@
         </p:nvSpPr>
         <p:spPr>
           <a:xfrm>
-            <a:off x="4480560" y="5010912"/>
-            <a:ext cx="5943600" cy="384048"/>
-          </a:xfrm>
-          <a:prstGeom prst="rect">
-            <a:avLst/>
-          </a:prstGeom>
-          <a:noFill/>
-        </p:spPr>
-        <p:txBody>
-          <a:bodyPr wrap="square">
+            <a:off x="4297680" y="4773168"/>
+            <a:ext cx="6446520" cy="365760"/>
+          </a:xfrm>
+          <a:prstGeom prst="rect">
+            <a:avLst/>
+          </a:prstGeom>
+          <a:noFill/>
+        </p:spPr>
+        <p:txBody>
+          <a:bodyPr wrap="square" tIns="0" bIns="0" lIns="25400" rIns="25400">
             <a:spAutoFit/>
           </a:bodyPr>
           <a:lstStyle/>
@@ -5553,16 +5552,16 @@
         </p:nvSpPr>
         <p:spPr>
           <a:xfrm>
-            <a:off x="4480560" y="5376671"/>
-            <a:ext cx="7132320" cy="274320"/>
-          </a:xfrm>
-          <a:prstGeom prst="rect">
-            <a:avLst/>
-          </a:prstGeom>
-          <a:noFill/>
-        </p:spPr>
-        <p:txBody>
-          <a:bodyPr wrap="square">
+            <a:off x="4297680" y="5157216"/>
+            <a:ext cx="7543800" cy="274320"/>
+          </a:xfrm>
+          <a:prstGeom prst="rect">
+            <a:avLst/>
+          </a:prstGeom>
+          <a:noFill/>
+        </p:spPr>
+        <p:txBody>
+          <a:bodyPr wrap="square" tIns="0" bIns="0" lIns="25400" rIns="25400">
             <a:spAutoFit/>
           </a:bodyPr>
           <a:lstStyle/>
@@ -5574,7 +5573,7 @@
                   <a:srgbClr val="6C757D"/>
                 </a:solidFill>
               </a:rPr>
-              <a:t>JR明石駅 徒歩5分 ｜ スペースマーケット掲載</a:t>
+              <a:t>JR明石駅 徒歩5分｜スペースマーケット掲載</a:t>
             </a:r>
           </a:p>
         </p:txBody>
@@ -5587,16 +5586,16 @@
         </p:nvSpPr>
         <p:spPr>
           <a:xfrm>
-            <a:off x="4480560" y="5650992"/>
-            <a:ext cx="7132320" cy="320040"/>
-          </a:xfrm>
-          <a:prstGeom prst="rect">
-            <a:avLst/>
-          </a:prstGeom>
-          <a:noFill/>
-        </p:spPr>
-        <p:txBody>
-          <a:bodyPr wrap="square">
+            <a:off x="4297680" y="5449824"/>
+            <a:ext cx="7543800" cy="310896"/>
+          </a:xfrm>
+          <a:prstGeom prst="rect">
+            <a:avLst/>
+          </a:prstGeom>
+          <a:noFill/>
+        </p:spPr>
+        <p:txBody>
+          <a:bodyPr wrap="square" tIns="0" bIns="0" lIns="25400" rIns="25400">
             <a:spAutoFit/>
           </a:bodyPr>
           <a:lstStyle/>
@@ -5621,16 +5620,16 @@
         </p:nvSpPr>
         <p:spPr>
           <a:xfrm>
-            <a:off x="4480560" y="5943600"/>
-            <a:ext cx="7132320" cy="548640"/>
-          </a:xfrm>
-          <a:prstGeom prst="rect">
-            <a:avLst/>
-          </a:prstGeom>
-          <a:noFill/>
-        </p:spPr>
-        <p:txBody>
-          <a:bodyPr wrap="square">
+            <a:off x="4297680" y="5779007"/>
+            <a:ext cx="7543800" cy="475488"/>
+          </a:xfrm>
+          <a:prstGeom prst="rect">
+            <a:avLst/>
+          </a:prstGeom>
+          <a:noFill/>
+        </p:spPr>
+        <p:txBody>
+          <a:bodyPr wrap="square" tIns="0" bIns="0" lIns="25400" rIns="25400">
             <a:spAutoFit/>
           </a:bodyPr>
           <a:lstStyle/>
@@ -5642,7 +5641,7 @@
                   <a:srgbClr val="1A1A2E"/>
                 </a:solidFill>
               </a:rPr>
-              <a:t>子連れOK。明石側に集まる人が多い場合に便利。</a:t>
+              <a:t>子連れOK。明石側に集まるメンバーが多い場合に便利。</a:t>
             </a:r>
           </a:p>
         </p:txBody>
@@ -5767,23 +5766,23 @@
         </p:nvSpPr>
         <p:spPr>
           <a:xfrm>
-            <a:off x="365760" y="109728"/>
-            <a:ext cx="9144000" cy="640080"/>
-          </a:xfrm>
-          <a:prstGeom prst="rect">
-            <a:avLst/>
-          </a:prstGeom>
-          <a:noFill/>
-        </p:spPr>
-        <p:txBody>
-          <a:bodyPr wrap="square">
+            <a:off x="320040" y="91440"/>
+            <a:ext cx="11430000" cy="566928"/>
+          </a:xfrm>
+          <a:prstGeom prst="rect">
+            <a:avLst/>
+          </a:prstGeom>
+          <a:noFill/>
+        </p:spPr>
+        <p:txBody>
+          <a:bodyPr wrap="square" tIns="0" bIns="0" lIns="25400" rIns="25400">
             <a:spAutoFit/>
           </a:bodyPr>
           <a:lstStyle/>
           <a:p>
             <a:pPr algn="l"/>
             <a:r>
-              <a:rPr sz="2600" b="1" i="0">
+              <a:rPr sz="2400" b="1" i="0">
                 <a:solidFill>
                   <a:srgbClr val="FFFFFF"/>
                 </a:solidFill>
@@ -5801,23 +5800,23 @@
         </p:nvSpPr>
         <p:spPr>
           <a:xfrm>
-            <a:off x="365760" y="621792"/>
-            <a:ext cx="9144000" cy="365760"/>
-          </a:xfrm>
-          <a:prstGeom prst="rect">
-            <a:avLst/>
-          </a:prstGeom>
-          <a:noFill/>
-        </p:spPr>
-        <p:txBody>
-          <a:bodyPr wrap="square">
+            <a:off x="320040" y="621792"/>
+            <a:ext cx="11430000" cy="329184"/>
+          </a:xfrm>
+          <a:prstGeom prst="rect">
+            <a:avLst/>
+          </a:prstGeom>
+          <a:noFill/>
+        </p:spPr>
+        <p:txBody>
+          <a:bodyPr wrap="square" tIns="0" bIns="0" lIns="25400" rIns="25400">
             <a:spAutoFit/>
           </a:bodyPr>
           <a:lstStyle/>
           <a:p>
             <a:pPr algn="l"/>
             <a:r>
-              <a:rPr sz="1200" b="0" i="0">
+              <a:rPr sz="1100" b="0" i="0">
                 <a:solidFill>
                   <a:srgbClr val="C89B3C"/>
                 </a:solidFill>
@@ -5835,8 +5834,8 @@
         </p:nvSpPr>
         <p:spPr>
           <a:xfrm>
-            <a:off x="274320" y="1188720"/>
-            <a:ext cx="5577840" cy="5303520"/>
+            <a:off x="228600" y="1170432"/>
+            <a:ext cx="5577840" cy="5486400"/>
           </a:xfrm>
           <a:prstGeom prst="rect">
             <a:avLst/>
@@ -5880,23 +5879,23 @@
         </p:nvSpPr>
         <p:spPr>
           <a:xfrm>
-            <a:off x="457200" y="1280160"/>
-            <a:ext cx="5212080" cy="411480"/>
-          </a:xfrm>
-          <a:prstGeom prst="rect">
-            <a:avLst/>
-          </a:prstGeom>
-          <a:noFill/>
-        </p:spPr>
-        <p:txBody>
-          <a:bodyPr wrap="square">
+            <a:off x="356616" y="1261872"/>
+            <a:ext cx="5321807" cy="365760"/>
+          </a:xfrm>
+          <a:prstGeom prst="rect">
+            <a:avLst/>
+          </a:prstGeom>
+          <a:noFill/>
+        </p:spPr>
+        <p:txBody>
+          <a:bodyPr wrap="square" tIns="0" bIns="0" lIns="25400" rIns="25400">
             <a:spAutoFit/>
           </a:bodyPr>
           <a:lstStyle/>
           <a:p>
             <a:pPr algn="l"/>
             <a:r>
-              <a:rPr sz="1500" b="1" i="0">
+              <a:rPr sz="1400" b="1" i="0">
                 <a:solidFill>
                   <a:srgbClr val="216BAE"/>
                 </a:solidFill>
@@ -5914,7 +5913,7 @@
         </p:nvSpPr>
         <p:spPr>
           <a:xfrm>
-            <a:off x="274320" y="1673352"/>
+            <a:off x="228600" y="1627632"/>
             <a:ext cx="5577840" cy="36576"/>
           </a:xfrm>
           <a:prstGeom prst="rect">
@@ -5957,8 +5956,8 @@
         </p:nvSpPr>
         <p:spPr>
           <a:xfrm>
-            <a:off x="411480" y="1828800"/>
-            <a:ext cx="822960" cy="246888"/>
+            <a:off x="338328" y="1755648"/>
+            <a:ext cx="804672" cy="237744"/>
           </a:xfrm>
           <a:prstGeom prst="rect">
             <a:avLst/>
@@ -5985,12 +5984,12 @@
           </a:fontRef>
         </p:style>
         <p:txBody>
-          <a:bodyPr rtlCol="0" anchor="ctr" wrap="none"/>
-          <a:lstStyle/>
-          <a:p>
-            <a:pPr algn="ctr"/>
-            <a:r>
-              <a:rPr sz="900" b="1">
+          <a:bodyPr rtlCol="0" anchor="ctr" wrap="none" tIns="0" bIns="0"/>
+          <a:lstStyle/>
+          <a:p>
+            <a:pPr algn="ctr"/>
+            <a:r>
+              <a:rPr sz="800" b="1">
                 <a:solidFill>
                   <a:srgbClr val="FFFFFF"/>
                 </a:solidFill>
@@ -6008,16 +6007,16 @@
         </p:nvSpPr>
         <p:spPr>
           <a:xfrm>
-            <a:off x="1325880" y="1783080"/>
-            <a:ext cx="4389120" cy="640080"/>
-          </a:xfrm>
-          <a:prstGeom prst="rect">
-            <a:avLst/>
-          </a:prstGeom>
-          <a:noFill/>
-        </p:spPr>
-        <p:txBody>
-          <a:bodyPr wrap="square">
+            <a:off x="1216152" y="1737360"/>
+            <a:ext cx="4462272" cy="310896"/>
+          </a:xfrm>
+          <a:prstGeom prst="rect">
+            <a:avLst/>
+          </a:prstGeom>
+          <a:noFill/>
+        </p:spPr>
+        <p:txBody>
+          <a:bodyPr wrap="square" tIns="0" bIns="0" lIns="25400" rIns="25400">
             <a:spAutoFit/>
           </a:bodyPr>
           <a:lstStyle/>
@@ -6026,7 +6025,7 @@
             <a:r>
               <a:rPr sz="1100" b="1" i="0">
                 <a:solidFill>
-                  <a:srgbClr val="277D52"/>
+                  <a:srgbClr val="1A1A2E"/>
                 </a:solidFill>
               </a:rPr>
               <a:t>テイクアウト分担方式</a:t>
@@ -6042,113 +6041,571 @@
         </p:nvSpPr>
         <p:spPr>
           <a:xfrm>
-            <a:off x="457200" y="2212848"/>
-            <a:ext cx="5212080" cy="640080"/>
-          </a:xfrm>
-          <a:prstGeom prst="rect">
-            <a:avLst/>
-          </a:prstGeom>
-          <a:noFill/>
-        </p:spPr>
-        <p:txBody>
-          <a:bodyPr wrap="square">
+            <a:off x="1216152" y="2048255"/>
+            <a:ext cx="4462272" cy="329184"/>
+          </a:xfrm>
+          <a:prstGeom prst="rect">
+            <a:avLst/>
+          </a:prstGeom>
+          <a:noFill/>
+        </p:spPr>
+        <p:txBody>
+          <a:bodyPr wrap="square" tIns="0" bIns="0" lIns="25400" rIns="25400">
             <a:spAutoFit/>
           </a:bodyPr>
           <a:lstStyle/>
           <a:p>
             <a:pPr algn="l"/>
             <a:r>
-              <a:rPr sz="1100" b="0" i="0">
+              <a:rPr sz="1000" b="0" i="0">
+                <a:solidFill>
+                  <a:srgbClr val="6C757D"/>
+                </a:solidFill>
+              </a:rPr>
+              <a:t>複数店舗に分散手配してリスク分散</a:t>
+            </a:r>
+          </a:p>
+        </p:txBody>
+      </p:sp>
+      <p:sp>
+        <p:nvSpPr>
+          <p:cNvPr id="12" name="Rectangle 11"/>
+          <p:cNvSpPr/>
+          <p:nvPr/>
+        </p:nvSpPr>
+        <p:spPr>
+          <a:xfrm>
+            <a:off x="338328" y="2414015"/>
+            <a:ext cx="5358383" cy="18288"/>
+          </a:xfrm>
+          <a:prstGeom prst="rect">
+            <a:avLst/>
+          </a:prstGeom>
+          <a:solidFill>
+            <a:srgbClr val="DDDDDD"/>
+          </a:solidFill>
+          <a:ln>
+            <a:noFill/>
+          </a:ln>
+        </p:spPr>
+        <p:style>
+          <a:lnRef idx="1">
+            <a:schemeClr val="accent1"/>
+          </a:lnRef>
+          <a:fillRef idx="3">
+            <a:schemeClr val="accent1"/>
+          </a:fillRef>
+          <a:effectRef idx="2">
+            <a:schemeClr val="accent1"/>
+          </a:effectRef>
+          <a:fontRef idx="minor">
+            <a:schemeClr val="lt1"/>
+          </a:fontRef>
+        </p:style>
+        <p:txBody>
+          <a:bodyPr rtlCol="0" anchor="ctr"/>
+          <a:lstStyle/>
+          <a:p>
+            <a:pPr algn="ctr"/>
+          </a:p>
+        </p:txBody>
+      </p:sp>
+      <p:sp>
+        <p:nvSpPr>
+          <p:cNvPr id="13" name="Rectangle 12"/>
+          <p:cNvSpPr/>
+          <p:nvPr/>
+        </p:nvSpPr>
+        <p:spPr>
+          <a:xfrm>
+            <a:off x="338328" y="2505456"/>
+            <a:ext cx="804672" cy="237744"/>
+          </a:xfrm>
+          <a:prstGeom prst="rect">
+            <a:avLst/>
+          </a:prstGeom>
+          <a:solidFill>
+            <a:srgbClr val="1A375E"/>
+          </a:solidFill>
+          <a:ln>
+            <a:noFill/>
+          </a:ln>
+        </p:spPr>
+        <p:style>
+          <a:lnRef idx="1">
+            <a:schemeClr val="accent1"/>
+          </a:lnRef>
+          <a:fillRef idx="3">
+            <a:schemeClr val="accent1"/>
+          </a:fillRef>
+          <a:effectRef idx="2">
+            <a:schemeClr val="accent1"/>
+          </a:effectRef>
+          <a:fontRef idx="minor">
+            <a:schemeClr val="lt1"/>
+          </a:fontRef>
+        </p:style>
+        <p:txBody>
+          <a:bodyPr rtlCol="0" anchor="ctr" wrap="none" tIns="0" bIns="0"/>
+          <a:lstStyle/>
+          <a:p>
+            <a:pPr algn="ctr"/>
+            <a:r>
+              <a:rPr sz="800" b="1">
+                <a:solidFill>
+                  <a:srgbClr val="FFFFFF"/>
+                </a:solidFill>
+              </a:rPr>
+              <a:t>主食</a:t>
+            </a:r>
+          </a:p>
+        </p:txBody>
+      </p:sp>
+      <p:sp>
+        <p:nvSpPr>
+          <p:cNvPr id="14" name="TextBox 13"/>
+          <p:cNvSpPr txBox="1"/>
+          <p:nvPr/>
+        </p:nvSpPr>
+        <p:spPr>
+          <a:xfrm>
+            <a:off x="1216152" y="2487168"/>
+            <a:ext cx="4462272" cy="310896"/>
+          </a:xfrm>
+          <a:prstGeom prst="rect">
+            <a:avLst/>
+          </a:prstGeom>
+          <a:noFill/>
+        </p:spPr>
+        <p:txBody>
+          <a:bodyPr wrap="square" tIns="0" bIns="0" lIns="25400" rIns="25400">
+            <a:spAutoFit/>
+          </a:bodyPr>
+          <a:lstStyle/>
+          <a:p>
+            <a:pPr algn="l"/>
+            <a:r>
+              <a:rPr sz="1100" b="1" i="0">
                 <a:solidFill>
                   <a:srgbClr val="1A1A2E"/>
                 </a:solidFill>
               </a:rPr>
-              <a:t>ごんた寿し（加古川）
-　出前・仕出し桶 ／ 正月期間は要事前予約</a:t>
-            </a:r>
-          </a:p>
-        </p:txBody>
-      </p:sp>
-      <p:sp>
-        <p:nvSpPr>
-          <p:cNvPr id="12" name="TextBox 11"/>
-          <p:cNvSpPr txBox="1"/>
-          <p:nvPr/>
-        </p:nvSpPr>
-        <p:spPr>
-          <a:xfrm>
-            <a:off x="457200" y="2898648"/>
-            <a:ext cx="5212080" cy="640080"/>
-          </a:xfrm>
-          <a:prstGeom prst="rect">
-            <a:avLst/>
-          </a:prstGeom>
-          <a:noFill/>
-        </p:spPr>
-        <p:txBody>
-          <a:bodyPr wrap="square">
+              <a:t>ごんた寿し（加古川）</a:t>
+            </a:r>
+          </a:p>
+        </p:txBody>
+      </p:sp>
+      <p:sp>
+        <p:nvSpPr>
+          <p:cNvPr id="15" name="TextBox 14"/>
+          <p:cNvSpPr txBox="1"/>
+          <p:nvPr/>
+        </p:nvSpPr>
+        <p:spPr>
+          <a:xfrm>
+            <a:off x="1216152" y="2798063"/>
+            <a:ext cx="4462272" cy="329184"/>
+          </a:xfrm>
+          <a:prstGeom prst="rect">
+            <a:avLst/>
+          </a:prstGeom>
+          <a:noFill/>
+        </p:spPr>
+        <p:txBody>
+          <a:bodyPr wrap="square" tIns="0" bIns="0" lIns="25400" rIns="25400">
             <a:spAutoFit/>
           </a:bodyPr>
           <a:lstStyle/>
           <a:p>
             <a:pPr algn="l"/>
             <a:r>
-              <a:rPr sz="1100" b="0" i="0">
+              <a:rPr sz="1000" b="0" i="0">
+                <a:solidFill>
+                  <a:srgbClr val="6C757D"/>
+                </a:solidFill>
+              </a:rPr>
+              <a:t>出前・仕出し桶 ／ 正月は要事前予約</a:t>
+            </a:r>
+          </a:p>
+        </p:txBody>
+      </p:sp>
+      <p:sp>
+        <p:nvSpPr>
+          <p:cNvPr id="16" name="Rectangle 15"/>
+          <p:cNvSpPr/>
+          <p:nvPr/>
+        </p:nvSpPr>
+        <p:spPr>
+          <a:xfrm>
+            <a:off x="338328" y="3163823"/>
+            <a:ext cx="5358383" cy="18288"/>
+          </a:xfrm>
+          <a:prstGeom prst="rect">
+            <a:avLst/>
+          </a:prstGeom>
+          <a:solidFill>
+            <a:srgbClr val="DDDDDD"/>
+          </a:solidFill>
+          <a:ln>
+            <a:noFill/>
+          </a:ln>
+        </p:spPr>
+        <p:style>
+          <a:lnRef idx="1">
+            <a:schemeClr val="accent1"/>
+          </a:lnRef>
+          <a:fillRef idx="3">
+            <a:schemeClr val="accent1"/>
+          </a:fillRef>
+          <a:effectRef idx="2">
+            <a:schemeClr val="accent1"/>
+          </a:effectRef>
+          <a:fontRef idx="minor">
+            <a:schemeClr val="lt1"/>
+          </a:fontRef>
+        </p:style>
+        <p:txBody>
+          <a:bodyPr rtlCol="0" anchor="ctr"/>
+          <a:lstStyle/>
+          <a:p>
+            <a:pPr algn="ctr"/>
+          </a:p>
+        </p:txBody>
+      </p:sp>
+      <p:sp>
+        <p:nvSpPr>
+          <p:cNvPr id="17" name="Rectangle 16"/>
+          <p:cNvSpPr/>
+          <p:nvPr/>
+        </p:nvSpPr>
+        <p:spPr>
+          <a:xfrm>
+            <a:off x="338328" y="3255264"/>
+            <a:ext cx="804672" cy="237744"/>
+          </a:xfrm>
+          <a:prstGeom prst="rect">
+            <a:avLst/>
+          </a:prstGeom>
+          <a:solidFill>
+            <a:srgbClr val="1A375E"/>
+          </a:solidFill>
+          <a:ln>
+            <a:noFill/>
+          </a:ln>
+        </p:spPr>
+        <p:style>
+          <a:lnRef idx="1">
+            <a:schemeClr val="accent1"/>
+          </a:lnRef>
+          <a:fillRef idx="3">
+            <a:schemeClr val="accent1"/>
+          </a:fillRef>
+          <a:effectRef idx="2">
+            <a:schemeClr val="accent1"/>
+          </a:effectRef>
+          <a:fontRef idx="minor">
+            <a:schemeClr val="lt1"/>
+          </a:fontRef>
+        </p:style>
+        <p:txBody>
+          <a:bodyPr rtlCol="0" anchor="ctr" wrap="none" tIns="0" bIns="0"/>
+          <a:lstStyle/>
+          <a:p>
+            <a:pPr algn="ctr"/>
+            <a:r>
+              <a:rPr sz="800" b="1">
+                <a:solidFill>
+                  <a:srgbClr val="FFFFFF"/>
+                </a:solidFill>
+              </a:rPr>
+              <a:t>主食</a:t>
+            </a:r>
+          </a:p>
+        </p:txBody>
+      </p:sp>
+      <p:sp>
+        <p:nvSpPr>
+          <p:cNvPr id="18" name="TextBox 17"/>
+          <p:cNvSpPr txBox="1"/>
+          <p:nvPr/>
+        </p:nvSpPr>
+        <p:spPr>
+          <a:xfrm>
+            <a:off x="1216152" y="3236976"/>
+            <a:ext cx="4462272" cy="310896"/>
+          </a:xfrm>
+          <a:prstGeom prst="rect">
+            <a:avLst/>
+          </a:prstGeom>
+          <a:noFill/>
+        </p:spPr>
+        <p:txBody>
+          <a:bodyPr wrap="square" tIns="0" bIns="0" lIns="25400" rIns="25400">
+            <a:spAutoFit/>
+          </a:bodyPr>
+          <a:lstStyle/>
+          <a:p>
+            <a:pPr algn="l"/>
+            <a:r>
+              <a:rPr sz="1100" b="1" i="0">
                 <a:solidFill>
                   <a:srgbClr val="1A1A2E"/>
                 </a:solidFill>
               </a:rPr>
-              <a:t>はま寿司 テイクアウト
-　桶寿司ネット予約 ／ 大量注文向き</a:t>
-            </a:r>
-          </a:p>
-        </p:txBody>
-      </p:sp>
-      <p:sp>
-        <p:nvSpPr>
-          <p:cNvPr id="13" name="TextBox 12"/>
-          <p:cNvSpPr txBox="1"/>
-          <p:nvPr/>
-        </p:nvSpPr>
-        <p:spPr>
-          <a:xfrm>
-            <a:off x="457200" y="3584448"/>
-            <a:ext cx="5212080" cy="640080"/>
-          </a:xfrm>
-          <a:prstGeom prst="rect">
-            <a:avLst/>
-          </a:prstGeom>
-          <a:noFill/>
-        </p:spPr>
-        <p:txBody>
-          <a:bodyPr wrap="square">
+              <a:t>はま寿司 テイクアウト</a:t>
+            </a:r>
+          </a:p>
+        </p:txBody>
+      </p:sp>
+      <p:sp>
+        <p:nvSpPr>
+          <p:cNvPr id="19" name="TextBox 18"/>
+          <p:cNvSpPr txBox="1"/>
+          <p:nvPr/>
+        </p:nvSpPr>
+        <p:spPr>
+          <a:xfrm>
+            <a:off x="1216152" y="3547872"/>
+            <a:ext cx="4462272" cy="329184"/>
+          </a:xfrm>
+          <a:prstGeom prst="rect">
+            <a:avLst/>
+          </a:prstGeom>
+          <a:noFill/>
+        </p:spPr>
+        <p:txBody>
+          <a:bodyPr wrap="square" tIns="0" bIns="0" lIns="25400" rIns="25400">
             <a:spAutoFit/>
           </a:bodyPr>
           <a:lstStyle/>
           <a:p>
             <a:pPr algn="l"/>
             <a:r>
-              <a:rPr sz="1100" b="0" i="0">
+              <a:rPr sz="1000" b="0" i="0">
+                <a:solidFill>
+                  <a:srgbClr val="6C757D"/>
+                </a:solidFill>
+              </a:rPr>
+              <a:t>桶寿司ネット予約 ／ 大量注文向き</a:t>
+            </a:r>
+          </a:p>
+        </p:txBody>
+      </p:sp>
+      <p:sp>
+        <p:nvSpPr>
+          <p:cNvPr id="20" name="Rectangle 19"/>
+          <p:cNvSpPr/>
+          <p:nvPr/>
+        </p:nvSpPr>
+        <p:spPr>
+          <a:xfrm>
+            <a:off x="338328" y="3913632"/>
+            <a:ext cx="5358383" cy="18288"/>
+          </a:xfrm>
+          <a:prstGeom prst="rect">
+            <a:avLst/>
+          </a:prstGeom>
+          <a:solidFill>
+            <a:srgbClr val="DDDDDD"/>
+          </a:solidFill>
+          <a:ln>
+            <a:noFill/>
+          </a:ln>
+        </p:spPr>
+        <p:style>
+          <a:lnRef idx="1">
+            <a:schemeClr val="accent1"/>
+          </a:lnRef>
+          <a:fillRef idx="3">
+            <a:schemeClr val="accent1"/>
+          </a:fillRef>
+          <a:effectRef idx="2">
+            <a:schemeClr val="accent1"/>
+          </a:effectRef>
+          <a:fontRef idx="minor">
+            <a:schemeClr val="lt1"/>
+          </a:fontRef>
+        </p:style>
+        <p:txBody>
+          <a:bodyPr rtlCol="0" anchor="ctr"/>
+          <a:lstStyle/>
+          <a:p>
+            <a:pPr algn="ctr"/>
+          </a:p>
+        </p:txBody>
+      </p:sp>
+      <p:sp>
+        <p:nvSpPr>
+          <p:cNvPr id="21" name="Rectangle 20"/>
+          <p:cNvSpPr/>
+          <p:nvPr/>
+        </p:nvSpPr>
+        <p:spPr>
+          <a:xfrm>
+            <a:off x="338328" y="4005072"/>
+            <a:ext cx="804672" cy="237744"/>
+          </a:xfrm>
+          <a:prstGeom prst="rect">
+            <a:avLst/>
+          </a:prstGeom>
+          <a:solidFill>
+            <a:srgbClr val="216BAE"/>
+          </a:solidFill>
+          <a:ln>
+            <a:noFill/>
+          </a:ln>
+        </p:spPr>
+        <p:style>
+          <a:lnRef idx="1">
+            <a:schemeClr val="accent1"/>
+          </a:lnRef>
+          <a:fillRef idx="3">
+            <a:schemeClr val="accent1"/>
+          </a:fillRef>
+          <a:effectRef idx="2">
+            <a:schemeClr val="accent1"/>
+          </a:effectRef>
+          <a:fontRef idx="minor">
+            <a:schemeClr val="lt1"/>
+          </a:fontRef>
+        </p:style>
+        <p:txBody>
+          <a:bodyPr rtlCol="0" anchor="ctr" wrap="none" tIns="0" bIns="0"/>
+          <a:lstStyle/>
+          <a:p>
+            <a:pPr algn="ctr"/>
+            <a:r>
+              <a:rPr sz="800" b="1">
+                <a:solidFill>
+                  <a:srgbClr val="FFFFFF"/>
+                </a:solidFill>
+              </a:rPr>
+              <a:t>副菜</a:t>
+            </a:r>
+          </a:p>
+        </p:txBody>
+      </p:sp>
+      <p:sp>
+        <p:nvSpPr>
+          <p:cNvPr id="22" name="TextBox 21"/>
+          <p:cNvSpPr txBox="1"/>
+          <p:nvPr/>
+        </p:nvSpPr>
+        <p:spPr>
+          <a:xfrm>
+            <a:off x="1216152" y="3986784"/>
+            <a:ext cx="4462272" cy="310896"/>
+          </a:xfrm>
+          <a:prstGeom prst="rect">
+            <a:avLst/>
+          </a:prstGeom>
+          <a:noFill/>
+        </p:spPr>
+        <p:txBody>
+          <a:bodyPr wrap="square" tIns="0" bIns="0" lIns="25400" rIns="25400">
+            <a:spAutoFit/>
+          </a:bodyPr>
+          <a:lstStyle/>
+          <a:p>
+            <a:pPr algn="l"/>
+            <a:r>
+              <a:rPr sz="1100" b="1" i="0">
                 <a:solidFill>
                   <a:srgbClr val="1A1A2E"/>
                 </a:solidFill>
               </a:rPr>
-              <a:t>善乃（加古川）
-　オードブル・揚げ物・仕出し対応</a:t>
-            </a:r>
-          </a:p>
-        </p:txBody>
-      </p:sp>
-      <p:sp>
-        <p:nvSpPr>
-          <p:cNvPr id="14" name="Rectangle 13"/>
+              <a:t>善乃（加古川）</a:t>
+            </a:r>
+          </a:p>
+        </p:txBody>
+      </p:sp>
+      <p:sp>
+        <p:nvSpPr>
+          <p:cNvPr id="23" name="TextBox 22"/>
+          <p:cNvSpPr txBox="1"/>
+          <p:nvPr/>
+        </p:nvSpPr>
+        <p:spPr>
+          <a:xfrm>
+            <a:off x="1216152" y="4297680"/>
+            <a:ext cx="4462272" cy="329184"/>
+          </a:xfrm>
+          <a:prstGeom prst="rect">
+            <a:avLst/>
+          </a:prstGeom>
+          <a:noFill/>
+        </p:spPr>
+        <p:txBody>
+          <a:bodyPr wrap="square" tIns="0" bIns="0" lIns="25400" rIns="25400">
+            <a:spAutoFit/>
+          </a:bodyPr>
+          <a:lstStyle/>
+          <a:p>
+            <a:pPr algn="l"/>
+            <a:r>
+              <a:rPr sz="1000" b="0" i="0">
+                <a:solidFill>
+                  <a:srgbClr val="6C757D"/>
+                </a:solidFill>
+              </a:rPr>
+              <a:t>オードブル・揚げ物・仕出し対応</a:t>
+            </a:r>
+          </a:p>
+        </p:txBody>
+      </p:sp>
+      <p:sp>
+        <p:nvSpPr>
+          <p:cNvPr id="24" name="Rectangle 23"/>
           <p:cNvSpPr/>
           <p:nvPr/>
         </p:nvSpPr>
         <p:spPr>
           <a:xfrm>
-            <a:off x="411480" y="4270248"/>
-            <a:ext cx="822960" cy="246888"/>
+            <a:off x="338328" y="4663440"/>
+            <a:ext cx="5358383" cy="18288"/>
+          </a:xfrm>
+          <a:prstGeom prst="rect">
+            <a:avLst/>
+          </a:prstGeom>
+          <a:solidFill>
+            <a:srgbClr val="DDDDDD"/>
+          </a:solidFill>
+          <a:ln>
+            <a:noFill/>
+          </a:ln>
+        </p:spPr>
+        <p:style>
+          <a:lnRef idx="1">
+            <a:schemeClr val="accent1"/>
+          </a:lnRef>
+          <a:fillRef idx="3">
+            <a:schemeClr val="accent1"/>
+          </a:fillRef>
+          <a:effectRef idx="2">
+            <a:schemeClr val="accent1"/>
+          </a:effectRef>
+          <a:fontRef idx="minor">
+            <a:schemeClr val="lt1"/>
+          </a:fontRef>
+        </p:style>
+        <p:txBody>
+          <a:bodyPr rtlCol="0" anchor="ctr"/>
+          <a:lstStyle/>
+          <a:p>
+            <a:pPr algn="ctr"/>
+          </a:p>
+        </p:txBody>
+      </p:sp>
+      <p:sp>
+        <p:nvSpPr>
+          <p:cNvPr id="25" name="Rectangle 24"/>
+          <p:cNvSpPr/>
+          <p:nvPr/>
+        </p:nvSpPr>
+        <p:spPr>
+          <a:xfrm>
+            <a:off x="338328" y="4754879"/>
+            <a:ext cx="804672" cy="237744"/>
           </a:xfrm>
           <a:prstGeom prst="rect">
             <a:avLst/>
@@ -6175,12 +6632,12 @@
           </a:fontRef>
         </p:style>
         <p:txBody>
-          <a:bodyPr rtlCol="0" anchor="ctr" wrap="none"/>
-          <a:lstStyle/>
-          <a:p>
-            <a:pPr algn="ctr"/>
-            <a:r>
-              <a:rPr sz="900" b="1">
+          <a:bodyPr rtlCol="0" anchor="ctr" wrap="none" tIns="0" bIns="0"/>
+          <a:lstStyle/>
+          <a:p>
+            <a:pPr algn="ctr"/>
+            <a:r>
+              <a:rPr sz="800" b="1">
                 <a:solidFill>
                   <a:srgbClr val="FFFFFF"/>
                 </a:solidFill>
@@ -6192,22 +6649,22 @@
       </p:sp>
       <p:sp>
         <p:nvSpPr>
-          <p:cNvPr id="15" name="TextBox 14"/>
-          <p:cNvSpPr txBox="1"/>
-          <p:nvPr/>
-        </p:nvSpPr>
-        <p:spPr>
-          <a:xfrm>
-            <a:off x="1325880" y="4224528"/>
-            <a:ext cx="4389120" cy="640080"/>
-          </a:xfrm>
-          <a:prstGeom prst="rect">
-            <a:avLst/>
-          </a:prstGeom>
-          <a:noFill/>
-        </p:spPr>
-        <p:txBody>
-          <a:bodyPr wrap="square">
+          <p:cNvPr id="26" name="TextBox 25"/>
+          <p:cNvSpPr txBox="1"/>
+          <p:nvPr/>
+        </p:nvSpPr>
+        <p:spPr>
+          <a:xfrm>
+            <a:off x="1216152" y="4736592"/>
+            <a:ext cx="4462272" cy="310896"/>
+          </a:xfrm>
+          <a:prstGeom prst="rect">
+            <a:avLst/>
+          </a:prstGeom>
+          <a:noFill/>
+        </p:spPr>
+        <p:txBody>
+          <a:bodyPr wrap="square" tIns="0" bIns="0" lIns="25400" rIns="25400">
             <a:spAutoFit/>
           </a:bodyPr>
           <a:lstStyle/>
@@ -6216,31 +6673,64 @@
             <a:r>
               <a:rPr sz="1100" b="1" i="0">
                 <a:solidFill>
+                  <a:srgbClr val="1A1A2E"/>
+                </a:solidFill>
+              </a:rPr>
+              <a:t>デリバリー（Uber Eats / 出前館）</a:t>
+            </a:r>
+          </a:p>
+        </p:txBody>
+      </p:sp>
+      <p:sp>
+        <p:nvSpPr>
+          <p:cNvPr id="27" name="TextBox 26"/>
+          <p:cNvSpPr txBox="1"/>
+          <p:nvPr/>
+        </p:nvSpPr>
+        <p:spPr>
+          <a:xfrm>
+            <a:off x="1216152" y="5047488"/>
+            <a:ext cx="4462272" cy="329184"/>
+          </a:xfrm>
+          <a:prstGeom prst="rect">
+            <a:avLst/>
+          </a:prstGeom>
+          <a:noFill/>
+        </p:spPr>
+        <p:txBody>
+          <a:bodyPr wrap="square" tIns="0" bIns="0" lIns="25400" rIns="25400">
+            <a:spAutoFit/>
+          </a:bodyPr>
+          <a:lstStyle/>
+          <a:p>
+            <a:pPr algn="l"/>
+            <a:r>
+              <a:rPr sz="1000" b="0" i="0">
+                <a:solidFill>
                   <a:srgbClr val="6C757D"/>
                 </a:solidFill>
               </a:rPr>
-              <a:t>デリバリー（Uber Eats / 出前館）
-　正月は遅延リスクあり。補填用として活用</a:t>
-            </a:r>
-          </a:p>
-        </p:txBody>
-      </p:sp>
-      <p:sp>
-        <p:nvSpPr>
-          <p:cNvPr id="16" name="Rectangle 15"/>
+              <a:t>正月は遅延リスクあり。補填用に活用</a:t>
+            </a:r>
+          </a:p>
+        </p:txBody>
+      </p:sp>
+      <p:sp>
+        <p:nvSpPr>
+          <p:cNvPr id="28" name="Rectangle 27"/>
           <p:cNvSpPr/>
           <p:nvPr/>
         </p:nvSpPr>
         <p:spPr>
           <a:xfrm>
-            <a:off x="411480" y="4654296"/>
-            <a:ext cx="822960" cy="246888"/>
+            <a:off x="338328" y="5413248"/>
+            <a:ext cx="5358383" cy="18288"/>
           </a:xfrm>
           <a:prstGeom prst="rect">
             <a:avLst/>
           </a:prstGeom>
           <a:solidFill>
-            <a:srgbClr val="216BAE"/>
+            <a:srgbClr val="DDDDDD"/>
           </a:solidFill>
           <a:ln>
             <a:noFill/>
@@ -6261,39 +6751,82 @@
           </a:fontRef>
         </p:style>
         <p:txBody>
-          <a:bodyPr rtlCol="0" anchor="ctr" wrap="none"/>
-          <a:lstStyle/>
-          <a:p>
-            <a:pPr algn="ctr"/>
-            <a:r>
-              <a:rPr sz="900" b="1">
+          <a:bodyPr rtlCol="0" anchor="ctr"/>
+          <a:lstStyle/>
+          <a:p>
+            <a:pPr algn="ctr"/>
+          </a:p>
+        </p:txBody>
+      </p:sp>
+      <p:sp>
+        <p:nvSpPr>
+          <p:cNvPr id="29" name="Rectangle 28"/>
+          <p:cNvSpPr/>
+          <p:nvPr/>
+        </p:nvSpPr>
+        <p:spPr>
+          <a:xfrm>
+            <a:off x="338328" y="5504687"/>
+            <a:ext cx="804672" cy="237744"/>
+          </a:xfrm>
+          <a:prstGeom prst="rect">
+            <a:avLst/>
+          </a:prstGeom>
+          <a:solidFill>
+            <a:srgbClr val="6C757D"/>
+          </a:solidFill>
+          <a:ln>
+            <a:noFill/>
+          </a:ln>
+        </p:spPr>
+        <p:style>
+          <a:lnRef idx="1">
+            <a:schemeClr val="accent1"/>
+          </a:lnRef>
+          <a:fillRef idx="3">
+            <a:schemeClr val="accent1"/>
+          </a:fillRef>
+          <a:effectRef idx="2">
+            <a:schemeClr val="accent1"/>
+          </a:effectRef>
+          <a:fontRef idx="minor">
+            <a:schemeClr val="lt1"/>
+          </a:fontRef>
+        </p:style>
+        <p:txBody>
+          <a:bodyPr rtlCol="0" anchor="ctr" wrap="none" tIns="0" bIns="0"/>
+          <a:lstStyle/>
+          <a:p>
+            <a:pPr algn="ctr"/>
+            <a:r>
+              <a:rPr sz="800" b="1">
                 <a:solidFill>
                   <a:srgbClr val="FFFFFF"/>
                 </a:solidFill>
               </a:rPr>
-              <a:t>事前</a:t>
-            </a:r>
-          </a:p>
-        </p:txBody>
-      </p:sp>
-      <p:sp>
-        <p:nvSpPr>
-          <p:cNvPr id="17" name="TextBox 16"/>
-          <p:cNvSpPr txBox="1"/>
-          <p:nvPr/>
-        </p:nvSpPr>
-        <p:spPr>
-          <a:xfrm>
-            <a:off x="1325880" y="4608576"/>
-            <a:ext cx="4389120" cy="640080"/>
-          </a:xfrm>
-          <a:prstGeom prst="rect">
-            <a:avLst/>
-          </a:prstGeom>
-          <a:noFill/>
-        </p:spPr>
-        <p:txBody>
-          <a:bodyPr wrap="square">
+              <a:t>前日</a:t>
+            </a:r>
+          </a:p>
+        </p:txBody>
+      </p:sp>
+      <p:sp>
+        <p:nvSpPr>
+          <p:cNvPr id="30" name="TextBox 29"/>
+          <p:cNvSpPr txBox="1"/>
+          <p:nvPr/>
+        </p:nvSpPr>
+        <p:spPr>
+          <a:xfrm>
+            <a:off x="1216152" y="5486399"/>
+            <a:ext cx="4462272" cy="310896"/>
+          </a:xfrm>
+          <a:prstGeom prst="rect">
+            <a:avLst/>
+          </a:prstGeom>
+          <a:noFill/>
+        </p:spPr>
+        <p:txBody>
+          <a:bodyPr wrap="square" tIns="0" bIns="0" lIns="25400" rIns="25400">
             <a:spAutoFit/>
           </a:bodyPr>
           <a:lstStyle/>
@@ -6302,25 +6835,58 @@
             <a:r>
               <a:rPr sz="1100" b="1" i="0">
                 <a:solidFill>
+                  <a:srgbClr val="1A1A2E"/>
+                </a:solidFill>
+              </a:rPr>
+              <a:t>業務スーパー・コストコで調達</a:t>
+            </a:r>
+          </a:p>
+        </p:txBody>
+      </p:sp>
+      <p:sp>
+        <p:nvSpPr>
+          <p:cNvPr id="31" name="TextBox 30"/>
+          <p:cNvSpPr txBox="1"/>
+          <p:nvPr/>
+        </p:nvSpPr>
+        <p:spPr>
+          <a:xfrm>
+            <a:off x="1216152" y="5797295"/>
+            <a:ext cx="4462272" cy="329184"/>
+          </a:xfrm>
+          <a:prstGeom prst="rect">
+            <a:avLst/>
+          </a:prstGeom>
+          <a:noFill/>
+        </p:spPr>
+        <p:txBody>
+          <a:bodyPr wrap="square" tIns="0" bIns="0" lIns="25400" rIns="25400">
+            <a:spAutoFit/>
+          </a:bodyPr>
+          <a:lstStyle/>
+          <a:p>
+            <a:pPr algn="l"/>
+            <a:r>
+              <a:rPr sz="1000" b="0" i="0">
+                <a:solidFill>
                   <a:srgbClr val="6C757D"/>
                 </a:solidFill>
               </a:rPr>
-              <a:t>業務スーパー・コストコで前日調達
-　飲み物・お菓子・紙皿等</a:t>
-            </a:r>
-          </a:p>
-        </p:txBody>
-      </p:sp>
-      <p:sp>
-        <p:nvSpPr>
-          <p:cNvPr id="18" name="Rectangle 17"/>
+              <a:t>飲み物・お菓子・紙皿・ゴミ袋等</a:t>
+            </a:r>
+          </a:p>
+        </p:txBody>
+      </p:sp>
+      <p:sp>
+        <p:nvSpPr>
+          <p:cNvPr id="32" name="Rectangle 31"/>
           <p:cNvSpPr/>
           <p:nvPr/>
         </p:nvSpPr>
         <p:spPr>
           <a:xfrm>
-            <a:off x="6080760" y="1188720"/>
-            <a:ext cx="5760720" cy="5303520"/>
+            <a:off x="5989320" y="1170432"/>
+            <a:ext cx="5989320" cy="5486400"/>
           </a:xfrm>
           <a:prstGeom prst="rect">
             <a:avLst/>
@@ -6358,29 +6924,29 @@
       </p:sp>
       <p:sp>
         <p:nvSpPr>
-          <p:cNvPr id="19" name="TextBox 18"/>
-          <p:cNvSpPr txBox="1"/>
-          <p:nvPr/>
-        </p:nvSpPr>
-        <p:spPr>
-          <a:xfrm>
-            <a:off x="6263640" y="1280160"/>
-            <a:ext cx="5394960" cy="411480"/>
-          </a:xfrm>
-          <a:prstGeom prst="rect">
-            <a:avLst/>
-          </a:prstGeom>
-          <a:noFill/>
-        </p:spPr>
-        <p:txBody>
-          <a:bodyPr wrap="square">
+          <p:cNvPr id="33" name="TextBox 32"/>
+          <p:cNvSpPr txBox="1"/>
+          <p:nvPr/>
+        </p:nvSpPr>
+        <p:spPr>
+          <a:xfrm>
+            <a:off x="6153912" y="1261872"/>
+            <a:ext cx="5660136" cy="365760"/>
+          </a:xfrm>
+          <a:prstGeom prst="rect">
+            <a:avLst/>
+          </a:prstGeom>
+          <a:noFill/>
+        </p:spPr>
+        <p:txBody>
+          <a:bodyPr wrap="square" tIns="0" bIns="0" lIns="25400" rIns="25400">
             <a:spAutoFit/>
           </a:bodyPr>
           <a:lstStyle/>
           <a:p>
             <a:pPr algn="l"/>
             <a:r>
-              <a:rPr sz="1500" b="1" i="0">
+              <a:rPr sz="1400" b="1" i="0">
                 <a:solidFill>
                   <a:srgbClr val="1A375E"/>
                 </a:solidFill>
@@ -6392,14 +6958,14 @@
       </p:sp>
       <p:sp>
         <p:nvSpPr>
-          <p:cNvPr id="20" name="Rectangle 19"/>
+          <p:cNvPr id="34" name="Rectangle 33"/>
           <p:cNvSpPr/>
           <p:nvPr/>
         </p:nvSpPr>
         <p:spPr>
           <a:xfrm>
-            <a:off x="6080760" y="1673352"/>
-            <a:ext cx="5760720" cy="36576"/>
+            <a:off x="5989320" y="1627632"/>
+            <a:ext cx="5989320" cy="36576"/>
           </a:xfrm>
           <a:prstGeom prst="rect">
             <a:avLst/>
@@ -6435,29 +7001,29 @@
       </p:sp>
       <p:sp>
         <p:nvSpPr>
-          <p:cNvPr id="21" name="TextBox 20"/>
-          <p:cNvSpPr txBox="1"/>
-          <p:nvPr/>
-        </p:nvSpPr>
-        <p:spPr>
-          <a:xfrm>
-            <a:off x="6263640" y="1874519"/>
-            <a:ext cx="3840480" cy="347472"/>
-          </a:xfrm>
-          <a:prstGeom prst="rect">
-            <a:avLst/>
-          </a:prstGeom>
-          <a:noFill/>
-        </p:spPr>
-        <p:txBody>
-          <a:bodyPr wrap="square">
+          <p:cNvPr id="35" name="TextBox 34"/>
+          <p:cNvSpPr txBox="1"/>
+          <p:nvPr/>
+        </p:nvSpPr>
+        <p:spPr>
+          <a:xfrm>
+            <a:off x="6153912" y="1700784"/>
+            <a:ext cx="3703320" cy="329184"/>
+          </a:xfrm>
+          <a:prstGeom prst="rect">
+            <a:avLst/>
+          </a:prstGeom>
+          <a:noFill/>
+        </p:spPr>
+        <p:txBody>
+          <a:bodyPr wrap="square" tIns="0" bIns="0" lIns="25400" rIns="25400">
             <a:spAutoFit/>
           </a:bodyPr>
           <a:lstStyle/>
           <a:p>
             <a:pPr algn="l"/>
             <a:r>
-              <a:rPr sz="1200" b="0" i="0">
+              <a:rPr sz="1100" b="0" i="0">
                 <a:solidFill>
                   <a:srgbClr val="1A1A2E"/>
                 </a:solidFill>
@@ -6469,29 +7035,29 @@
       </p:sp>
       <p:sp>
         <p:nvSpPr>
-          <p:cNvPr id="22" name="TextBox 21"/>
-          <p:cNvSpPr txBox="1"/>
-          <p:nvPr/>
-        </p:nvSpPr>
-        <p:spPr>
-          <a:xfrm>
-            <a:off x="9601200" y="1874519"/>
-            <a:ext cx="2103120" cy="347472"/>
-          </a:xfrm>
-          <a:prstGeom prst="rect">
-            <a:avLst/>
-          </a:prstGeom>
-          <a:noFill/>
-        </p:spPr>
-        <p:txBody>
-          <a:bodyPr wrap="square">
+          <p:cNvPr id="36" name="TextBox 35"/>
+          <p:cNvSpPr txBox="1"/>
+          <p:nvPr/>
+        </p:nvSpPr>
+        <p:spPr>
+          <a:xfrm>
+            <a:off x="9966959" y="1700784"/>
+            <a:ext cx="1828800" cy="329184"/>
+          </a:xfrm>
+          <a:prstGeom prst="rect">
+            <a:avLst/>
+          </a:prstGeom>
+          <a:noFill/>
+        </p:spPr>
+        <p:txBody>
+          <a:bodyPr wrap="square" tIns="0" bIns="0" lIns="25400" rIns="25400">
             <a:spAutoFit/>
           </a:bodyPr>
           <a:lstStyle/>
           <a:p>
             <a:pPr algn="r"/>
             <a:r>
-              <a:rPr sz="1200" b="0" i="0">
+              <a:rPr sz="1100" b="0" i="0">
                 <a:solidFill>
                   <a:srgbClr val="1A1A2E"/>
                 </a:solidFill>
@@ -6503,14 +7069,14 @@
       </p:sp>
       <p:sp>
         <p:nvSpPr>
-          <p:cNvPr id="23" name="Rectangle 22"/>
+          <p:cNvPr id="37" name="Rectangle 36"/>
           <p:cNvSpPr/>
           <p:nvPr/>
         </p:nvSpPr>
         <p:spPr>
           <a:xfrm>
-            <a:off x="6080760" y="2221991"/>
-            <a:ext cx="5760720" cy="18288"/>
+            <a:off x="6099048" y="2029967"/>
+            <a:ext cx="5769864" cy="18288"/>
           </a:xfrm>
           <a:prstGeom prst="rect">
             <a:avLst/>
@@ -6546,63 +7112,63 @@
       </p:sp>
       <p:sp>
         <p:nvSpPr>
-          <p:cNvPr id="24" name="TextBox 23"/>
-          <p:cNvSpPr txBox="1"/>
-          <p:nvPr/>
-        </p:nvSpPr>
-        <p:spPr>
-          <a:xfrm>
-            <a:off x="6263640" y="2331720"/>
-            <a:ext cx="3840480" cy="347472"/>
-          </a:xfrm>
-          <a:prstGeom prst="rect">
-            <a:avLst/>
-          </a:prstGeom>
-          <a:noFill/>
-        </p:spPr>
-        <p:txBody>
-          <a:bodyPr wrap="square">
+          <p:cNvPr id="38" name="TextBox 37"/>
+          <p:cNvSpPr txBox="1"/>
+          <p:nvPr/>
+        </p:nvSpPr>
+        <p:spPr>
+          <a:xfrm>
+            <a:off x="6153912" y="2121408"/>
+            <a:ext cx="3703320" cy="329184"/>
+          </a:xfrm>
+          <a:prstGeom prst="rect">
+            <a:avLst/>
+          </a:prstGeom>
+          <a:noFill/>
+        </p:spPr>
+        <p:txBody>
+          <a:bodyPr wrap="square" tIns="0" bIns="0" lIns="25400" rIns="25400">
             <a:spAutoFit/>
           </a:bodyPr>
           <a:lstStyle/>
           <a:p>
             <a:pPr algn="l"/>
             <a:r>
-              <a:rPr sz="1200" b="0" i="0">
+              <a:rPr sz="1100" b="0" i="0">
                 <a:solidFill>
                   <a:srgbClr val="1A1A2E"/>
                 </a:solidFill>
               </a:rPr>
-              <a:t>寿司テイクアウト×3〜4本</a:t>
-            </a:r>
-          </a:p>
-        </p:txBody>
-      </p:sp>
-      <p:sp>
-        <p:nvSpPr>
-          <p:cNvPr id="25" name="TextBox 24"/>
-          <p:cNvSpPr txBox="1"/>
-          <p:nvPr/>
-        </p:nvSpPr>
-        <p:spPr>
-          <a:xfrm>
-            <a:off x="9601200" y="2331720"/>
-            <a:ext cx="2103120" cy="347472"/>
-          </a:xfrm>
-          <a:prstGeom prst="rect">
-            <a:avLst/>
-          </a:prstGeom>
-          <a:noFill/>
-        </p:spPr>
-        <p:txBody>
-          <a:bodyPr wrap="square">
+              <a:t>寿司テイクアウト × 3〜4本</a:t>
+            </a:r>
+          </a:p>
+        </p:txBody>
+      </p:sp>
+      <p:sp>
+        <p:nvSpPr>
+          <p:cNvPr id="39" name="TextBox 38"/>
+          <p:cNvSpPr txBox="1"/>
+          <p:nvPr/>
+        </p:nvSpPr>
+        <p:spPr>
+          <a:xfrm>
+            <a:off x="9966959" y="2121408"/>
+            <a:ext cx="1828800" cy="329184"/>
+          </a:xfrm>
+          <a:prstGeom prst="rect">
+            <a:avLst/>
+          </a:prstGeom>
+          <a:noFill/>
+        </p:spPr>
+        <p:txBody>
+          <a:bodyPr wrap="square" tIns="0" bIns="0" lIns="25400" rIns="25400">
             <a:spAutoFit/>
           </a:bodyPr>
           <a:lstStyle/>
           <a:p>
             <a:pPr algn="r"/>
             <a:r>
-              <a:rPr sz="1200" b="0" i="0">
+              <a:rPr sz="1100" b="0" i="0">
                 <a:solidFill>
                   <a:srgbClr val="1A1A2E"/>
                 </a:solidFill>
@@ -6614,14 +7180,14 @@
       </p:sp>
       <p:sp>
         <p:nvSpPr>
-          <p:cNvPr id="26" name="Rectangle 25"/>
+          <p:cNvPr id="40" name="Rectangle 39"/>
           <p:cNvSpPr/>
           <p:nvPr/>
         </p:nvSpPr>
         <p:spPr>
           <a:xfrm>
-            <a:off x="6080760" y="2679191"/>
-            <a:ext cx="5760720" cy="18288"/>
+            <a:off x="6099048" y="2450591"/>
+            <a:ext cx="5769864" cy="18288"/>
           </a:xfrm>
           <a:prstGeom prst="rect">
             <a:avLst/>
@@ -6657,29 +7223,29 @@
       </p:sp>
       <p:sp>
         <p:nvSpPr>
-          <p:cNvPr id="27" name="TextBox 26"/>
-          <p:cNvSpPr txBox="1"/>
-          <p:nvPr/>
-        </p:nvSpPr>
-        <p:spPr>
-          <a:xfrm>
-            <a:off x="6263640" y="2788920"/>
-            <a:ext cx="3840480" cy="347472"/>
-          </a:xfrm>
-          <a:prstGeom prst="rect">
-            <a:avLst/>
-          </a:prstGeom>
-          <a:noFill/>
-        </p:spPr>
-        <p:txBody>
-          <a:bodyPr wrap="square">
+          <p:cNvPr id="41" name="TextBox 40"/>
+          <p:cNvSpPr txBox="1"/>
+          <p:nvPr/>
+        </p:nvSpPr>
+        <p:spPr>
+          <a:xfrm>
+            <a:off x="6153912" y="2542032"/>
+            <a:ext cx="3703320" cy="329184"/>
+          </a:xfrm>
+          <a:prstGeom prst="rect">
+            <a:avLst/>
+          </a:prstGeom>
+          <a:noFill/>
+        </p:spPr>
+        <p:txBody>
+          <a:bodyPr wrap="square" tIns="0" bIns="0" lIns="25400" rIns="25400">
             <a:spAutoFit/>
           </a:bodyPr>
           <a:lstStyle/>
           <a:p>
             <a:pPr algn="l"/>
             <a:r>
-              <a:rPr sz="1200" b="0" i="0">
+              <a:rPr sz="1100" b="0" i="0">
                 <a:solidFill>
                   <a:srgbClr val="1A1A2E"/>
                 </a:solidFill>
@@ -6691,29 +7257,29 @@
       </p:sp>
       <p:sp>
         <p:nvSpPr>
-          <p:cNvPr id="28" name="TextBox 27"/>
-          <p:cNvSpPr txBox="1"/>
-          <p:nvPr/>
-        </p:nvSpPr>
-        <p:spPr>
-          <a:xfrm>
-            <a:off x="9601200" y="2788920"/>
-            <a:ext cx="2103120" cy="347472"/>
-          </a:xfrm>
-          <a:prstGeom prst="rect">
-            <a:avLst/>
-          </a:prstGeom>
-          <a:noFill/>
-        </p:spPr>
-        <p:txBody>
-          <a:bodyPr wrap="square">
+          <p:cNvPr id="42" name="TextBox 41"/>
+          <p:cNvSpPr txBox="1"/>
+          <p:nvPr/>
+        </p:nvSpPr>
+        <p:spPr>
+          <a:xfrm>
+            <a:off x="9966959" y="2542032"/>
+            <a:ext cx="1828800" cy="329184"/>
+          </a:xfrm>
+          <a:prstGeom prst="rect">
+            <a:avLst/>
+          </a:prstGeom>
+          <a:noFill/>
+        </p:spPr>
+        <p:txBody>
+          <a:bodyPr wrap="square" tIns="0" bIns="0" lIns="25400" rIns="25400">
             <a:spAutoFit/>
           </a:bodyPr>
           <a:lstStyle/>
           <a:p>
             <a:pPr algn="r"/>
             <a:r>
-              <a:rPr sz="1200" b="0" i="0">
+              <a:rPr sz="1100" b="0" i="0">
                 <a:solidFill>
                   <a:srgbClr val="1A1A2E"/>
                 </a:solidFill>
@@ -6725,14 +7291,14 @@
       </p:sp>
       <p:sp>
         <p:nvSpPr>
-          <p:cNvPr id="29" name="Rectangle 28"/>
+          <p:cNvPr id="43" name="Rectangle 42"/>
           <p:cNvSpPr/>
           <p:nvPr/>
         </p:nvSpPr>
         <p:spPr>
           <a:xfrm>
-            <a:off x="6080760" y="3136391"/>
-            <a:ext cx="5760720" cy="18288"/>
+            <a:off x="6099048" y="2871215"/>
+            <a:ext cx="5769864" cy="18288"/>
           </a:xfrm>
           <a:prstGeom prst="rect">
             <a:avLst/>
@@ -6768,29 +7334,29 @@
       </p:sp>
       <p:sp>
         <p:nvSpPr>
-          <p:cNvPr id="30" name="TextBox 29"/>
-          <p:cNvSpPr txBox="1"/>
-          <p:nvPr/>
-        </p:nvSpPr>
-        <p:spPr>
-          <a:xfrm>
-            <a:off x="6263640" y="3246120"/>
-            <a:ext cx="3840480" cy="347472"/>
-          </a:xfrm>
-          <a:prstGeom prst="rect">
-            <a:avLst/>
-          </a:prstGeom>
-          <a:noFill/>
-        </p:spPr>
-        <p:txBody>
-          <a:bodyPr wrap="square">
+          <p:cNvPr id="44" name="TextBox 43"/>
+          <p:cNvSpPr txBox="1"/>
+          <p:nvPr/>
+        </p:nvSpPr>
+        <p:spPr>
+          <a:xfrm>
+            <a:off x="6153912" y="2962656"/>
+            <a:ext cx="3703320" cy="329184"/>
+          </a:xfrm>
+          <a:prstGeom prst="rect">
+            <a:avLst/>
+          </a:prstGeom>
+          <a:noFill/>
+        </p:spPr>
+        <p:txBody>
+          <a:bodyPr wrap="square" tIns="0" bIns="0" lIns="25400" rIns="25400">
             <a:spAutoFit/>
           </a:bodyPr>
           <a:lstStyle/>
           <a:p>
             <a:pPr algn="l"/>
             <a:r>
-              <a:rPr sz="1200" b="0" i="0">
+              <a:rPr sz="1100" b="0" i="0">
                 <a:solidFill>
                   <a:srgbClr val="1A1A2E"/>
                 </a:solidFill>
@@ -6802,29 +7368,29 @@
       </p:sp>
       <p:sp>
         <p:nvSpPr>
-          <p:cNvPr id="31" name="TextBox 30"/>
-          <p:cNvSpPr txBox="1"/>
-          <p:nvPr/>
-        </p:nvSpPr>
-        <p:spPr>
-          <a:xfrm>
-            <a:off x="9601200" y="3246120"/>
-            <a:ext cx="2103120" cy="347472"/>
-          </a:xfrm>
-          <a:prstGeom prst="rect">
-            <a:avLst/>
-          </a:prstGeom>
-          <a:noFill/>
-        </p:spPr>
-        <p:txBody>
-          <a:bodyPr wrap="square">
+          <p:cNvPr id="45" name="TextBox 44"/>
+          <p:cNvSpPr txBox="1"/>
+          <p:nvPr/>
+        </p:nvSpPr>
+        <p:spPr>
+          <a:xfrm>
+            <a:off x="9966959" y="2962656"/>
+            <a:ext cx="1828800" cy="329184"/>
+          </a:xfrm>
+          <a:prstGeom prst="rect">
+            <a:avLst/>
+          </a:prstGeom>
+          <a:noFill/>
+        </p:spPr>
+        <p:txBody>
+          <a:bodyPr wrap="square" tIns="0" bIns="0" lIns="25400" rIns="25400">
             <a:spAutoFit/>
           </a:bodyPr>
           <a:lstStyle/>
           <a:p>
             <a:pPr algn="r"/>
             <a:r>
-              <a:rPr sz="1200" b="0" i="0">
+              <a:rPr sz="1100" b="0" i="0">
                 <a:solidFill>
                   <a:srgbClr val="1A1A2E"/>
                 </a:solidFill>
@@ -6836,14 +7402,14 @@
       </p:sp>
       <p:sp>
         <p:nvSpPr>
-          <p:cNvPr id="32" name="Rectangle 31"/>
+          <p:cNvPr id="46" name="Rectangle 45"/>
           <p:cNvSpPr/>
           <p:nvPr/>
         </p:nvSpPr>
         <p:spPr>
           <a:xfrm>
-            <a:off x="6080760" y="3593591"/>
-            <a:ext cx="5760720" cy="18288"/>
+            <a:off x="6099048" y="3291840"/>
+            <a:ext cx="5769864" cy="18288"/>
           </a:xfrm>
           <a:prstGeom prst="rect">
             <a:avLst/>
@@ -6879,14 +7445,14 @@
       </p:sp>
       <p:sp>
         <p:nvSpPr>
-          <p:cNvPr id="33" name="Rectangle 32"/>
+          <p:cNvPr id="47" name="Rectangle 46"/>
           <p:cNvSpPr/>
           <p:nvPr/>
         </p:nvSpPr>
         <p:spPr>
           <a:xfrm>
-            <a:off x="6080760" y="3794759"/>
-            <a:ext cx="5760720" cy="685800"/>
+            <a:off x="5989320" y="3474720"/>
+            <a:ext cx="5989320" cy="502920"/>
           </a:xfrm>
           <a:prstGeom prst="rect">
             <a:avLst/>
@@ -6922,29 +7488,29 @@
       </p:sp>
       <p:sp>
         <p:nvSpPr>
-          <p:cNvPr id="34" name="TextBox 33"/>
-          <p:cNvSpPr txBox="1"/>
-          <p:nvPr/>
-        </p:nvSpPr>
-        <p:spPr>
-          <a:xfrm>
-            <a:off x="6263640" y="3867911"/>
-            <a:ext cx="3840480" cy="457200"/>
-          </a:xfrm>
-          <a:prstGeom prst="rect">
-            <a:avLst/>
-          </a:prstGeom>
-          <a:noFill/>
-        </p:spPr>
-        <p:txBody>
-          <a:bodyPr wrap="square">
+          <p:cNvPr id="48" name="TextBox 47"/>
+          <p:cNvSpPr txBox="1"/>
+          <p:nvPr/>
+        </p:nvSpPr>
+        <p:spPr>
+          <a:xfrm>
+            <a:off x="6153912" y="3547872"/>
+            <a:ext cx="3703320" cy="347472"/>
+          </a:xfrm>
+          <a:prstGeom prst="rect">
+            <a:avLst/>
+          </a:prstGeom>
+          <a:noFill/>
+        </p:spPr>
+        <p:txBody>
+          <a:bodyPr wrap="square" tIns="0" bIns="0" lIns="25400" rIns="25400">
             <a:spAutoFit/>
           </a:bodyPr>
           <a:lstStyle/>
           <a:p>
             <a:pPr algn="l"/>
             <a:r>
-              <a:rPr sz="1400" b="1" i="0">
+              <a:rPr sz="1300" b="1" i="0">
                 <a:solidFill>
                   <a:srgbClr val="FFFFFF"/>
                 </a:solidFill>
@@ -6956,29 +7522,29 @@
       </p:sp>
       <p:sp>
         <p:nvSpPr>
-          <p:cNvPr id="35" name="TextBox 34"/>
-          <p:cNvSpPr txBox="1"/>
-          <p:nvPr/>
-        </p:nvSpPr>
-        <p:spPr>
-          <a:xfrm>
-            <a:off x="8321040" y="3867911"/>
-            <a:ext cx="3383280" cy="457200"/>
-          </a:xfrm>
-          <a:prstGeom prst="rect">
-            <a:avLst/>
-          </a:prstGeom>
-          <a:noFill/>
-        </p:spPr>
-        <p:txBody>
-          <a:bodyPr wrap="square">
+          <p:cNvPr id="49" name="TextBox 48"/>
+          <p:cNvSpPr txBox="1"/>
+          <p:nvPr/>
+        </p:nvSpPr>
+        <p:spPr>
+          <a:xfrm>
+            <a:off x="9418320" y="3547872"/>
+            <a:ext cx="2377440" cy="347472"/>
+          </a:xfrm>
+          <a:prstGeom prst="rect">
+            <a:avLst/>
+          </a:prstGeom>
+          <a:noFill/>
+        </p:spPr>
+        <p:txBody>
+          <a:bodyPr wrap="square" tIns="0" bIns="0" lIns="25400" rIns="25400">
             <a:spAutoFit/>
           </a:bodyPr>
           <a:lstStyle/>
           <a:p>
             <a:pPr algn="r"/>
             <a:r>
-              <a:rPr sz="1400" b="1" i="0">
+              <a:rPr sz="1300" b="1" i="0">
                 <a:solidFill>
                   <a:srgbClr val="C89B3C"/>
                 </a:solidFill>
@@ -6990,20 +7556,20 @@
       </p:sp>
       <p:sp>
         <p:nvSpPr>
-          <p:cNvPr id="36" name="Rectangle 35"/>
+          <p:cNvPr id="50" name="Rectangle 49"/>
           <p:cNvSpPr/>
           <p:nvPr/>
         </p:nvSpPr>
         <p:spPr>
           <a:xfrm>
-            <a:off x="6080760" y="4617720"/>
-            <a:ext cx="5760720" cy="685800"/>
+            <a:off x="5989320" y="4069080"/>
+            <a:ext cx="5989320" cy="475488"/>
           </a:xfrm>
           <a:prstGeom prst="rect">
             <a:avLst/>
           </a:prstGeom>
           <a:solidFill>
-            <a:srgbClr val="F4F6FA"/>
+            <a:srgbClr val="FFF3CD"/>
           </a:solidFill>
           <a:ln w="12700">
             <a:solidFill>
@@ -7035,29 +7601,29 @@
       </p:sp>
       <p:sp>
         <p:nvSpPr>
-          <p:cNvPr id="37" name="TextBox 36"/>
-          <p:cNvSpPr txBox="1"/>
-          <p:nvPr/>
-        </p:nvSpPr>
-        <p:spPr>
-          <a:xfrm>
-            <a:off x="6263640" y="4690872"/>
-            <a:ext cx="3840480" cy="457200"/>
-          </a:xfrm>
-          <a:prstGeom prst="rect">
-            <a:avLst/>
-          </a:prstGeom>
-          <a:noFill/>
-        </p:spPr>
-        <p:txBody>
-          <a:bodyPr wrap="square">
+          <p:cNvPr id="51" name="TextBox 50"/>
+          <p:cNvSpPr txBox="1"/>
+          <p:nvPr/>
+        </p:nvSpPr>
+        <p:spPr>
+          <a:xfrm>
+            <a:off x="6153912" y="4142232"/>
+            <a:ext cx="3703320" cy="329184"/>
+          </a:xfrm>
+          <a:prstGeom prst="rect">
+            <a:avLst/>
+          </a:prstGeom>
+          <a:noFill/>
+        </p:spPr>
+        <p:txBody>
+          <a:bodyPr wrap="square" tIns="0" bIns="0" lIns="25400" rIns="25400">
             <a:spAutoFit/>
           </a:bodyPr>
           <a:lstStyle/>
           <a:p>
             <a:pPr algn="l"/>
             <a:r>
-              <a:rPr sz="1400" b="1" i="0">
+              <a:rPr sz="1300" b="1" i="0">
                 <a:solidFill>
                   <a:srgbClr val="1A375E"/>
                 </a:solidFill>
@@ -7069,29 +7635,29 @@
       </p:sp>
       <p:sp>
         <p:nvSpPr>
-          <p:cNvPr id="38" name="TextBox 37"/>
-          <p:cNvSpPr txBox="1"/>
-          <p:nvPr/>
-        </p:nvSpPr>
-        <p:spPr>
-          <a:xfrm>
-            <a:off x="8321040" y="4690872"/>
-            <a:ext cx="3383280" cy="457200"/>
-          </a:xfrm>
-          <a:prstGeom prst="rect">
-            <a:avLst/>
-          </a:prstGeom>
-          <a:noFill/>
-        </p:spPr>
-        <p:txBody>
-          <a:bodyPr wrap="square">
+          <p:cNvPr id="52" name="TextBox 51"/>
+          <p:cNvSpPr txBox="1"/>
+          <p:nvPr/>
+        </p:nvSpPr>
+        <p:spPr>
+          <a:xfrm>
+            <a:off x="9418320" y="4142232"/>
+            <a:ext cx="2377440" cy="329184"/>
+          </a:xfrm>
+          <a:prstGeom prst="rect">
+            <a:avLst/>
+          </a:prstGeom>
+          <a:noFill/>
+        </p:spPr>
+        <p:txBody>
+          <a:bodyPr wrap="square" tIns="0" bIns="0" lIns="25400" rIns="25400">
             <a:spAutoFit/>
           </a:bodyPr>
           <a:lstStyle/>
           <a:p>
             <a:pPr algn="r"/>
             <a:r>
-              <a:rPr sz="1400" b="1" i="0">
+              <a:rPr sz="1300" b="1" i="0">
                 <a:solidFill>
                   <a:srgbClr val="277D52"/>
                 </a:solidFill>
@@ -7103,22 +7669,22 @@
       </p:sp>
       <p:sp>
         <p:nvSpPr>
-          <p:cNvPr id="39" name="TextBox 38"/>
-          <p:cNvSpPr txBox="1"/>
-          <p:nvPr/>
-        </p:nvSpPr>
-        <p:spPr>
-          <a:xfrm>
-            <a:off x="6263640" y="5577840"/>
-            <a:ext cx="5394960" cy="347472"/>
-          </a:xfrm>
-          <a:prstGeom prst="rect">
-            <a:avLst/>
-          </a:prstGeom>
-          <a:noFill/>
-        </p:spPr>
-        <p:txBody>
-          <a:bodyPr wrap="square">
+          <p:cNvPr id="53" name="TextBox 52"/>
+          <p:cNvSpPr txBox="1"/>
+          <p:nvPr/>
+        </p:nvSpPr>
+        <p:spPr>
+          <a:xfrm>
+            <a:off x="6153912" y="4727448"/>
+            <a:ext cx="5660136" cy="310896"/>
+          </a:xfrm>
+          <a:prstGeom prst="rect">
+            <a:avLst/>
+          </a:prstGeom>
+          <a:noFill/>
+        </p:spPr>
+        <p:txBody>
+          <a:bodyPr wrap="square" tIns="0" bIns="0" lIns="25400" rIns="25400">
             <a:spAutoFit/>
           </a:bodyPr>
           <a:lstStyle/>
@@ -7137,165 +7703,208 @@
       </p:sp>
       <p:sp>
         <p:nvSpPr>
-          <p:cNvPr id="40" name="TextBox 39"/>
-          <p:cNvSpPr txBox="1"/>
-          <p:nvPr/>
-        </p:nvSpPr>
-        <p:spPr>
-          <a:xfrm>
-            <a:off x="6263640" y="5961888"/>
-            <a:ext cx="5394960" cy="347472"/>
-          </a:xfrm>
-          <a:prstGeom prst="rect">
-            <a:avLst/>
-          </a:prstGeom>
-          <a:noFill/>
-        </p:spPr>
-        <p:txBody>
-          <a:bodyPr wrap="square">
+          <p:cNvPr id="54" name="Rectangle 53"/>
+          <p:cNvSpPr/>
+          <p:nvPr/>
+        </p:nvSpPr>
+        <p:spPr>
+          <a:xfrm>
+            <a:off x="6099048" y="5038344"/>
+            <a:ext cx="5769864" cy="27432"/>
+          </a:xfrm>
+          <a:prstGeom prst="rect">
+            <a:avLst/>
+          </a:prstGeom>
+          <a:solidFill>
+            <a:srgbClr val="C89B3C"/>
+          </a:solidFill>
+          <a:ln>
+            <a:noFill/>
+          </a:ln>
+        </p:spPr>
+        <p:style>
+          <a:lnRef idx="1">
+            <a:schemeClr val="accent1"/>
+          </a:lnRef>
+          <a:fillRef idx="3">
+            <a:schemeClr val="accent1"/>
+          </a:fillRef>
+          <a:effectRef idx="2">
+            <a:schemeClr val="accent1"/>
+          </a:effectRef>
+          <a:fontRef idx="minor">
+            <a:schemeClr val="lt1"/>
+          </a:fontRef>
+        </p:style>
+        <p:txBody>
+          <a:bodyPr rtlCol="0" anchor="ctr"/>
+          <a:lstStyle/>
+          <a:p>
+            <a:pPr algn="ctr"/>
+          </a:p>
+        </p:txBody>
+      </p:sp>
+      <p:sp>
+        <p:nvSpPr>
+          <p:cNvPr id="55" name="TextBox 54"/>
+          <p:cNvSpPr txBox="1"/>
+          <p:nvPr/>
+        </p:nvSpPr>
+        <p:spPr>
+          <a:xfrm>
+            <a:off x="6153912" y="5129784"/>
+            <a:ext cx="5660136" cy="274320"/>
+          </a:xfrm>
+          <a:prstGeom prst="rect">
+            <a:avLst/>
+          </a:prstGeom>
+          <a:noFill/>
+        </p:spPr>
+        <p:txBody>
+          <a:bodyPr wrap="square" tIns="0" bIns="0" lIns="25400" rIns="25400">
             <a:spAutoFit/>
           </a:bodyPr>
           <a:lstStyle/>
           <a:p>
             <a:pPr algn="l"/>
             <a:r>
-              <a:rPr sz="1100" b="0" i="0">
+              <a:rPr sz="1000" b="0" i="0">
                 <a:solidFill>
                   <a:srgbClr val="1A1A2E"/>
                 </a:solidFill>
               </a:rPr>
-              <a:t>✔  紙皿・紙コップ・割り箸</a:t>
-            </a:r>
-          </a:p>
-        </p:txBody>
-      </p:sp>
-      <p:sp>
-        <p:nvSpPr>
-          <p:cNvPr id="41" name="TextBox 40"/>
-          <p:cNvSpPr txBox="1"/>
-          <p:nvPr/>
-        </p:nvSpPr>
-        <p:spPr>
-          <a:xfrm>
-            <a:off x="6263640" y="6345936"/>
-            <a:ext cx="5394960" cy="347472"/>
-          </a:xfrm>
-          <a:prstGeom prst="rect">
-            <a:avLst/>
-          </a:prstGeom>
-          <a:noFill/>
-        </p:spPr>
-        <p:txBody>
-          <a:bodyPr wrap="square">
+              <a:t>✔  紙皿・紙コップ・割り箸（多めに）</a:t>
+            </a:r>
+          </a:p>
+        </p:txBody>
+      </p:sp>
+      <p:sp>
+        <p:nvSpPr>
+          <p:cNvPr id="56" name="TextBox 55"/>
+          <p:cNvSpPr txBox="1"/>
+          <p:nvPr/>
+        </p:nvSpPr>
+        <p:spPr>
+          <a:xfrm>
+            <a:off x="6153912" y="5422392"/>
+            <a:ext cx="5660136" cy="274320"/>
+          </a:xfrm>
+          <a:prstGeom prst="rect">
+            <a:avLst/>
+          </a:prstGeom>
+          <a:noFill/>
+        </p:spPr>
+        <p:txBody>
+          <a:bodyPr wrap="square" tIns="0" bIns="0" lIns="25400" rIns="25400">
             <a:spAutoFit/>
           </a:bodyPr>
           <a:lstStyle/>
           <a:p>
             <a:pPr algn="l"/>
             <a:r>
-              <a:rPr sz="1100" b="0" i="0">
+              <a:rPr sz="1000" b="0" i="0">
                 <a:solidFill>
                   <a:srgbClr val="1A1A2E"/>
                 </a:solidFill>
               </a:rPr>
-              <a:t>✔  ゴミ袋（大）×数枚</a:t>
-            </a:r>
-          </a:p>
-        </p:txBody>
-      </p:sp>
-      <p:sp>
-        <p:nvSpPr>
-          <p:cNvPr id="42" name="TextBox 41"/>
-          <p:cNvSpPr txBox="1"/>
-          <p:nvPr/>
-        </p:nvSpPr>
-        <p:spPr>
-          <a:xfrm>
-            <a:off x="6263640" y="6729983"/>
-            <a:ext cx="5394960" cy="347472"/>
-          </a:xfrm>
-          <a:prstGeom prst="rect">
-            <a:avLst/>
-          </a:prstGeom>
-          <a:noFill/>
-        </p:spPr>
-        <p:txBody>
-          <a:bodyPr wrap="square">
+              <a:t>✔  ゴミ袋（大）× 数枚</a:t>
+            </a:r>
+          </a:p>
+        </p:txBody>
+      </p:sp>
+      <p:sp>
+        <p:nvSpPr>
+          <p:cNvPr id="57" name="TextBox 56"/>
+          <p:cNvSpPr txBox="1"/>
+          <p:nvPr/>
+        </p:nvSpPr>
+        <p:spPr>
+          <a:xfrm>
+            <a:off x="6153912" y="5715000"/>
+            <a:ext cx="5660136" cy="274320"/>
+          </a:xfrm>
+          <a:prstGeom prst="rect">
+            <a:avLst/>
+          </a:prstGeom>
+          <a:noFill/>
+        </p:spPr>
+        <p:txBody>
+          <a:bodyPr wrap="square" tIns="0" bIns="0" lIns="25400" rIns="25400">
             <a:spAutoFit/>
           </a:bodyPr>
           <a:lstStyle/>
           <a:p>
             <a:pPr algn="l"/>
             <a:r>
-              <a:rPr sz="1100" b="0" i="0">
+              <a:rPr sz="1000" b="0" i="0">
                 <a:solidFill>
                   <a:srgbClr val="1A1A2E"/>
                 </a:solidFill>
               </a:rPr>
-              <a:t>✔  トランプ・UNO・ゲーム類</a:t>
-            </a:r>
-          </a:p>
-        </p:txBody>
-      </p:sp>
-      <p:sp>
-        <p:nvSpPr>
-          <p:cNvPr id="43" name="TextBox 42"/>
-          <p:cNvSpPr txBox="1"/>
-          <p:nvPr/>
-        </p:nvSpPr>
-        <p:spPr>
-          <a:xfrm>
-            <a:off x="6263640" y="7114031"/>
-            <a:ext cx="5394960" cy="347472"/>
-          </a:xfrm>
-          <a:prstGeom prst="rect">
-            <a:avLst/>
-          </a:prstGeom>
-          <a:noFill/>
-        </p:spPr>
-        <p:txBody>
-          <a:bodyPr wrap="square">
+              <a:t>✔  トランプ・UNO・ボードゲーム</a:t>
+            </a:r>
+          </a:p>
+        </p:txBody>
+      </p:sp>
+      <p:sp>
+        <p:nvSpPr>
+          <p:cNvPr id="58" name="TextBox 57"/>
+          <p:cNvSpPr txBox="1"/>
+          <p:nvPr/>
+        </p:nvSpPr>
+        <p:spPr>
+          <a:xfrm>
+            <a:off x="6153912" y="6007608"/>
+            <a:ext cx="5660136" cy="274320"/>
+          </a:xfrm>
+          <a:prstGeom prst="rect">
+            <a:avLst/>
+          </a:prstGeom>
+          <a:noFill/>
+        </p:spPr>
+        <p:txBody>
+          <a:bodyPr wrap="square" tIns="0" bIns="0" lIns="25400" rIns="25400">
             <a:spAutoFit/>
           </a:bodyPr>
           <a:lstStyle/>
           <a:p>
             <a:pPr algn="l"/>
             <a:r>
-              <a:rPr sz="1100" b="0" i="0">
+              <a:rPr sz="1000" b="0" i="0">
                 <a:solidFill>
                   <a:srgbClr val="1A1A2E"/>
                 </a:solidFill>
               </a:rPr>
-              <a:t>✔  Bluetoothスピーカー</a:t>
-            </a:r>
-          </a:p>
-        </p:txBody>
-      </p:sp>
-      <p:sp>
-        <p:nvSpPr>
-          <p:cNvPr id="44" name="TextBox 43"/>
-          <p:cNvSpPr txBox="1"/>
-          <p:nvPr/>
-        </p:nvSpPr>
-        <p:spPr>
-          <a:xfrm>
-            <a:off x="6263640" y="7498079"/>
-            <a:ext cx="5394960" cy="347472"/>
-          </a:xfrm>
-          <a:prstGeom prst="rect">
-            <a:avLst/>
-          </a:prstGeom>
-          <a:noFill/>
-        </p:spPr>
-        <p:txBody>
-          <a:bodyPr wrap="square">
+              <a:t>✔  Bluetoothスピーカー（BGM用）</a:t>
+            </a:r>
+          </a:p>
+        </p:txBody>
+      </p:sp>
+      <p:sp>
+        <p:nvSpPr>
+          <p:cNvPr id="59" name="TextBox 58"/>
+          <p:cNvSpPr txBox="1"/>
+          <p:nvPr/>
+        </p:nvSpPr>
+        <p:spPr>
+          <a:xfrm>
+            <a:off x="6153912" y="6300216"/>
+            <a:ext cx="5660136" cy="274320"/>
+          </a:xfrm>
+          <a:prstGeom prst="rect">
+            <a:avLst/>
+          </a:prstGeom>
+          <a:noFill/>
+        </p:spPr>
+        <p:txBody>
+          <a:bodyPr wrap="square" tIns="0" bIns="0" lIns="25400" rIns="25400">
             <a:spAutoFit/>
           </a:bodyPr>
           <a:lstStyle/>
           <a:p>
             <a:pPr algn="l"/>
             <a:r>
-              <a:rPr sz="1100" b="0" i="0">
+              <a:rPr sz="1000" b="0" i="0">
                 <a:solidFill>
                   <a:srgbClr val="1A1A2E"/>
                 </a:solidFill>
@@ -7425,23 +8034,23 @@
         </p:nvSpPr>
         <p:spPr>
           <a:xfrm>
-            <a:off x="365760" y="109728"/>
-            <a:ext cx="9144000" cy="640080"/>
-          </a:xfrm>
-          <a:prstGeom prst="rect">
-            <a:avLst/>
-          </a:prstGeom>
-          <a:noFill/>
-        </p:spPr>
-        <p:txBody>
-          <a:bodyPr wrap="square">
+            <a:off x="320040" y="91440"/>
+            <a:ext cx="11430000" cy="566928"/>
+          </a:xfrm>
+          <a:prstGeom prst="rect">
+            <a:avLst/>
+          </a:prstGeom>
+          <a:noFill/>
+        </p:spPr>
+        <p:txBody>
+          <a:bodyPr wrap="square" tIns="0" bIns="0" lIns="25400" rIns="25400">
             <a:spAutoFit/>
           </a:bodyPr>
           <a:lstStyle/>
           <a:p>
             <a:pPr algn="l"/>
             <a:r>
-              <a:rPr sz="2600" b="1" i="0">
+              <a:rPr sz="2400" b="1" i="0">
                 <a:solidFill>
                   <a:srgbClr val="FFFFFF"/>
                 </a:solidFill>
@@ -7459,23 +8068,23 @@
         </p:nvSpPr>
         <p:spPr>
           <a:xfrm>
-            <a:off x="365760" y="621792"/>
-            <a:ext cx="9144000" cy="365760"/>
-          </a:xfrm>
-          <a:prstGeom prst="rect">
-            <a:avLst/>
-          </a:prstGeom>
-          <a:noFill/>
-        </p:spPr>
-        <p:txBody>
-          <a:bodyPr wrap="square">
+            <a:off x="320040" y="621792"/>
+            <a:ext cx="11430000" cy="329184"/>
+          </a:xfrm>
+          <a:prstGeom prst="rect">
+            <a:avLst/>
+          </a:prstGeom>
+          <a:noFill/>
+        </p:spPr>
+        <p:txBody>
+          <a:bodyPr wrap="square" tIns="0" bIns="0" lIns="25400" rIns="25400">
             <a:spAutoFit/>
           </a:bodyPr>
           <a:lstStyle/>
           <a:p>
             <a:pPr algn="l"/>
             <a:r>
-              <a:rPr sz="1200" b="0" i="0">
+              <a:rPr sz="1100" b="0" i="0">
                 <a:solidFill>
                   <a:srgbClr val="C89B3C"/>
                 </a:solidFill>
@@ -7493,8 +8102,8 @@
         </p:nvSpPr>
         <p:spPr>
           <a:xfrm>
-            <a:off x="274320" y="1188720"/>
-            <a:ext cx="7315200" cy="3200400"/>
+            <a:off x="228600" y="1170432"/>
+            <a:ext cx="7406640" cy="3154680"/>
           </a:xfrm>
           <a:prstGeom prst="rect">
             <a:avLst/>
@@ -7538,16 +8147,16 @@
         </p:nvSpPr>
         <p:spPr>
           <a:xfrm>
-            <a:off x="457200" y="1298448"/>
-            <a:ext cx="6949440" cy="502920"/>
-          </a:xfrm>
-          <a:prstGeom prst="rect">
-            <a:avLst/>
-          </a:prstGeom>
-          <a:noFill/>
-        </p:spPr>
-        <p:txBody>
-          <a:bodyPr wrap="square">
+            <a:off x="365760" y="1261872"/>
+            <a:ext cx="7132320" cy="457200"/>
+          </a:xfrm>
+          <a:prstGeom prst="rect">
+            <a:avLst/>
+          </a:prstGeom>
+          <a:noFill/>
+        </p:spPr>
+        <p:txBody>
+          <a:bodyPr wrap="square" tIns="0" bIns="0" lIns="25400" rIns="25400">
             <a:spAutoFit/>
           </a:bodyPr>
           <a:lstStyle/>
@@ -7572,8 +8181,8 @@
         </p:nvSpPr>
         <p:spPr>
           <a:xfrm>
-            <a:off x="274320" y="1783080"/>
-            <a:ext cx="7315200" cy="36576"/>
+            <a:off x="228600" y="1719072"/>
+            <a:ext cx="7406640" cy="36576"/>
           </a:xfrm>
           <a:prstGeom prst="rect">
             <a:avLst/>
@@ -7615,23 +8224,23 @@
         </p:nvSpPr>
         <p:spPr>
           <a:xfrm>
-            <a:off x="457200" y="1920240"/>
-            <a:ext cx="1828800" cy="411480"/>
-          </a:xfrm>
-          <a:prstGeom prst="rect">
-            <a:avLst/>
-          </a:prstGeom>
-          <a:noFill/>
-        </p:spPr>
-        <p:txBody>
-          <a:bodyPr wrap="square">
+            <a:off x="365760" y="1837943"/>
+            <a:ext cx="1600200" cy="365760"/>
+          </a:xfrm>
+          <a:prstGeom prst="rect">
+            <a:avLst/>
+          </a:prstGeom>
+          <a:noFill/>
+        </p:spPr>
+        <p:txBody>
+          <a:bodyPr wrap="square" tIns="0" bIns="0" lIns="25400" rIns="25400">
             <a:spAutoFit/>
           </a:bodyPr>
           <a:lstStyle/>
           <a:p>
             <a:pPr algn="l"/>
             <a:r>
-              <a:rPr sz="1200" b="1" i="0">
+              <a:rPr sz="1100" b="1" i="0">
                 <a:solidFill>
                   <a:srgbClr val="6C757D"/>
                 </a:solidFill>
@@ -7649,23 +8258,23 @@
         </p:nvSpPr>
         <p:spPr>
           <a:xfrm>
-            <a:off x="2377440" y="1920240"/>
-            <a:ext cx="5029200" cy="411480"/>
-          </a:xfrm>
-          <a:prstGeom prst="rect">
-            <a:avLst/>
-          </a:prstGeom>
-          <a:noFill/>
-        </p:spPr>
-        <p:txBody>
-          <a:bodyPr wrap="square">
+            <a:off x="2011680" y="1837943"/>
+            <a:ext cx="5486400" cy="365760"/>
+          </a:xfrm>
+          <a:prstGeom prst="rect">
+            <a:avLst/>
+          </a:prstGeom>
+          <a:noFill/>
+        </p:spPr>
+        <p:txBody>
+          <a:bodyPr wrap="square" tIns="0" bIns="0" lIns="25400" rIns="25400">
             <a:spAutoFit/>
           </a:bodyPr>
           <a:lstStyle/>
           <a:p>
             <a:pPr algn="l"/>
             <a:r>
-              <a:rPr sz="1200" b="0" i="0">
+              <a:rPr sz="1100" b="0" i="0">
                 <a:solidFill>
                   <a:srgbClr val="1A1A2E"/>
                 </a:solidFill>
@@ -7683,28 +8292,28 @@
         </p:nvSpPr>
         <p:spPr>
           <a:xfrm>
-            <a:off x="457200" y="2395728"/>
-            <a:ext cx="1828800" cy="411480"/>
-          </a:xfrm>
-          <a:prstGeom prst="rect">
-            <a:avLst/>
-          </a:prstGeom>
-          <a:noFill/>
-        </p:spPr>
-        <p:txBody>
-          <a:bodyPr wrap="square">
+            <a:off x="365760" y="2313432"/>
+            <a:ext cx="1600200" cy="365760"/>
+          </a:xfrm>
+          <a:prstGeom prst="rect">
+            <a:avLst/>
+          </a:prstGeom>
+          <a:noFill/>
+        </p:spPr>
+        <p:txBody>
+          <a:bodyPr wrap="square" tIns="0" bIns="0" lIns="25400" rIns="25400">
             <a:spAutoFit/>
           </a:bodyPr>
           <a:lstStyle/>
           <a:p>
             <a:pPr algn="l"/>
             <a:r>
-              <a:rPr sz="1200" b="1" i="0">
+              <a:rPr sz="1100" b="1" i="0">
                 <a:solidFill>
                   <a:srgbClr val="6C757D"/>
                 </a:solidFill>
               </a:rPr>
-              <a:t>TEL（宴会）</a:t>
+              <a:t>宴会 TEL</a:t>
             </a:r>
           </a:p>
         </p:txBody>
@@ -7717,23 +8326,23 @@
         </p:nvSpPr>
         <p:spPr>
           <a:xfrm>
-            <a:off x="2377440" y="2395728"/>
-            <a:ext cx="5029200" cy="411480"/>
-          </a:xfrm>
-          <a:prstGeom prst="rect">
-            <a:avLst/>
-          </a:prstGeom>
-          <a:noFill/>
-        </p:spPr>
-        <p:txBody>
-          <a:bodyPr wrap="square">
+            <a:off x="2011680" y="2313432"/>
+            <a:ext cx="5486400" cy="365760"/>
+          </a:xfrm>
+          <a:prstGeom prst="rect">
+            <a:avLst/>
+          </a:prstGeom>
+          <a:noFill/>
+        </p:spPr>
+        <p:txBody>
+          <a:bodyPr wrap="square" tIns="0" bIns="0" lIns="25400" rIns="25400">
             <a:spAutoFit/>
           </a:bodyPr>
           <a:lstStyle/>
           <a:p>
             <a:pPr algn="l"/>
             <a:r>
-              <a:rPr sz="1200" b="0" i="0">
+              <a:rPr sz="1100" b="0" i="0">
                 <a:solidFill>
                   <a:srgbClr val="1A1A2E"/>
                 </a:solidFill>
@@ -7751,23 +8360,23 @@
         </p:nvSpPr>
         <p:spPr>
           <a:xfrm>
-            <a:off x="457200" y="2871216"/>
-            <a:ext cx="1828800" cy="411480"/>
-          </a:xfrm>
-          <a:prstGeom prst="rect">
-            <a:avLst/>
-          </a:prstGeom>
-          <a:noFill/>
-        </p:spPr>
-        <p:txBody>
-          <a:bodyPr wrap="square">
+            <a:off x="365760" y="2788920"/>
+            <a:ext cx="1600200" cy="365760"/>
+          </a:xfrm>
+          <a:prstGeom prst="rect">
+            <a:avLst/>
+          </a:prstGeom>
+          <a:noFill/>
+        </p:spPr>
+        <p:txBody>
+          <a:bodyPr wrap="square" tIns="0" bIns="0" lIns="25400" rIns="25400">
             <a:spAutoFit/>
           </a:bodyPr>
           <a:lstStyle/>
           <a:p>
             <a:pPr algn="l"/>
             <a:r>
-              <a:rPr sz="1200" b="1" i="0">
+              <a:rPr sz="1100" b="1" i="0">
                 <a:solidFill>
                   <a:srgbClr val="6C757D"/>
                 </a:solidFill>
@@ -7785,23 +8394,23 @@
         </p:nvSpPr>
         <p:spPr>
           <a:xfrm>
-            <a:off x="2377440" y="2871216"/>
-            <a:ext cx="5029200" cy="411480"/>
-          </a:xfrm>
-          <a:prstGeom prst="rect">
-            <a:avLst/>
-          </a:prstGeom>
-          <a:noFill/>
-        </p:spPr>
-        <p:txBody>
-          <a:bodyPr wrap="square">
+            <a:off x="2011680" y="2788920"/>
+            <a:ext cx="5486400" cy="365760"/>
+          </a:xfrm>
+          <a:prstGeom prst="rect">
+            <a:avLst/>
+          </a:prstGeom>
+          <a:noFill/>
+        </p:spPr>
+        <p:txBody>
+          <a:bodyPr wrap="square" tIns="0" bIns="0" lIns="25400" rIns="25400">
             <a:spAutoFit/>
           </a:bodyPr>
           <a:lstStyle/>
           <a:p>
             <a:pPr algn="l"/>
             <a:r>
-              <a:rPr sz="1200" b="0" i="0">
+              <a:rPr sz="1100" b="0" i="0">
                 <a:solidFill>
                   <a:srgbClr val="1A1A2E"/>
                 </a:solidFill>
@@ -7819,23 +8428,23 @@
         </p:nvSpPr>
         <p:spPr>
           <a:xfrm>
-            <a:off x="457200" y="3346704"/>
-            <a:ext cx="1828800" cy="411480"/>
-          </a:xfrm>
-          <a:prstGeom prst="rect">
-            <a:avLst/>
-          </a:prstGeom>
-          <a:noFill/>
-        </p:spPr>
-        <p:txBody>
-          <a:bodyPr wrap="square">
+            <a:off x="365760" y="3264408"/>
+            <a:ext cx="1600200" cy="365760"/>
+          </a:xfrm>
+          <a:prstGeom prst="rect">
+            <a:avLst/>
+          </a:prstGeom>
+          <a:noFill/>
+        </p:spPr>
+        <p:txBody>
+          <a:bodyPr wrap="square" tIns="0" bIns="0" lIns="25400" rIns="25400">
             <a:spAutoFit/>
           </a:bodyPr>
           <a:lstStyle/>
           <a:p>
             <a:pPr algn="l"/>
             <a:r>
-              <a:rPr sz="1200" b="1" i="0">
+              <a:rPr sz="1100" b="1" i="0">
                 <a:solidFill>
                   <a:srgbClr val="6C757D"/>
                 </a:solidFill>
@@ -7853,28 +8462,28 @@
         </p:nvSpPr>
         <p:spPr>
           <a:xfrm>
-            <a:off x="2377440" y="3346704"/>
-            <a:ext cx="5029200" cy="411480"/>
-          </a:xfrm>
-          <a:prstGeom prst="rect">
-            <a:avLst/>
-          </a:prstGeom>
-          <a:noFill/>
-        </p:spPr>
-        <p:txBody>
-          <a:bodyPr wrap="square">
+            <a:off x="2011680" y="3264408"/>
+            <a:ext cx="5486400" cy="365760"/>
+          </a:xfrm>
+          <a:prstGeom prst="rect">
+            <a:avLst/>
+          </a:prstGeom>
+          <a:noFill/>
+        </p:spPr>
+        <p:txBody>
+          <a:bodyPr wrap="square" tIns="0" bIns="0" lIns="25400" rIns="25400">
             <a:spAutoFit/>
           </a:bodyPr>
           <a:lstStyle/>
           <a:p>
             <a:pPr algn="l"/>
             <a:r>
-              <a:rPr sz="1200" b="0" i="0">
+              <a:rPr sz="1100" b="0" i="0">
                 <a:solidFill>
                   <a:srgbClr val="1A1A2E"/>
                 </a:solidFill>
               </a:rPr>
-              <a:t>シャンデリアあり／フォーマル〜セミフォーマル</a:t>
+              <a:t>シャンデリアあり ／ フォーマル〜セミフォーマル</a:t>
             </a:r>
           </a:p>
         </p:txBody>
@@ -7887,23 +8496,23 @@
         </p:nvSpPr>
         <p:spPr>
           <a:xfrm>
-            <a:off x="457200" y="3822191"/>
-            <a:ext cx="1828800" cy="411480"/>
-          </a:xfrm>
-          <a:prstGeom prst="rect">
-            <a:avLst/>
-          </a:prstGeom>
-          <a:noFill/>
-        </p:spPr>
-        <p:txBody>
-          <a:bodyPr wrap="square">
+            <a:off x="365760" y="3739896"/>
+            <a:ext cx="1600200" cy="365760"/>
+          </a:xfrm>
+          <a:prstGeom prst="rect">
+            <a:avLst/>
+          </a:prstGeom>
+          <a:noFill/>
+        </p:spPr>
+        <p:txBody>
+          <a:bodyPr wrap="square" tIns="0" bIns="0" lIns="25400" rIns="25400">
             <a:spAutoFit/>
           </a:bodyPr>
           <a:lstStyle/>
           <a:p>
             <a:pPr algn="l"/>
             <a:r>
-              <a:rPr sz="1200" b="1" i="0">
+              <a:rPr sz="1100" b="1" i="0">
                 <a:solidFill>
                   <a:srgbClr val="6C757D"/>
                 </a:solidFill>
@@ -7921,23 +8530,23 @@
         </p:nvSpPr>
         <p:spPr>
           <a:xfrm>
-            <a:off x="2377440" y="3822191"/>
-            <a:ext cx="5029200" cy="411480"/>
-          </a:xfrm>
-          <a:prstGeom prst="rect">
-            <a:avLst/>
-          </a:prstGeom>
-          <a:noFill/>
-        </p:spPr>
-        <p:txBody>
-          <a:bodyPr wrap="square">
+            <a:off x="2011680" y="3739896"/>
+            <a:ext cx="5486400" cy="365760"/>
+          </a:xfrm>
+          <a:prstGeom prst="rect">
+            <a:avLst/>
+          </a:prstGeom>
+          <a:noFill/>
+        </p:spPr>
+        <p:txBody>
+          <a:bodyPr wrap="square" tIns="0" bIns="0" lIns="25400" rIns="25400">
             <a:spAutoFit/>
           </a:bodyPr>
           <a:lstStyle/>
           <a:p>
             <a:pPr algn="l"/>
             <a:r>
-              <a:rPr sz="1200" b="0" i="0">
+              <a:rPr sz="1100" b="0" i="0">
                 <a:solidFill>
                   <a:srgbClr val="1A1A2E"/>
                 </a:solidFill>
@@ -7955,8 +8564,8 @@
         </p:nvSpPr>
         <p:spPr>
           <a:xfrm>
-            <a:off x="7818120" y="1188720"/>
-            <a:ext cx="4114800" cy="3200400"/>
+            <a:off x="7818120" y="1170432"/>
+            <a:ext cx="4160520" cy="3154680"/>
           </a:xfrm>
           <a:prstGeom prst="rect">
             <a:avLst/>
@@ -8000,16 +8609,16 @@
         </p:nvSpPr>
         <p:spPr>
           <a:xfrm>
-            <a:off x="7955279" y="1298448"/>
-            <a:ext cx="3840480" cy="411480"/>
-          </a:xfrm>
-          <a:prstGeom prst="rect">
-            <a:avLst/>
-          </a:prstGeom>
-          <a:noFill/>
-        </p:spPr>
-        <p:txBody>
-          <a:bodyPr wrap="square">
+            <a:off x="7955279" y="1261872"/>
+            <a:ext cx="3886200" cy="365760"/>
+          </a:xfrm>
+          <a:prstGeom prst="rect">
+            <a:avLst/>
+          </a:prstGeom>
+          <a:noFill/>
+        </p:spPr>
+        <p:txBody>
+          <a:bodyPr wrap="square" tIns="0" bIns="0" lIns="25400" rIns="25400">
             <a:spAutoFit/>
           </a:bodyPr>
           <a:lstStyle/>
@@ -8034,8 +8643,8 @@
         </p:nvSpPr>
         <p:spPr>
           <a:xfrm>
-            <a:off x="7818120" y="1783080"/>
-            <a:ext cx="4114800" cy="36576"/>
+            <a:off x="7818120" y="1719072"/>
+            <a:ext cx="4160520" cy="36576"/>
           </a:xfrm>
           <a:prstGeom prst="rect">
             <a:avLst/>
@@ -8077,23 +8686,23 @@
         </p:nvSpPr>
         <p:spPr>
           <a:xfrm>
-            <a:off x="7955279" y="1920240"/>
-            <a:ext cx="3749039" cy="411480"/>
-          </a:xfrm>
-          <a:prstGeom prst="rect">
-            <a:avLst/>
-          </a:prstGeom>
-          <a:noFill/>
-        </p:spPr>
-        <p:txBody>
-          <a:bodyPr wrap="square">
+            <a:off x="7955279" y="1837943"/>
+            <a:ext cx="3886200" cy="402336"/>
+          </a:xfrm>
+          <a:prstGeom prst="rect">
+            <a:avLst/>
+          </a:prstGeom>
+          <a:noFill/>
+        </p:spPr>
+        <p:txBody>
+          <a:bodyPr wrap="square" tIns="0" bIns="0" lIns="25400" rIns="25400">
             <a:spAutoFit/>
           </a:bodyPr>
           <a:lstStyle/>
           <a:p>
             <a:pPr algn="l"/>
             <a:r>
-              <a:rPr sz="1200" b="0" i="0">
+              <a:rPr sz="1100" b="0" i="0">
                 <a:solidFill>
                   <a:srgbClr val="277D52"/>
                 </a:solidFill>
@@ -8111,23 +8720,23 @@
         </p:nvSpPr>
         <p:spPr>
           <a:xfrm>
-            <a:off x="7955279" y="2395728"/>
-            <a:ext cx="3749039" cy="411480"/>
-          </a:xfrm>
-          <a:prstGeom prst="rect">
-            <a:avLst/>
-          </a:prstGeom>
-          <a:noFill/>
-        </p:spPr>
-        <p:txBody>
-          <a:bodyPr wrap="square">
+            <a:off x="7955279" y="2313432"/>
+            <a:ext cx="3886200" cy="402336"/>
+          </a:xfrm>
+          <a:prstGeom prst="rect">
+            <a:avLst/>
+          </a:prstGeom>
+          <a:noFill/>
+        </p:spPr>
+        <p:txBody>
+          <a:bodyPr wrap="square" tIns="0" bIns="0" lIns="25400" rIns="25400">
             <a:spAutoFit/>
           </a:bodyPr>
           <a:lstStyle/>
           <a:p>
             <a:pPr algn="l"/>
             <a:r>
-              <a:rPr sz="1200" b="0" i="0">
+              <a:rPr sz="1100" b="0" i="0">
                 <a:solidFill>
                   <a:srgbClr val="277D52"/>
                 </a:solidFill>
@@ -8145,23 +8754,23 @@
         </p:nvSpPr>
         <p:spPr>
           <a:xfrm>
-            <a:off x="7955279" y="2871216"/>
-            <a:ext cx="3749039" cy="411480"/>
-          </a:xfrm>
-          <a:prstGeom prst="rect">
-            <a:avLst/>
-          </a:prstGeom>
-          <a:noFill/>
-        </p:spPr>
-        <p:txBody>
-          <a:bodyPr wrap="square">
+            <a:off x="7955279" y="2788920"/>
+            <a:ext cx="3886200" cy="402336"/>
+          </a:xfrm>
+          <a:prstGeom prst="rect">
+            <a:avLst/>
+          </a:prstGeom>
+          <a:noFill/>
+        </p:spPr>
+        <p:txBody>
+          <a:bodyPr wrap="square" tIns="0" bIns="0" lIns="25400" rIns="25400">
             <a:spAutoFit/>
           </a:bodyPr>
           <a:lstStyle/>
           <a:p>
             <a:pPr algn="l"/>
             <a:r>
-              <a:rPr sz="1200" b="0" i="0">
+              <a:rPr sz="1100" b="0" i="0">
                 <a:solidFill>
                   <a:srgbClr val="277D52"/>
                 </a:solidFill>
@@ -8179,23 +8788,23 @@
         </p:nvSpPr>
         <p:spPr>
           <a:xfrm>
-            <a:off x="7955279" y="3346704"/>
-            <a:ext cx="3749039" cy="411480"/>
-          </a:xfrm>
-          <a:prstGeom prst="rect">
-            <a:avLst/>
-          </a:prstGeom>
-          <a:noFill/>
-        </p:spPr>
-        <p:txBody>
-          <a:bodyPr wrap="square">
+            <a:off x="7955279" y="3264408"/>
+            <a:ext cx="3886200" cy="402336"/>
+          </a:xfrm>
+          <a:prstGeom prst="rect">
+            <a:avLst/>
+          </a:prstGeom>
+          <a:noFill/>
+        </p:spPr>
+        <p:txBody>
+          <a:bodyPr wrap="square" tIns="0" bIns="0" lIns="25400" rIns="25400">
             <a:spAutoFit/>
           </a:bodyPr>
           <a:lstStyle/>
           <a:p>
             <a:pPr algn="l"/>
             <a:r>
-              <a:rPr sz="1200" b="0" i="0">
+              <a:rPr sz="1100" b="0" i="0">
                 <a:solidFill>
                   <a:srgbClr val="6C757D"/>
                 </a:solidFill>
@@ -8213,28 +8822,28 @@
         </p:nvSpPr>
         <p:spPr>
           <a:xfrm>
-            <a:off x="7955279" y="3822191"/>
-            <a:ext cx="3749039" cy="411480"/>
-          </a:xfrm>
-          <a:prstGeom prst="rect">
-            <a:avLst/>
-          </a:prstGeom>
-          <a:noFill/>
-        </p:spPr>
-        <p:txBody>
-          <a:bodyPr wrap="square">
+            <a:off x="7955279" y="3739896"/>
+            <a:ext cx="3886200" cy="402336"/>
+          </a:xfrm>
+          <a:prstGeom prst="rect">
+            <a:avLst/>
+          </a:prstGeom>
+          <a:noFill/>
+        </p:spPr>
+        <p:txBody>
+          <a:bodyPr wrap="square" tIns="0" bIns="0" lIns="25400" rIns="25400">
             <a:spAutoFit/>
           </a:bodyPr>
           <a:lstStyle/>
           <a:p>
             <a:pPr algn="l"/>
             <a:r>
-              <a:rPr sz="1200" b="0" i="0">
+              <a:rPr sz="1100" b="0" i="0">
                 <a:solidFill>
                   <a:srgbClr val="6C757D"/>
                 </a:solidFill>
               </a:rPr>
-              <a:t>△  時間制限あり（〜3時間）</a:t>
+              <a:t>△  滞在時間は2〜3時間が目安</a:t>
             </a:r>
           </a:p>
         </p:txBody>
@@ -8247,23 +8856,23 @@
         </p:nvSpPr>
         <p:spPr>
           <a:xfrm>
-            <a:off x="7955279" y="4297680"/>
-            <a:ext cx="3749039" cy="411480"/>
-          </a:xfrm>
-          <a:prstGeom prst="rect">
-            <a:avLst/>
-          </a:prstGeom>
-          <a:noFill/>
-        </p:spPr>
-        <p:txBody>
-          <a:bodyPr wrap="square">
+            <a:off x="7955279" y="4215383"/>
+            <a:ext cx="3886200" cy="402336"/>
+          </a:xfrm>
+          <a:prstGeom prst="rect">
+            <a:avLst/>
+          </a:prstGeom>
+          <a:noFill/>
+        </p:spPr>
+        <p:txBody>
+          <a:bodyPr wrap="square" tIns="0" bIns="0" lIns="25400" rIns="25400">
             <a:spAutoFit/>
           </a:bodyPr>
           <a:lstStyle/>
           <a:p>
             <a:pPr algn="l"/>
             <a:r>
-              <a:rPr sz="1200" b="0" i="0">
+              <a:rPr sz="1100" b="0" i="0">
                 <a:solidFill>
                   <a:srgbClr val="6C757D"/>
                 </a:solidFill>
@@ -8281,8 +8890,8 @@
         </p:nvSpPr>
         <p:spPr>
           <a:xfrm>
-            <a:off x="274320" y="4572000"/>
-            <a:ext cx="11612880" cy="2011680"/>
+            <a:off x="228600" y="4480560"/>
+            <a:ext cx="11750040" cy="2176272"/>
           </a:xfrm>
           <a:prstGeom prst="rect">
             <a:avLst/>
@@ -8326,16 +8935,16 @@
         </p:nvSpPr>
         <p:spPr>
           <a:xfrm>
-            <a:off x="457200" y="4663440"/>
-            <a:ext cx="11155680" cy="365760"/>
-          </a:xfrm>
-          <a:prstGeom prst="rect">
-            <a:avLst/>
-          </a:prstGeom>
-          <a:noFill/>
-        </p:spPr>
-        <p:txBody>
-          <a:bodyPr wrap="square">
+            <a:off x="393192" y="4572000"/>
+            <a:ext cx="11420856" cy="347472"/>
+          </a:xfrm>
+          <a:prstGeom prst="rect">
+            <a:avLst/>
+          </a:prstGeom>
+          <a:noFill/>
+        </p:spPr>
+        <p:txBody>
+          <a:bodyPr wrap="square" tIns="0" bIns="0" lIns="25400" rIns="25400">
             <a:spAutoFit/>
           </a:bodyPr>
           <a:lstStyle/>
@@ -8360,8 +8969,8 @@
         </p:nvSpPr>
         <p:spPr>
           <a:xfrm>
-            <a:off x="274320" y="5029200"/>
-            <a:ext cx="11612880" cy="36576"/>
+            <a:off x="228600" y="4937760"/>
+            <a:ext cx="11750040" cy="36576"/>
           </a:xfrm>
           <a:prstGeom prst="rect">
             <a:avLst/>
@@ -8403,8 +9012,8 @@
         </p:nvSpPr>
         <p:spPr>
           <a:xfrm>
-            <a:off x="274320" y="5065776"/>
-            <a:ext cx="11612880" cy="420624"/>
+            <a:off x="393192" y="4992624"/>
+            <a:ext cx="4663440" cy="329184"/>
           </a:xfrm>
           <a:prstGeom prst="rect">
             <a:avLst/>
@@ -8446,21 +9055,21 @@
         </p:nvSpPr>
         <p:spPr>
           <a:xfrm>
-            <a:off x="457200" y="5120640"/>
-            <a:ext cx="4389120" cy="384048"/>
-          </a:xfrm>
-          <a:prstGeom prst="rect">
-            <a:avLst/>
-          </a:prstGeom>
-          <a:noFill/>
-        </p:spPr>
-        <p:txBody>
-          <a:bodyPr wrap="square">
-            <a:spAutoFit/>
-          </a:bodyPr>
-          <a:lstStyle/>
-          <a:p>
-            <a:pPr algn="l"/>
+            <a:off x="438912" y="5029200"/>
+            <a:ext cx="4572000" cy="274320"/>
+          </a:xfrm>
+          <a:prstGeom prst="rect">
+            <a:avLst/>
+          </a:prstGeom>
+          <a:noFill/>
+        </p:spPr>
+        <p:txBody>
+          <a:bodyPr wrap="square" tIns="0" bIns="0" lIns="25400" rIns="25400">
+            <a:spAutoFit/>
+          </a:bodyPr>
+          <a:lstStyle/>
+          <a:p>
+            <a:pPr algn="ctr"/>
             <a:r>
               <a:rPr sz="1100" b="1" i="0">
                 <a:solidFill>
@@ -8474,22 +9083,65 @@
       </p:sp>
       <p:sp>
         <p:nvSpPr>
-          <p:cNvPr id="33" name="TextBox 32"/>
-          <p:cNvSpPr txBox="1"/>
-          <p:nvPr/>
-        </p:nvSpPr>
-        <p:spPr>
-          <a:xfrm>
-            <a:off x="5029200" y="5120640"/>
-            <a:ext cx="3474720" cy="384048"/>
-          </a:xfrm>
-          <a:prstGeom prst="rect">
-            <a:avLst/>
-          </a:prstGeom>
-          <a:noFill/>
-        </p:spPr>
-        <p:txBody>
-          <a:bodyPr wrap="square">
+          <p:cNvPr id="33" name="Rectangle 32"/>
+          <p:cNvSpPr/>
+          <p:nvPr/>
+        </p:nvSpPr>
+        <p:spPr>
+          <a:xfrm>
+            <a:off x="5257800" y="4992624"/>
+            <a:ext cx="3474720" cy="329184"/>
+          </a:xfrm>
+          <a:prstGeom prst="rect">
+            <a:avLst/>
+          </a:prstGeom>
+          <a:solidFill>
+            <a:srgbClr val="216BAE"/>
+          </a:solidFill>
+          <a:ln>
+            <a:noFill/>
+          </a:ln>
+        </p:spPr>
+        <p:style>
+          <a:lnRef idx="1">
+            <a:schemeClr val="accent1"/>
+          </a:lnRef>
+          <a:fillRef idx="3">
+            <a:schemeClr val="accent1"/>
+          </a:fillRef>
+          <a:effectRef idx="2">
+            <a:schemeClr val="accent1"/>
+          </a:effectRef>
+          <a:fontRef idx="minor">
+            <a:schemeClr val="lt1"/>
+          </a:fontRef>
+        </p:style>
+        <p:txBody>
+          <a:bodyPr rtlCol="0" anchor="ctr"/>
+          <a:lstStyle/>
+          <a:p>
+            <a:pPr algn="ctr"/>
+          </a:p>
+        </p:txBody>
+      </p:sp>
+      <p:sp>
+        <p:nvSpPr>
+          <p:cNvPr id="34" name="TextBox 33"/>
+          <p:cNvSpPr txBox="1"/>
+          <p:nvPr/>
+        </p:nvSpPr>
+        <p:spPr>
+          <a:xfrm>
+            <a:off x="5303520" y="5029200"/>
+            <a:ext cx="3383279" cy="274320"/>
+          </a:xfrm>
+          <a:prstGeom prst="rect">
+            <a:avLst/>
+          </a:prstGeom>
+          <a:noFill/>
+        </p:spPr>
+        <p:txBody>
+          <a:bodyPr wrap="square" tIns="0" bIns="0" lIns="25400" rIns="25400">
             <a:spAutoFit/>
           </a:bodyPr>
           <a:lstStyle/>
@@ -8502,40 +9154,6 @@
                 </a:solidFill>
               </a:rPr>
               <a:t>1名あたり</a:t>
-            </a:r>
-          </a:p>
-        </p:txBody>
-      </p:sp>
-      <p:sp>
-        <p:nvSpPr>
-          <p:cNvPr id="34" name="TextBox 33"/>
-          <p:cNvSpPr txBox="1"/>
-          <p:nvPr/>
-        </p:nvSpPr>
-        <p:spPr>
-          <a:xfrm>
-            <a:off x="8686800" y="5120640"/>
-            <a:ext cx="3017520" cy="384048"/>
-          </a:xfrm>
-          <a:prstGeom prst="rect">
-            <a:avLst/>
-          </a:prstGeom>
-          <a:noFill/>
-        </p:spPr>
-        <p:txBody>
-          <a:bodyPr wrap="square">
-            <a:spAutoFit/>
-          </a:bodyPr>
-          <a:lstStyle/>
-          <a:p>
-            <a:pPr algn="ctr"/>
-            <a:r>
-              <a:rPr sz="1100" b="1" i="0">
-                <a:solidFill>
-                  <a:srgbClr val="FFFFFF"/>
-                </a:solidFill>
-              </a:rPr>
-              <a:t>14名合計</a:t>
             </a:r>
           </a:p>
         </p:txBody>
@@ -8548,8 +9166,230 @@
         </p:nvSpPr>
         <p:spPr>
           <a:xfrm>
-            <a:off x="274320" y="5504688"/>
-            <a:ext cx="11612880" cy="420624"/>
+            <a:off x="8915400" y="4992624"/>
+            <a:ext cx="2834640" cy="329184"/>
+          </a:xfrm>
+          <a:prstGeom prst="rect">
+            <a:avLst/>
+          </a:prstGeom>
+          <a:solidFill>
+            <a:srgbClr val="277D52"/>
+          </a:solidFill>
+          <a:ln>
+            <a:noFill/>
+          </a:ln>
+        </p:spPr>
+        <p:style>
+          <a:lnRef idx="1">
+            <a:schemeClr val="accent1"/>
+          </a:lnRef>
+          <a:fillRef idx="3">
+            <a:schemeClr val="accent1"/>
+          </a:fillRef>
+          <a:effectRef idx="2">
+            <a:schemeClr val="accent1"/>
+          </a:effectRef>
+          <a:fontRef idx="minor">
+            <a:schemeClr val="lt1"/>
+          </a:fontRef>
+        </p:style>
+        <p:txBody>
+          <a:bodyPr rtlCol="0" anchor="ctr"/>
+          <a:lstStyle/>
+          <a:p>
+            <a:pPr algn="ctr"/>
+          </a:p>
+        </p:txBody>
+      </p:sp>
+      <p:sp>
+        <p:nvSpPr>
+          <p:cNvPr id="36" name="TextBox 35"/>
+          <p:cNvSpPr txBox="1"/>
+          <p:nvPr/>
+        </p:nvSpPr>
+        <p:spPr>
+          <a:xfrm>
+            <a:off x="8961120" y="5029200"/>
+            <a:ext cx="2743200" cy="274320"/>
+          </a:xfrm>
+          <a:prstGeom prst="rect">
+            <a:avLst/>
+          </a:prstGeom>
+          <a:noFill/>
+        </p:spPr>
+        <p:txBody>
+          <a:bodyPr wrap="square" tIns="0" bIns="0" lIns="25400" rIns="25400">
+            <a:spAutoFit/>
+          </a:bodyPr>
+          <a:lstStyle/>
+          <a:p>
+            <a:pPr algn="ctr"/>
+            <a:r>
+              <a:rPr sz="1100" b="1" i="0">
+                <a:solidFill>
+                  <a:srgbClr val="FFFFFF"/>
+                </a:solidFill>
+              </a:rPr>
+              <a:t>14名合計</a:t>
+            </a:r>
+          </a:p>
+        </p:txBody>
+      </p:sp>
+      <p:sp>
+        <p:nvSpPr>
+          <p:cNvPr id="37" name="Rectangle 36"/>
+          <p:cNvSpPr/>
+          <p:nvPr/>
+        </p:nvSpPr>
+        <p:spPr>
+          <a:xfrm>
+            <a:off x="228600" y="5285232"/>
+            <a:ext cx="11750040" cy="402336"/>
+          </a:xfrm>
+          <a:prstGeom prst="rect">
+            <a:avLst/>
+          </a:prstGeom>
+          <a:solidFill>
+            <a:srgbClr val="FFFFFF"/>
+          </a:solidFill>
+          <a:ln>
+            <a:noFill/>
+          </a:ln>
+        </p:spPr>
+        <p:style>
+          <a:lnRef idx="1">
+            <a:schemeClr val="accent1"/>
+          </a:lnRef>
+          <a:fillRef idx="3">
+            <a:schemeClr val="accent1"/>
+          </a:fillRef>
+          <a:effectRef idx="2">
+            <a:schemeClr val="accent1"/>
+          </a:effectRef>
+          <a:fontRef idx="minor">
+            <a:schemeClr val="lt1"/>
+          </a:fontRef>
+        </p:style>
+        <p:txBody>
+          <a:bodyPr rtlCol="0" anchor="ctr"/>
+          <a:lstStyle/>
+          <a:p>
+            <a:pPr algn="ctr"/>
+          </a:p>
+        </p:txBody>
+      </p:sp>
+      <p:sp>
+        <p:nvSpPr>
+          <p:cNvPr id="38" name="TextBox 37"/>
+          <p:cNvSpPr txBox="1"/>
+          <p:nvPr/>
+        </p:nvSpPr>
+        <p:spPr>
+          <a:xfrm>
+            <a:off x="438912" y="5321808"/>
+            <a:ext cx="4572000" cy="329184"/>
+          </a:xfrm>
+          <a:prstGeom prst="rect">
+            <a:avLst/>
+          </a:prstGeom>
+          <a:noFill/>
+        </p:spPr>
+        <p:txBody>
+          <a:bodyPr wrap="square" tIns="0" bIns="0" lIns="25400" rIns="25400">
+            <a:spAutoFit/>
+          </a:bodyPr>
+          <a:lstStyle/>
+          <a:p>
+            <a:pPr algn="l"/>
+            <a:r>
+              <a:rPr sz="1100" b="0" i="0">
+                <a:solidFill>
+                  <a:srgbClr val="1A1A2E"/>
+                </a:solidFill>
+              </a:rPr>
+              <a:t>和食コース（料理・飲物込み）</a:t>
+            </a:r>
+          </a:p>
+        </p:txBody>
+      </p:sp>
+      <p:sp>
+        <p:nvSpPr>
+          <p:cNvPr id="39" name="TextBox 38"/>
+          <p:cNvSpPr txBox="1"/>
+          <p:nvPr/>
+        </p:nvSpPr>
+        <p:spPr>
+          <a:xfrm>
+            <a:off x="5303520" y="5321808"/>
+            <a:ext cx="3383279" cy="329184"/>
+          </a:xfrm>
+          <a:prstGeom prst="rect">
+            <a:avLst/>
+          </a:prstGeom>
+          <a:noFill/>
+        </p:spPr>
+        <p:txBody>
+          <a:bodyPr wrap="square" tIns="0" bIns="0" lIns="25400" rIns="25400">
+            <a:spAutoFit/>
+          </a:bodyPr>
+          <a:lstStyle/>
+          <a:p>
+            <a:pPr algn="ctr"/>
+            <a:r>
+              <a:rPr sz="1100" b="0" i="0">
+                <a:solidFill>
+                  <a:srgbClr val="1A1A2E"/>
+                </a:solidFill>
+              </a:rPr>
+              <a:t>5,000〜8,000円</a:t>
+            </a:r>
+          </a:p>
+        </p:txBody>
+      </p:sp>
+      <p:sp>
+        <p:nvSpPr>
+          <p:cNvPr id="40" name="TextBox 39"/>
+          <p:cNvSpPr txBox="1"/>
+          <p:nvPr/>
+        </p:nvSpPr>
+        <p:spPr>
+          <a:xfrm>
+            <a:off x="8961120" y="5321808"/>
+            <a:ext cx="2743200" cy="329184"/>
+          </a:xfrm>
+          <a:prstGeom prst="rect">
+            <a:avLst/>
+          </a:prstGeom>
+          <a:noFill/>
+        </p:spPr>
+        <p:txBody>
+          <a:bodyPr wrap="square" tIns="0" bIns="0" lIns="25400" rIns="25400">
+            <a:spAutoFit/>
+          </a:bodyPr>
+          <a:lstStyle/>
+          <a:p>
+            <a:pPr algn="ctr"/>
+            <a:r>
+              <a:rPr sz="1100" b="0" i="0">
+                <a:solidFill>
+                  <a:srgbClr val="1A1A2E"/>
+                </a:solidFill>
+              </a:rPr>
+              <a:t>70,000〜112,000円</a:t>
+            </a:r>
+          </a:p>
+        </p:txBody>
+      </p:sp>
+      <p:sp>
+        <p:nvSpPr>
+          <p:cNvPr id="41" name="Rectangle 40"/>
+          <p:cNvSpPr/>
+          <p:nvPr/>
+        </p:nvSpPr>
+        <p:spPr>
+          <a:xfrm>
+            <a:off x="228600" y="5687568"/>
+            <a:ext cx="11750040" cy="402336"/>
           </a:xfrm>
           <a:prstGeom prst="rect">
             <a:avLst/>
@@ -8585,22 +9425,22 @@
       </p:sp>
       <p:sp>
         <p:nvSpPr>
-          <p:cNvPr id="36" name="TextBox 35"/>
-          <p:cNvSpPr txBox="1"/>
-          <p:nvPr/>
-        </p:nvSpPr>
-        <p:spPr>
-          <a:xfrm>
-            <a:off x="457200" y="5559552"/>
-            <a:ext cx="4389120" cy="384048"/>
-          </a:xfrm>
-          <a:prstGeom prst="rect">
-            <a:avLst/>
-          </a:prstGeom>
-          <a:noFill/>
-        </p:spPr>
-        <p:txBody>
-          <a:bodyPr wrap="square">
+          <p:cNvPr id="42" name="TextBox 41"/>
+          <p:cNvSpPr txBox="1"/>
+          <p:nvPr/>
+        </p:nvSpPr>
+        <p:spPr>
+          <a:xfrm>
+            <a:off x="438912" y="5724144"/>
+            <a:ext cx="4572000" cy="329184"/>
+          </a:xfrm>
+          <a:prstGeom prst="rect">
+            <a:avLst/>
+          </a:prstGeom>
+          <a:noFill/>
+        </p:spPr>
+        <p:txBody>
+          <a:bodyPr wrap="square" tIns="0" bIns="0" lIns="25400" rIns="25400">
             <a:spAutoFit/>
           </a:bodyPr>
           <a:lstStyle/>
@@ -8612,29 +9452,29 @@
                   <a:srgbClr val="1A1A2E"/>
                 </a:solidFill>
               </a:rPr>
-              <a:t>和食コース（料理・飲物込み）</a:t>
-            </a:r>
-          </a:p>
-        </p:txBody>
-      </p:sp>
-      <p:sp>
-        <p:nvSpPr>
-          <p:cNvPr id="37" name="TextBox 36"/>
-          <p:cNvSpPr txBox="1"/>
-          <p:nvPr/>
-        </p:nvSpPr>
-        <p:spPr>
-          <a:xfrm>
-            <a:off x="5029200" y="5559552"/>
-            <a:ext cx="3474720" cy="384048"/>
-          </a:xfrm>
-          <a:prstGeom prst="rect">
-            <a:avLst/>
-          </a:prstGeom>
-          <a:noFill/>
-        </p:spPr>
-        <p:txBody>
-          <a:bodyPr wrap="square">
+              <a:t>バイキング形式</a:t>
+            </a:r>
+          </a:p>
+        </p:txBody>
+      </p:sp>
+      <p:sp>
+        <p:nvSpPr>
+          <p:cNvPr id="43" name="TextBox 42"/>
+          <p:cNvSpPr txBox="1"/>
+          <p:nvPr/>
+        </p:nvSpPr>
+        <p:spPr>
+          <a:xfrm>
+            <a:off x="5303520" y="5724144"/>
+            <a:ext cx="3383279" cy="329184"/>
+          </a:xfrm>
+          <a:prstGeom prst="rect">
+            <a:avLst/>
+          </a:prstGeom>
+          <a:noFill/>
+        </p:spPr>
+        <p:txBody>
+          <a:bodyPr wrap="square" tIns="0" bIns="0" lIns="25400" rIns="25400">
             <a:spAutoFit/>
           </a:bodyPr>
           <a:lstStyle/>
@@ -8646,29 +9486,29 @@
                   <a:srgbClr val="1A1A2E"/>
                 </a:solidFill>
               </a:rPr>
-              <a:t>5,000〜8,000円</a:t>
-            </a:r>
-          </a:p>
-        </p:txBody>
-      </p:sp>
-      <p:sp>
-        <p:nvSpPr>
-          <p:cNvPr id="38" name="TextBox 37"/>
-          <p:cNvSpPr txBox="1"/>
-          <p:nvPr/>
-        </p:nvSpPr>
-        <p:spPr>
-          <a:xfrm>
-            <a:off x="8686800" y="5559552"/>
-            <a:ext cx="3017520" cy="384048"/>
-          </a:xfrm>
-          <a:prstGeom prst="rect">
-            <a:avLst/>
-          </a:prstGeom>
-          <a:noFill/>
-        </p:spPr>
-        <p:txBody>
-          <a:bodyPr wrap="square">
+              <a:t>3,000〜5,000円</a:t>
+            </a:r>
+          </a:p>
+        </p:txBody>
+      </p:sp>
+      <p:sp>
+        <p:nvSpPr>
+          <p:cNvPr id="44" name="TextBox 43"/>
+          <p:cNvSpPr txBox="1"/>
+          <p:nvPr/>
+        </p:nvSpPr>
+        <p:spPr>
+          <a:xfrm>
+            <a:off x="8961120" y="5724144"/>
+            <a:ext cx="2743200" cy="329184"/>
+          </a:xfrm>
+          <a:prstGeom prst="rect">
+            <a:avLst/>
+          </a:prstGeom>
+          <a:noFill/>
+        </p:spPr>
+        <p:txBody>
+          <a:bodyPr wrap="square" tIns="0" bIns="0" lIns="25400" rIns="25400">
             <a:spAutoFit/>
           </a:bodyPr>
           <a:lstStyle/>
@@ -8677,32 +9517,75 @@
             <a:r>
               <a:rPr sz="1100" b="1" i="0">
                 <a:solidFill>
-                  <a:srgbClr val="C89B3C"/>
-                </a:solidFill>
-              </a:rPr>
-              <a:t>70,000〜112,000円</a:t>
-            </a:r>
-          </a:p>
-        </p:txBody>
-      </p:sp>
-      <p:sp>
-        <p:nvSpPr>
-          <p:cNvPr id="39" name="TextBox 38"/>
-          <p:cNvSpPr txBox="1"/>
-          <p:nvPr/>
-        </p:nvSpPr>
-        <p:spPr>
-          <a:xfrm>
-            <a:off x="457200" y="5998464"/>
-            <a:ext cx="4389120" cy="384048"/>
-          </a:xfrm>
-          <a:prstGeom prst="rect">
-            <a:avLst/>
-          </a:prstGeom>
-          <a:noFill/>
-        </p:spPr>
-        <p:txBody>
-          <a:bodyPr wrap="square">
+                  <a:srgbClr val="277D52"/>
+                </a:solidFill>
+              </a:rPr>
+              <a:t>42,000〜70,000円</a:t>
+            </a:r>
+          </a:p>
+        </p:txBody>
+      </p:sp>
+      <p:sp>
+        <p:nvSpPr>
+          <p:cNvPr id="45" name="Rectangle 44"/>
+          <p:cNvSpPr/>
+          <p:nvPr/>
+        </p:nvSpPr>
+        <p:spPr>
+          <a:xfrm>
+            <a:off x="228600" y="6089904"/>
+            <a:ext cx="11750040" cy="402336"/>
+          </a:xfrm>
+          <a:prstGeom prst="rect">
+            <a:avLst/>
+          </a:prstGeom>
+          <a:solidFill>
+            <a:srgbClr val="FFFFFF"/>
+          </a:solidFill>
+          <a:ln>
+            <a:noFill/>
+          </a:ln>
+        </p:spPr>
+        <p:style>
+          <a:lnRef idx="1">
+            <a:schemeClr val="accent1"/>
+          </a:lnRef>
+          <a:fillRef idx="3">
+            <a:schemeClr val="accent1"/>
+          </a:fillRef>
+          <a:effectRef idx="2">
+            <a:schemeClr val="accent1"/>
+          </a:effectRef>
+          <a:fontRef idx="minor">
+            <a:schemeClr val="lt1"/>
+          </a:fontRef>
+        </p:style>
+        <p:txBody>
+          <a:bodyPr rtlCol="0" anchor="ctr"/>
+          <a:lstStyle/>
+          <a:p>
+            <a:pPr algn="ctr"/>
+          </a:p>
+        </p:txBody>
+      </p:sp>
+      <p:sp>
+        <p:nvSpPr>
+          <p:cNvPr id="46" name="TextBox 45"/>
+          <p:cNvSpPr txBox="1"/>
+          <p:nvPr/>
+        </p:nvSpPr>
+        <p:spPr>
+          <a:xfrm>
+            <a:off x="438912" y="6126480"/>
+            <a:ext cx="4572000" cy="329184"/>
+          </a:xfrm>
+          <a:prstGeom prst="rect">
+            <a:avLst/>
+          </a:prstGeom>
+          <a:noFill/>
+        </p:spPr>
+        <p:txBody>
+          <a:bodyPr wrap="square" tIns="0" bIns="0" lIns="25400" rIns="25400">
             <a:spAutoFit/>
           </a:bodyPr>
           <a:lstStyle/>
@@ -8714,29 +9597,29 @@
                   <a:srgbClr val="1A1A2E"/>
                 </a:solidFill>
               </a:rPr>
-              <a:t>バイキング形式</a:t>
-            </a:r>
-          </a:p>
-        </p:txBody>
-      </p:sp>
-      <p:sp>
-        <p:nvSpPr>
-          <p:cNvPr id="40" name="TextBox 39"/>
-          <p:cNvSpPr txBox="1"/>
-          <p:nvPr/>
-        </p:nvSpPr>
-        <p:spPr>
-          <a:xfrm>
-            <a:off x="5029200" y="5998464"/>
-            <a:ext cx="3474720" cy="384048"/>
-          </a:xfrm>
-          <a:prstGeom prst="rect">
-            <a:avLst/>
-          </a:prstGeom>
-          <a:noFill/>
-        </p:spPr>
-        <p:txBody>
-          <a:bodyPr wrap="square">
+              <a:t>会場のみ（持込）</a:t>
+            </a:r>
+          </a:p>
+        </p:txBody>
+      </p:sp>
+      <p:sp>
+        <p:nvSpPr>
+          <p:cNvPr id="47" name="TextBox 46"/>
+          <p:cNvSpPr txBox="1"/>
+          <p:nvPr/>
+        </p:nvSpPr>
+        <p:spPr>
+          <a:xfrm>
+            <a:off x="5303520" y="6126480"/>
+            <a:ext cx="3383279" cy="329184"/>
+          </a:xfrm>
+          <a:prstGeom prst="rect">
+            <a:avLst/>
+          </a:prstGeom>
+          <a:noFill/>
+        </p:spPr>
+        <p:txBody>
+          <a:bodyPr wrap="square" tIns="0" bIns="0" lIns="25400" rIns="25400">
             <a:spAutoFit/>
           </a:bodyPr>
           <a:lstStyle/>
@@ -8748,108 +9631,6 @@
                   <a:srgbClr val="1A1A2E"/>
                 </a:solidFill>
               </a:rPr>
-              <a:t>3,000〜5,000円</a:t>
-            </a:r>
-          </a:p>
-        </p:txBody>
-      </p:sp>
-      <p:sp>
-        <p:nvSpPr>
-          <p:cNvPr id="41" name="TextBox 40"/>
-          <p:cNvSpPr txBox="1"/>
-          <p:nvPr/>
-        </p:nvSpPr>
-        <p:spPr>
-          <a:xfrm>
-            <a:off x="8686800" y="5998464"/>
-            <a:ext cx="3017520" cy="384048"/>
-          </a:xfrm>
-          <a:prstGeom prst="rect">
-            <a:avLst/>
-          </a:prstGeom>
-          <a:noFill/>
-        </p:spPr>
-        <p:txBody>
-          <a:bodyPr wrap="square">
-            <a:spAutoFit/>
-          </a:bodyPr>
-          <a:lstStyle/>
-          <a:p>
-            <a:pPr algn="ctr"/>
-            <a:r>
-              <a:rPr sz="1100" b="0" i="0">
-                <a:solidFill>
-                  <a:srgbClr val="1A1A2E"/>
-                </a:solidFill>
-              </a:rPr>
-              <a:t>42,000〜70,000円</a:t>
-            </a:r>
-          </a:p>
-        </p:txBody>
-      </p:sp>
-      <p:sp>
-        <p:nvSpPr>
-          <p:cNvPr id="42" name="TextBox 41"/>
-          <p:cNvSpPr txBox="1"/>
-          <p:nvPr/>
-        </p:nvSpPr>
-        <p:spPr>
-          <a:xfrm>
-            <a:off x="457200" y="6437375"/>
-            <a:ext cx="4389120" cy="384048"/>
-          </a:xfrm>
-          <a:prstGeom prst="rect">
-            <a:avLst/>
-          </a:prstGeom>
-          <a:noFill/>
-        </p:spPr>
-        <p:txBody>
-          <a:bodyPr wrap="square">
-            <a:spAutoFit/>
-          </a:bodyPr>
-          <a:lstStyle/>
-          <a:p>
-            <a:pPr algn="l"/>
-            <a:r>
-              <a:rPr sz="1100" b="0" i="0">
-                <a:solidFill>
-                  <a:srgbClr val="1A1A2E"/>
-                </a:solidFill>
-              </a:rPr>
-              <a:t>会場のみ（持込）</a:t>
-            </a:r>
-          </a:p>
-        </p:txBody>
-      </p:sp>
-      <p:sp>
-        <p:nvSpPr>
-          <p:cNvPr id="43" name="TextBox 42"/>
-          <p:cNvSpPr txBox="1"/>
-          <p:nvPr/>
-        </p:nvSpPr>
-        <p:spPr>
-          <a:xfrm>
-            <a:off x="5029200" y="6437375"/>
-            <a:ext cx="3474720" cy="384048"/>
-          </a:xfrm>
-          <a:prstGeom prst="rect">
-            <a:avLst/>
-          </a:prstGeom>
-          <a:noFill/>
-        </p:spPr>
-        <p:txBody>
-          <a:bodyPr wrap="square">
-            <a:spAutoFit/>
-          </a:bodyPr>
-          <a:lstStyle/>
-          <a:p>
-            <a:pPr algn="ctr"/>
-            <a:r>
-              <a:rPr sz="1100" b="0" i="0">
-                <a:solidFill>
-                  <a:srgbClr val="1A1A2E"/>
-                </a:solidFill>
-              </a:rPr>
               <a:t>1,000〜2,000円</a:t>
             </a:r>
           </a:p>
@@ -8857,22 +9638,22 @@
       </p:sp>
       <p:sp>
         <p:nvSpPr>
-          <p:cNvPr id="44" name="TextBox 43"/>
-          <p:cNvSpPr txBox="1"/>
-          <p:nvPr/>
-        </p:nvSpPr>
-        <p:spPr>
-          <a:xfrm>
-            <a:off x="8686800" y="6437375"/>
-            <a:ext cx="3017520" cy="384048"/>
-          </a:xfrm>
-          <a:prstGeom prst="rect">
-            <a:avLst/>
-          </a:prstGeom>
-          <a:noFill/>
-        </p:spPr>
-        <p:txBody>
-          <a:bodyPr wrap="square">
+          <p:cNvPr id="48" name="TextBox 47"/>
+          <p:cNvSpPr txBox="1"/>
+          <p:nvPr/>
+        </p:nvSpPr>
+        <p:spPr>
+          <a:xfrm>
+            <a:off x="8961120" y="6126480"/>
+            <a:ext cx="2743200" cy="329184"/>
+          </a:xfrm>
+          <a:prstGeom prst="rect">
+            <a:avLst/>
+          </a:prstGeom>
+          <a:noFill/>
+        </p:spPr>
+        <p:txBody>
+          <a:bodyPr wrap="square" tIns="0" bIns="0" lIns="25400" rIns="25400">
             <a:spAutoFit/>
           </a:bodyPr>
           <a:lstStyle/>
@@ -9009,23 +9790,23 @@
         </p:nvSpPr>
         <p:spPr>
           <a:xfrm>
-            <a:off x="365760" y="109728"/>
-            <a:ext cx="9144000" cy="640080"/>
-          </a:xfrm>
-          <a:prstGeom prst="rect">
-            <a:avLst/>
-          </a:prstGeom>
-          <a:noFill/>
-        </p:spPr>
-        <p:txBody>
-          <a:bodyPr wrap="square">
+            <a:off x="320040" y="91440"/>
+            <a:ext cx="11430000" cy="566928"/>
+          </a:xfrm>
+          <a:prstGeom prst="rect">
+            <a:avLst/>
+          </a:prstGeom>
+          <a:noFill/>
+        </p:spPr>
+        <p:txBody>
+          <a:bodyPr wrap="square" tIns="0" bIns="0" lIns="25400" rIns="25400">
             <a:spAutoFit/>
           </a:bodyPr>
           <a:lstStyle/>
           <a:p>
             <a:pPr algn="l"/>
             <a:r>
-              <a:rPr sz="2600" b="1" i="0">
+              <a:rPr sz="2400" b="1" i="0">
                 <a:solidFill>
                   <a:srgbClr val="FFFFFF"/>
                 </a:solidFill>
@@ -9043,23 +9824,23 @@
         </p:nvSpPr>
         <p:spPr>
           <a:xfrm>
-            <a:off x="365760" y="621792"/>
-            <a:ext cx="9144000" cy="365760"/>
-          </a:xfrm>
-          <a:prstGeom prst="rect">
-            <a:avLst/>
-          </a:prstGeom>
-          <a:noFill/>
-        </p:spPr>
-        <p:txBody>
-          <a:bodyPr wrap="square">
+            <a:off x="320040" y="621792"/>
+            <a:ext cx="11430000" cy="329184"/>
+          </a:xfrm>
+          <a:prstGeom prst="rect">
+            <a:avLst/>
+          </a:prstGeom>
+          <a:noFill/>
+        </p:spPr>
+        <p:txBody>
+          <a:bodyPr wrap="square" tIns="0" bIns="0" lIns="25400" rIns="25400">
             <a:spAutoFit/>
           </a:bodyPr>
           <a:lstStyle/>
           <a:p>
             <a:pPr algn="l"/>
             <a:r>
-              <a:rPr sz="1200" b="0" i="0">
+              <a:rPr sz="1100" b="0" i="0">
                 <a:solidFill>
                   <a:srgbClr val="C89B3C"/>
                 </a:solidFill>
@@ -9077,8 +9858,8 @@
         </p:nvSpPr>
         <p:spPr>
           <a:xfrm>
-            <a:off x="274320" y="1188720"/>
-            <a:ext cx="3200400" cy="475488"/>
+            <a:off x="228600" y="1170432"/>
+            <a:ext cx="3154680" cy="438912"/>
           </a:xfrm>
           <a:prstGeom prst="rect">
             <a:avLst/>
@@ -9120,16 +9901,16 @@
         </p:nvSpPr>
         <p:spPr>
           <a:xfrm>
-            <a:off x="365760" y="1243584"/>
-            <a:ext cx="3017520" cy="384048"/>
-          </a:xfrm>
-          <a:prstGeom prst="rect">
-            <a:avLst/>
-          </a:prstGeom>
-          <a:noFill/>
-        </p:spPr>
-        <p:txBody>
-          <a:bodyPr wrap="square">
+            <a:off x="320040" y="1207008"/>
+            <a:ext cx="2971800" cy="347472"/>
+          </a:xfrm>
+          <a:prstGeom prst="rect">
+            <a:avLst/>
+          </a:prstGeom>
+          <a:noFill/>
+        </p:spPr>
+        <p:txBody>
+          <a:bodyPr wrap="square" tIns="0" bIns="0" lIns="25400" rIns="25400">
             <a:spAutoFit/>
           </a:bodyPr>
           <a:lstStyle/>
@@ -9154,8 +9935,8 @@
         </p:nvSpPr>
         <p:spPr>
           <a:xfrm>
-            <a:off x="3611880" y="1188720"/>
-            <a:ext cx="4206240" cy="475488"/>
+            <a:off x="3520440" y="1170432"/>
+            <a:ext cx="4617720" cy="438912"/>
           </a:xfrm>
           <a:prstGeom prst="rect">
             <a:avLst/>
@@ -9197,16 +9978,16 @@
         </p:nvSpPr>
         <p:spPr>
           <a:xfrm>
-            <a:off x="3703320" y="1243584"/>
-            <a:ext cx="4023359" cy="384048"/>
-          </a:xfrm>
-          <a:prstGeom prst="rect">
-            <a:avLst/>
-          </a:prstGeom>
-          <a:noFill/>
-        </p:spPr>
-        <p:txBody>
-          <a:bodyPr wrap="square">
+            <a:off x="3611880" y="1207008"/>
+            <a:ext cx="4434840" cy="347472"/>
+          </a:xfrm>
+          <a:prstGeom prst="rect">
+            <a:avLst/>
+          </a:prstGeom>
+          <a:noFill/>
+        </p:spPr>
+        <p:txBody>
+          <a:bodyPr wrap="square" tIns="0" bIns="0" lIns="25400" rIns="25400">
             <a:spAutoFit/>
           </a:bodyPr>
           <a:lstStyle/>
@@ -9218,7 +9999,7 @@
                   <a:srgbClr val="FFFFFF"/>
                 </a:solidFill>
               </a:rPr>
-              <a:t>A レンタルスペース</a:t>
+              <a:t>A  レンタルスペース</a:t>
             </a:r>
           </a:p>
         </p:txBody>
@@ -9231,8 +10012,8 @@
         </p:nvSpPr>
         <p:spPr>
           <a:xfrm>
-            <a:off x="7955279" y="1188720"/>
-            <a:ext cx="4206240" cy="475488"/>
+            <a:off x="8275320" y="1170432"/>
+            <a:ext cx="3703320" cy="438912"/>
           </a:xfrm>
           <a:prstGeom prst="rect">
             <a:avLst/>
@@ -9274,16 +10055,16 @@
         </p:nvSpPr>
         <p:spPr>
           <a:xfrm>
-            <a:off x="8046719" y="1243584"/>
-            <a:ext cx="4023359" cy="384048"/>
-          </a:xfrm>
-          <a:prstGeom prst="rect">
-            <a:avLst/>
-          </a:prstGeom>
-          <a:noFill/>
-        </p:spPr>
-        <p:txBody>
-          <a:bodyPr wrap="square">
+            <a:off x="8366760" y="1207008"/>
+            <a:ext cx="3520439" cy="347472"/>
+          </a:xfrm>
+          <a:prstGeom prst="rect">
+            <a:avLst/>
+          </a:prstGeom>
+          <a:noFill/>
+        </p:spPr>
+        <p:txBody>
+          <a:bodyPr wrap="square" tIns="0" bIns="0" lIns="25400" rIns="25400">
             <a:spAutoFit/>
           </a:bodyPr>
           <a:lstStyle/>
@@ -9295,7 +10076,7 @@
                   <a:srgbClr val="FFFFFF"/>
                 </a:solidFill>
               </a:rPr>
-              <a:t>B ホテル宴会場</a:t>
+              <a:t>B  ホテル宴会場</a:t>
             </a:r>
           </a:p>
         </p:txBody>
@@ -9308,8 +10089,8 @@
         </p:nvSpPr>
         <p:spPr>
           <a:xfrm>
-            <a:off x="274320" y="1664208"/>
-            <a:ext cx="11841480" cy="548640"/>
+            <a:off x="228600" y="1609344"/>
+            <a:ext cx="11475720" cy="493776"/>
           </a:xfrm>
           <a:prstGeom prst="rect">
             <a:avLst/>
@@ -9351,16 +10132,16 @@
         </p:nvSpPr>
         <p:spPr>
           <a:xfrm>
-            <a:off x="365760" y="1755648"/>
-            <a:ext cx="3017520" cy="384048"/>
-          </a:xfrm>
-          <a:prstGeom prst="rect">
-            <a:avLst/>
-          </a:prstGeom>
-          <a:noFill/>
-        </p:spPr>
-        <p:txBody>
-          <a:bodyPr wrap="square">
+            <a:off x="320040" y="1682496"/>
+            <a:ext cx="2971800" cy="402336"/>
+          </a:xfrm>
+          <a:prstGeom prst="rect">
+            <a:avLst/>
+          </a:prstGeom>
+          <a:noFill/>
+        </p:spPr>
+        <p:txBody>
+          <a:bodyPr wrap="square" tIns="0" bIns="0" lIns="25400" rIns="25400">
             <a:spAutoFit/>
           </a:bodyPr>
           <a:lstStyle/>
@@ -9385,16 +10166,16 @@
         </p:nvSpPr>
         <p:spPr>
           <a:xfrm>
-            <a:off x="3703320" y="1755648"/>
-            <a:ext cx="4023359" cy="384048"/>
-          </a:xfrm>
-          <a:prstGeom prst="rect">
-            <a:avLst/>
-          </a:prstGeom>
-          <a:noFill/>
-        </p:spPr>
-        <p:txBody>
-          <a:bodyPr wrap="square">
+            <a:off x="3611880" y="1682496"/>
+            <a:ext cx="4434840" cy="402336"/>
+          </a:xfrm>
+          <a:prstGeom prst="rect">
+            <a:avLst/>
+          </a:prstGeom>
+          <a:noFill/>
+        </p:spPr>
+        <p:txBody>
+          <a:bodyPr wrap="square" tIns="0" bIns="0" lIns="25400" rIns="25400">
             <a:spAutoFit/>
           </a:bodyPr>
           <a:lstStyle/>
@@ -9419,16 +10200,16 @@
         </p:nvSpPr>
         <p:spPr>
           <a:xfrm>
-            <a:off x="8046719" y="1755648"/>
-            <a:ext cx="4023359" cy="384048"/>
-          </a:xfrm>
-          <a:prstGeom prst="rect">
-            <a:avLst/>
-          </a:prstGeom>
-          <a:noFill/>
-        </p:spPr>
-        <p:txBody>
-          <a:bodyPr wrap="square">
+            <a:off x="8366760" y="1682496"/>
+            <a:ext cx="3520439" cy="402336"/>
+          </a:xfrm>
+          <a:prstGeom prst="rect">
+            <a:avLst/>
+          </a:prstGeom>
+          <a:noFill/>
+        </p:spPr>
+        <p:txBody>
+          <a:bodyPr wrap="square" tIns="0" bIns="0" lIns="25400" rIns="25400">
             <a:spAutoFit/>
           </a:bodyPr>
           <a:lstStyle/>
@@ -9453,8 +10234,8 @@
         </p:nvSpPr>
         <p:spPr>
           <a:xfrm>
-            <a:off x="274320" y="2231136"/>
-            <a:ext cx="11841480" cy="548640"/>
+            <a:off x="228600" y="2103120"/>
+            <a:ext cx="11475720" cy="493776"/>
           </a:xfrm>
           <a:prstGeom prst="rect">
             <a:avLst/>
@@ -9496,16 +10277,16 @@
         </p:nvSpPr>
         <p:spPr>
           <a:xfrm>
-            <a:off x="365760" y="2322576"/>
-            <a:ext cx="3017520" cy="384048"/>
-          </a:xfrm>
-          <a:prstGeom prst="rect">
-            <a:avLst/>
-          </a:prstGeom>
-          <a:noFill/>
-        </p:spPr>
-        <p:txBody>
-          <a:bodyPr wrap="square">
+            <a:off x="320040" y="2176272"/>
+            <a:ext cx="2971800" cy="402336"/>
+          </a:xfrm>
+          <a:prstGeom prst="rect">
+            <a:avLst/>
+          </a:prstGeom>
+          <a:noFill/>
+        </p:spPr>
+        <p:txBody>
+          <a:bodyPr wrap="square" tIns="0" bIns="0" lIns="25400" rIns="25400">
             <a:spAutoFit/>
           </a:bodyPr>
           <a:lstStyle/>
@@ -9530,16 +10311,16 @@
         </p:nvSpPr>
         <p:spPr>
           <a:xfrm>
-            <a:off x="3703320" y="2322576"/>
-            <a:ext cx="4023359" cy="384048"/>
-          </a:xfrm>
-          <a:prstGeom prst="rect">
-            <a:avLst/>
-          </a:prstGeom>
-          <a:noFill/>
-        </p:spPr>
-        <p:txBody>
-          <a:bodyPr wrap="square">
+            <a:off x="3611880" y="2176272"/>
+            <a:ext cx="4434840" cy="402336"/>
+          </a:xfrm>
+          <a:prstGeom prst="rect">
+            <a:avLst/>
+          </a:prstGeom>
+          <a:noFill/>
+        </p:spPr>
+        <p:txBody>
+          <a:bodyPr wrap="square" tIns="0" bIns="0" lIns="25400" rIns="25400">
             <a:spAutoFit/>
           </a:bodyPr>
           <a:lstStyle/>
@@ -9564,16 +10345,16 @@
         </p:nvSpPr>
         <p:spPr>
           <a:xfrm>
-            <a:off x="8046719" y="2322576"/>
-            <a:ext cx="4023359" cy="384048"/>
-          </a:xfrm>
-          <a:prstGeom prst="rect">
-            <a:avLst/>
-          </a:prstGeom>
-          <a:noFill/>
-        </p:spPr>
-        <p:txBody>
-          <a:bodyPr wrap="square">
+            <a:off x="8366760" y="2176272"/>
+            <a:ext cx="3520439" cy="402336"/>
+          </a:xfrm>
+          <a:prstGeom prst="rect">
+            <a:avLst/>
+          </a:prstGeom>
+          <a:noFill/>
+        </p:spPr>
+        <p:txBody>
+          <a:bodyPr wrap="square" tIns="0" bIns="0" lIns="25400" rIns="25400">
             <a:spAutoFit/>
           </a:bodyPr>
           <a:lstStyle/>
@@ -9598,8 +10379,8 @@
         </p:nvSpPr>
         <p:spPr>
           <a:xfrm>
-            <a:off x="274320" y="2798064"/>
-            <a:ext cx="11841480" cy="548640"/>
+            <a:off x="228600" y="2596896"/>
+            <a:ext cx="11475720" cy="493776"/>
           </a:xfrm>
           <a:prstGeom prst="rect">
             <a:avLst/>
@@ -9641,16 +10422,16 @@
         </p:nvSpPr>
         <p:spPr>
           <a:xfrm>
-            <a:off x="365760" y="2889504"/>
-            <a:ext cx="3017520" cy="384048"/>
-          </a:xfrm>
-          <a:prstGeom prst="rect">
-            <a:avLst/>
-          </a:prstGeom>
-          <a:noFill/>
-        </p:spPr>
-        <p:txBody>
-          <a:bodyPr wrap="square">
+            <a:off x="320040" y="2670048"/>
+            <a:ext cx="2971800" cy="402336"/>
+          </a:xfrm>
+          <a:prstGeom prst="rect">
+            <a:avLst/>
+          </a:prstGeom>
+          <a:noFill/>
+        </p:spPr>
+        <p:txBody>
+          <a:bodyPr wrap="square" tIns="0" bIns="0" lIns="25400" rIns="25400">
             <a:spAutoFit/>
           </a:bodyPr>
           <a:lstStyle/>
@@ -9675,16 +10456,16 @@
         </p:nvSpPr>
         <p:spPr>
           <a:xfrm>
-            <a:off x="3703320" y="2889504"/>
-            <a:ext cx="4023359" cy="384048"/>
-          </a:xfrm>
-          <a:prstGeom prst="rect">
-            <a:avLst/>
-          </a:prstGeom>
-          <a:noFill/>
-        </p:spPr>
-        <p:txBody>
-          <a:bodyPr wrap="square">
+            <a:off x="3611880" y="2670048"/>
+            <a:ext cx="4434840" cy="402336"/>
+          </a:xfrm>
+          <a:prstGeom prst="rect">
+            <a:avLst/>
+          </a:prstGeom>
+          <a:noFill/>
+        </p:spPr>
+        <p:txBody>
+          <a:bodyPr wrap="square" tIns="0" bIns="0" lIns="25400" rIns="25400">
             <a:spAutoFit/>
           </a:bodyPr>
           <a:lstStyle/>
@@ -9709,16 +10490,16 @@
         </p:nvSpPr>
         <p:spPr>
           <a:xfrm>
-            <a:off x="8046719" y="2889504"/>
-            <a:ext cx="4023359" cy="384048"/>
-          </a:xfrm>
-          <a:prstGeom prst="rect">
-            <a:avLst/>
-          </a:prstGeom>
-          <a:noFill/>
-        </p:spPr>
-        <p:txBody>
-          <a:bodyPr wrap="square">
+            <a:off x="8366760" y="2670048"/>
+            <a:ext cx="3520439" cy="402336"/>
+          </a:xfrm>
+          <a:prstGeom prst="rect">
+            <a:avLst/>
+          </a:prstGeom>
+          <a:noFill/>
+        </p:spPr>
+        <p:txBody>
+          <a:bodyPr wrap="square" tIns="0" bIns="0" lIns="25400" rIns="25400">
             <a:spAutoFit/>
           </a:bodyPr>
           <a:lstStyle/>
@@ -9743,8 +10524,8 @@
         </p:nvSpPr>
         <p:spPr>
           <a:xfrm>
-            <a:off x="274320" y="3364991"/>
-            <a:ext cx="11841480" cy="548640"/>
+            <a:off x="228600" y="3090672"/>
+            <a:ext cx="11475720" cy="493776"/>
           </a:xfrm>
           <a:prstGeom prst="rect">
             <a:avLst/>
@@ -9786,16 +10567,16 @@
         </p:nvSpPr>
         <p:spPr>
           <a:xfrm>
-            <a:off x="365760" y="3456432"/>
-            <a:ext cx="3017520" cy="384048"/>
-          </a:xfrm>
-          <a:prstGeom prst="rect">
-            <a:avLst/>
-          </a:prstGeom>
-          <a:noFill/>
-        </p:spPr>
-        <p:txBody>
-          <a:bodyPr wrap="square">
+            <a:off x="320040" y="3163824"/>
+            <a:ext cx="2971800" cy="402336"/>
+          </a:xfrm>
+          <a:prstGeom prst="rect">
+            <a:avLst/>
+          </a:prstGeom>
+          <a:noFill/>
+        </p:spPr>
+        <p:txBody>
+          <a:bodyPr wrap="square" tIns="0" bIns="0" lIns="25400" rIns="25400">
             <a:spAutoFit/>
           </a:bodyPr>
           <a:lstStyle/>
@@ -9820,16 +10601,16 @@
         </p:nvSpPr>
         <p:spPr>
           <a:xfrm>
-            <a:off x="3703320" y="3456432"/>
-            <a:ext cx="4023359" cy="384048"/>
-          </a:xfrm>
-          <a:prstGeom prst="rect">
-            <a:avLst/>
-          </a:prstGeom>
-          <a:noFill/>
-        </p:spPr>
-        <p:txBody>
-          <a:bodyPr wrap="square">
+            <a:off x="3611880" y="3163824"/>
+            <a:ext cx="4434840" cy="402336"/>
+          </a:xfrm>
+          <a:prstGeom prst="rect">
+            <a:avLst/>
+          </a:prstGeom>
+          <a:noFill/>
+        </p:spPr>
+        <p:txBody>
+          <a:bodyPr wrap="square" tIns="0" bIns="0" lIns="25400" rIns="25400">
             <a:spAutoFit/>
           </a:bodyPr>
           <a:lstStyle/>
@@ -9854,16 +10635,16 @@
         </p:nvSpPr>
         <p:spPr>
           <a:xfrm>
-            <a:off x="8046719" y="3456432"/>
-            <a:ext cx="4023359" cy="384048"/>
-          </a:xfrm>
-          <a:prstGeom prst="rect">
-            <a:avLst/>
-          </a:prstGeom>
-          <a:noFill/>
-        </p:spPr>
-        <p:txBody>
-          <a:bodyPr wrap="square">
+            <a:off x="8366760" y="3163824"/>
+            <a:ext cx="3520439" cy="402336"/>
+          </a:xfrm>
+          <a:prstGeom prst="rect">
+            <a:avLst/>
+          </a:prstGeom>
+          <a:noFill/>
+        </p:spPr>
+        <p:txBody>
+          <a:bodyPr wrap="square" tIns="0" bIns="0" lIns="25400" rIns="25400">
             <a:spAutoFit/>
           </a:bodyPr>
           <a:lstStyle/>
@@ -9888,8 +10669,8 @@
         </p:nvSpPr>
         <p:spPr>
           <a:xfrm>
-            <a:off x="274320" y="3931920"/>
-            <a:ext cx="11841480" cy="548640"/>
+            <a:off x="228600" y="3584448"/>
+            <a:ext cx="11475720" cy="493776"/>
           </a:xfrm>
           <a:prstGeom prst="rect">
             <a:avLst/>
@@ -9931,16 +10712,16 @@
         </p:nvSpPr>
         <p:spPr>
           <a:xfrm>
-            <a:off x="365760" y="4023359"/>
-            <a:ext cx="3017520" cy="384048"/>
-          </a:xfrm>
-          <a:prstGeom prst="rect">
-            <a:avLst/>
-          </a:prstGeom>
-          <a:noFill/>
-        </p:spPr>
-        <p:txBody>
-          <a:bodyPr wrap="square">
+            <a:off x="320040" y="3657600"/>
+            <a:ext cx="2971800" cy="402336"/>
+          </a:xfrm>
+          <a:prstGeom prst="rect">
+            <a:avLst/>
+          </a:prstGeom>
+          <a:noFill/>
+        </p:spPr>
+        <p:txBody>
+          <a:bodyPr wrap="square" tIns="0" bIns="0" lIns="25400" rIns="25400">
             <a:spAutoFit/>
           </a:bodyPr>
           <a:lstStyle/>
@@ -9952,7 +10733,7 @@
                   <a:srgbClr val="1A375E"/>
                 </a:solidFill>
               </a:rPr>
-              <a:t>長居（5h+）</a:t>
+              <a:t>長居（5時間+）</a:t>
             </a:r>
           </a:p>
         </p:txBody>
@@ -9965,16 +10746,16 @@
         </p:nvSpPr>
         <p:spPr>
           <a:xfrm>
-            <a:off x="3703320" y="4023359"/>
-            <a:ext cx="4023359" cy="384048"/>
-          </a:xfrm>
-          <a:prstGeom prst="rect">
-            <a:avLst/>
-          </a:prstGeom>
-          <a:noFill/>
-        </p:spPr>
-        <p:txBody>
-          <a:bodyPr wrap="square">
+            <a:off x="3611880" y="3657600"/>
+            <a:ext cx="4434840" cy="402336"/>
+          </a:xfrm>
+          <a:prstGeom prst="rect">
+            <a:avLst/>
+          </a:prstGeom>
+          <a:noFill/>
+        </p:spPr>
+        <p:txBody>
+          <a:bodyPr wrap="square" tIns="0" bIns="0" lIns="25400" rIns="25400">
             <a:spAutoFit/>
           </a:bodyPr>
           <a:lstStyle/>
@@ -9999,16 +10780,16 @@
         </p:nvSpPr>
         <p:spPr>
           <a:xfrm>
-            <a:off x="8046719" y="4023359"/>
-            <a:ext cx="4023359" cy="384048"/>
-          </a:xfrm>
-          <a:prstGeom prst="rect">
-            <a:avLst/>
-          </a:prstGeom>
-          <a:noFill/>
-        </p:spPr>
-        <p:txBody>
-          <a:bodyPr wrap="square">
+            <a:off x="8366760" y="3657600"/>
+            <a:ext cx="3520439" cy="402336"/>
+          </a:xfrm>
+          <a:prstGeom prst="rect">
+            <a:avLst/>
+          </a:prstGeom>
+          <a:noFill/>
+        </p:spPr>
+        <p:txBody>
+          <a:bodyPr wrap="square" tIns="0" bIns="0" lIns="25400" rIns="25400">
             <a:spAutoFit/>
           </a:bodyPr>
           <a:lstStyle/>
@@ -10033,8 +10814,8 @@
         </p:nvSpPr>
         <p:spPr>
           <a:xfrm>
-            <a:off x="274320" y="4498848"/>
-            <a:ext cx="11841480" cy="548640"/>
+            <a:off x="228600" y="4078224"/>
+            <a:ext cx="11475720" cy="493776"/>
           </a:xfrm>
           <a:prstGeom prst="rect">
             <a:avLst/>
@@ -10076,16 +10857,16 @@
         </p:nvSpPr>
         <p:spPr>
           <a:xfrm>
-            <a:off x="365760" y="4590288"/>
-            <a:ext cx="3017520" cy="384048"/>
-          </a:xfrm>
-          <a:prstGeom prst="rect">
-            <a:avLst/>
-          </a:prstGeom>
-          <a:noFill/>
-        </p:spPr>
-        <p:txBody>
-          <a:bodyPr wrap="square">
+            <a:off x="320040" y="4151376"/>
+            <a:ext cx="2971800" cy="402336"/>
+          </a:xfrm>
+          <a:prstGeom prst="rect">
+            <a:avLst/>
+          </a:prstGeom>
+          <a:noFill/>
+        </p:spPr>
+        <p:txBody>
+          <a:bodyPr wrap="square" tIns="0" bIns="0" lIns="25400" rIns="25400">
             <a:spAutoFit/>
           </a:bodyPr>
           <a:lstStyle/>
@@ -10110,16 +10891,16 @@
         </p:nvSpPr>
         <p:spPr>
           <a:xfrm>
-            <a:off x="3703320" y="4590288"/>
-            <a:ext cx="4023359" cy="384048"/>
-          </a:xfrm>
-          <a:prstGeom prst="rect">
-            <a:avLst/>
-          </a:prstGeom>
-          <a:noFill/>
-        </p:spPr>
-        <p:txBody>
-          <a:bodyPr wrap="square">
+            <a:off x="3611880" y="4151376"/>
+            <a:ext cx="4434840" cy="402336"/>
+          </a:xfrm>
+          <a:prstGeom prst="rect">
+            <a:avLst/>
+          </a:prstGeom>
+          <a:noFill/>
+        </p:spPr>
+        <p:txBody>
+          <a:bodyPr wrap="square" tIns="0" bIns="0" lIns="25400" rIns="25400">
             <a:spAutoFit/>
           </a:bodyPr>
           <a:lstStyle/>
@@ -10144,16 +10925,16 @@
         </p:nvSpPr>
         <p:spPr>
           <a:xfrm>
-            <a:off x="8046719" y="4590288"/>
-            <a:ext cx="4023359" cy="384048"/>
-          </a:xfrm>
-          <a:prstGeom prst="rect">
-            <a:avLst/>
-          </a:prstGeom>
-          <a:noFill/>
-        </p:spPr>
-        <p:txBody>
-          <a:bodyPr wrap="square">
+            <a:off x="8366760" y="4151376"/>
+            <a:ext cx="3520439" cy="402336"/>
+          </a:xfrm>
+          <a:prstGeom prst="rect">
+            <a:avLst/>
+          </a:prstGeom>
+          <a:noFill/>
+        </p:spPr>
+        <p:txBody>
+          <a:bodyPr wrap="square" tIns="0" bIns="0" lIns="25400" rIns="25400">
             <a:spAutoFit/>
           </a:bodyPr>
           <a:lstStyle/>
@@ -10178,8 +10959,8 @@
         </p:nvSpPr>
         <p:spPr>
           <a:xfrm>
-            <a:off x="274320" y="5065776"/>
-            <a:ext cx="11841480" cy="548640"/>
+            <a:off x="228600" y="4572000"/>
+            <a:ext cx="11475720" cy="493776"/>
           </a:xfrm>
           <a:prstGeom prst="rect">
             <a:avLst/>
@@ -10221,16 +11002,16 @@
         </p:nvSpPr>
         <p:spPr>
           <a:xfrm>
-            <a:off x="365760" y="5157216"/>
-            <a:ext cx="3017520" cy="384048"/>
-          </a:xfrm>
-          <a:prstGeom prst="rect">
-            <a:avLst/>
-          </a:prstGeom>
-          <a:noFill/>
-        </p:spPr>
-        <p:txBody>
-          <a:bodyPr wrap="square">
+            <a:off x="320040" y="4645152"/>
+            <a:ext cx="2971800" cy="402336"/>
+          </a:xfrm>
+          <a:prstGeom prst="rect">
+            <a:avLst/>
+          </a:prstGeom>
+          <a:noFill/>
+        </p:spPr>
+        <p:txBody>
+          <a:bodyPr wrap="square" tIns="0" bIns="0" lIns="25400" rIns="25400">
             <a:spAutoFit/>
           </a:bodyPr>
           <a:lstStyle/>
@@ -10255,16 +11036,16 @@
         </p:nvSpPr>
         <p:spPr>
           <a:xfrm>
-            <a:off x="3703320" y="5157216"/>
-            <a:ext cx="4023359" cy="384048"/>
-          </a:xfrm>
-          <a:prstGeom prst="rect">
-            <a:avLst/>
-          </a:prstGeom>
-          <a:noFill/>
-        </p:spPr>
-        <p:txBody>
-          <a:bodyPr wrap="square">
+            <a:off x="3611880" y="4645152"/>
+            <a:ext cx="4434840" cy="402336"/>
+          </a:xfrm>
+          <a:prstGeom prst="rect">
+            <a:avLst/>
+          </a:prstGeom>
+          <a:noFill/>
+        </p:spPr>
+        <p:txBody>
+          <a:bodyPr wrap="square" tIns="0" bIns="0" lIns="25400" rIns="25400">
             <a:spAutoFit/>
           </a:bodyPr>
           <a:lstStyle/>
@@ -10276,7 +11057,7 @@
                   <a:srgbClr val="1A1A2E"/>
                 </a:solidFill>
               </a:rPr>
-              <a:t>○ 自分たちらしく</a:t>
+              <a:t>○ 自分たちらしい場</a:t>
             </a:r>
           </a:p>
         </p:txBody>
@@ -10289,16 +11070,16 @@
         </p:nvSpPr>
         <p:spPr>
           <a:xfrm>
-            <a:off x="8046719" y="5157216"/>
-            <a:ext cx="4023359" cy="384048"/>
-          </a:xfrm>
-          <a:prstGeom prst="rect">
-            <a:avLst/>
-          </a:prstGeom>
-          <a:noFill/>
-        </p:spPr>
-        <p:txBody>
-          <a:bodyPr wrap="square">
+            <a:off x="8366760" y="4645152"/>
+            <a:ext cx="3520439" cy="402336"/>
+          </a:xfrm>
+          <a:prstGeom prst="rect">
+            <a:avLst/>
+          </a:prstGeom>
+          <a:noFill/>
+        </p:spPr>
+        <p:txBody>
+          <a:bodyPr wrap="square" tIns="0" bIns="0" lIns="25400" rIns="25400">
             <a:spAutoFit/>
           </a:bodyPr>
           <a:lstStyle/>
@@ -10323,8 +11104,8 @@
         </p:nvSpPr>
         <p:spPr>
           <a:xfrm>
-            <a:off x="274320" y="5632704"/>
-            <a:ext cx="11841480" cy="548640"/>
+            <a:off x="228600" y="5065776"/>
+            <a:ext cx="11475720" cy="493776"/>
           </a:xfrm>
           <a:prstGeom prst="rect">
             <a:avLst/>
@@ -10366,16 +11147,16 @@
         </p:nvSpPr>
         <p:spPr>
           <a:xfrm>
-            <a:off x="365760" y="5724144"/>
-            <a:ext cx="3017520" cy="384048"/>
-          </a:xfrm>
-          <a:prstGeom prst="rect">
-            <a:avLst/>
-          </a:prstGeom>
-          <a:noFill/>
-        </p:spPr>
-        <p:txBody>
-          <a:bodyPr wrap="square">
+            <a:off x="320040" y="5138928"/>
+            <a:ext cx="2971800" cy="402336"/>
+          </a:xfrm>
+          <a:prstGeom prst="rect">
+            <a:avLst/>
+          </a:prstGeom>
+          <a:noFill/>
+        </p:spPr>
+        <p:txBody>
+          <a:bodyPr wrap="square" tIns="0" bIns="0" lIns="25400" rIns="25400">
             <a:spAutoFit/>
           </a:bodyPr>
           <a:lstStyle/>
@@ -10387,7 +11168,7 @@
                   <a:srgbClr val="1A375E"/>
                 </a:solidFill>
               </a:rPr>
-              <a:t>予約のしやすさ</a:t>
+              <a:t>予約しやすさ</a:t>
             </a:r>
           </a:p>
         </p:txBody>
@@ -10400,16 +11181,16 @@
         </p:nvSpPr>
         <p:spPr>
           <a:xfrm>
-            <a:off x="3703320" y="5724144"/>
-            <a:ext cx="4023359" cy="384048"/>
-          </a:xfrm>
-          <a:prstGeom prst="rect">
-            <a:avLst/>
-          </a:prstGeom>
-          <a:noFill/>
-        </p:spPr>
-        <p:txBody>
-          <a:bodyPr wrap="square">
+            <a:off x="3611880" y="5138928"/>
+            <a:ext cx="4434840" cy="402336"/>
+          </a:xfrm>
+          <a:prstGeom prst="rect">
+            <a:avLst/>
+          </a:prstGeom>
+          <a:noFill/>
+        </p:spPr>
+        <p:txBody>
+          <a:bodyPr wrap="square" tIns="0" bIns="0" lIns="25400" rIns="25400">
             <a:spAutoFit/>
           </a:bodyPr>
           <a:lstStyle/>
@@ -10434,16 +11215,16 @@
         </p:nvSpPr>
         <p:spPr>
           <a:xfrm>
-            <a:off x="8046719" y="5724144"/>
-            <a:ext cx="4023359" cy="384048"/>
-          </a:xfrm>
-          <a:prstGeom prst="rect">
-            <a:avLst/>
-          </a:prstGeom>
-          <a:noFill/>
-        </p:spPr>
-        <p:txBody>
-          <a:bodyPr wrap="square">
+            <a:off x="8366760" y="5138928"/>
+            <a:ext cx="3520439" cy="402336"/>
+          </a:xfrm>
+          <a:prstGeom prst="rect">
+            <a:avLst/>
+          </a:prstGeom>
+          <a:noFill/>
+        </p:spPr>
+        <p:txBody>
+          <a:bodyPr wrap="square" tIns="0" bIns="0" lIns="25400" rIns="25400">
             <a:spAutoFit/>
           </a:bodyPr>
           <a:lstStyle/>
@@ -10468,8 +11249,8 @@
         </p:nvSpPr>
         <p:spPr>
           <a:xfrm>
-            <a:off x="274320" y="6263640"/>
-            <a:ext cx="11841480" cy="457200"/>
+            <a:off x="228600" y="5632704"/>
+            <a:ext cx="11932920" cy="512064"/>
           </a:xfrm>
           <a:prstGeom prst="rect">
             <a:avLst/>
@@ -10511,28 +11292,62 @@
         </p:nvSpPr>
         <p:spPr>
           <a:xfrm>
-            <a:off x="457200" y="6291072"/>
-            <a:ext cx="11612880" cy="402336"/>
-          </a:xfrm>
-          <a:prstGeom prst="rect">
-            <a:avLst/>
-          </a:prstGeom>
-          <a:noFill/>
-        </p:spPr>
-        <p:txBody>
-          <a:bodyPr wrap="square">
-            <a:spAutoFit/>
-          </a:bodyPr>
-          <a:lstStyle/>
-          <a:p>
-            <a:pPr algn="ctr"/>
-            <a:r>
-              <a:rPr sz="1200" b="1" i="0">
+            <a:off x="365760" y="5650992"/>
+            <a:ext cx="5852160" cy="438912"/>
+          </a:xfrm>
+          <a:prstGeom prst="rect">
+            <a:avLst/>
+          </a:prstGeom>
+          <a:noFill/>
+        </p:spPr>
+        <p:txBody>
+          <a:bodyPr wrap="square" tIns="0" bIns="0" lIns="25400" rIns="25400">
+            <a:spAutoFit/>
+          </a:bodyPr>
+          <a:lstStyle/>
+          <a:p>
+            <a:pPr algn="l"/>
+            <a:r>
+              <a:rPr sz="1100" b="1" i="0">
                 <a:solidFill>
                   <a:srgbClr val="C89B3C"/>
                 </a:solidFill>
               </a:rPr>
-              <a:t>コスト・自由度 重視 → プランA（A-1 ジャンカラ キャンプルーム）　　　　準備なし・特別感 重視 → プランB（加古川プラザホテル）</a:t>
+              <a:t>コスト・自由度を重視 →  プランA（A-1 ジャンカラ キャンプルーム）</a:t>
+            </a:r>
+          </a:p>
+        </p:txBody>
+      </p:sp>
+      <p:sp>
+        <p:nvSpPr>
+          <p:cNvPr id="46" name="TextBox 45"/>
+          <p:cNvSpPr txBox="1"/>
+          <p:nvPr/>
+        </p:nvSpPr>
+        <p:spPr>
+          <a:xfrm>
+            <a:off x="6309360" y="5650992"/>
+            <a:ext cx="5760720" cy="438912"/>
+          </a:xfrm>
+          <a:prstGeom prst="rect">
+            <a:avLst/>
+          </a:prstGeom>
+          <a:noFill/>
+        </p:spPr>
+        <p:txBody>
+          <a:bodyPr wrap="square" tIns="0" bIns="0" lIns="25400" rIns="25400">
+            <a:spAutoFit/>
+          </a:bodyPr>
+          <a:lstStyle/>
+          <a:p>
+            <a:pPr algn="l"/>
+            <a:r>
+              <a:rPr sz="1100" b="1" i="0">
+                <a:solidFill>
+                  <a:srgbClr val="90D4B0"/>
+                </a:solidFill>
+              </a:rPr>
+              <a:t>手間なし・特別感を重視 →  プランB（加古川プラザホテル）</a:t>
             </a:r>
           </a:p>
         </p:txBody>
@@ -10657,23 +11472,23 @@
         </p:nvSpPr>
         <p:spPr>
           <a:xfrm>
-            <a:off x="365760" y="109728"/>
-            <a:ext cx="9144000" cy="640080"/>
-          </a:xfrm>
-          <a:prstGeom prst="rect">
-            <a:avLst/>
-          </a:prstGeom>
-          <a:noFill/>
-        </p:spPr>
-        <p:txBody>
-          <a:bodyPr wrap="square">
+            <a:off x="320040" y="91440"/>
+            <a:ext cx="11430000" cy="566928"/>
+          </a:xfrm>
+          <a:prstGeom prst="rect">
+            <a:avLst/>
+          </a:prstGeom>
+          <a:noFill/>
+        </p:spPr>
+        <p:txBody>
+          <a:bodyPr wrap="square" tIns="0" bIns="0" lIns="25400" rIns="25400">
             <a:spAutoFit/>
           </a:bodyPr>
           <a:lstStyle/>
           <a:p>
             <a:pPr algn="l"/>
             <a:r>
-              <a:rPr sz="2600" b="1" i="0">
+              <a:rPr sz="2400" b="1" i="0">
                 <a:solidFill>
                   <a:srgbClr val="FFFFFF"/>
                 </a:solidFill>
@@ -10691,23 +11506,23 @@
         </p:nvSpPr>
         <p:spPr>
           <a:xfrm>
-            <a:off x="365760" y="621792"/>
-            <a:ext cx="9144000" cy="365760"/>
-          </a:xfrm>
-          <a:prstGeom prst="rect">
-            <a:avLst/>
-          </a:prstGeom>
-          <a:noFill/>
-        </p:spPr>
-        <p:txBody>
-          <a:bodyPr wrap="square">
+            <a:off x="320040" y="621792"/>
+            <a:ext cx="11430000" cy="329184"/>
+          </a:xfrm>
+          <a:prstGeom prst="rect">
+            <a:avLst/>
+          </a:prstGeom>
+          <a:noFill/>
+        </p:spPr>
+        <p:txBody>
+          <a:bodyPr wrap="square" tIns="0" bIns="0" lIns="25400" rIns="25400">
             <a:spAutoFit/>
           </a:bodyPr>
           <a:lstStyle/>
           <a:p>
             <a:pPr algn="l"/>
             <a:r>
-              <a:rPr sz="1200" b="0" i="0">
+              <a:rPr sz="1100" b="0" i="0">
                 <a:solidFill>
                   <a:srgbClr val="C89B3C"/>
                 </a:solidFill>
@@ -10725,8 +11540,8 @@
         </p:nvSpPr>
         <p:spPr>
           <a:xfrm>
-            <a:off x="274320" y="1234440"/>
-            <a:ext cx="5669280" cy="1737360"/>
+            <a:off x="228600" y="1170432"/>
+            <a:ext cx="5623560" cy="1554480"/>
           </a:xfrm>
           <a:prstGeom prst="rect">
             <a:avLst/>
@@ -10734,7 +11549,7 @@
           <a:solidFill>
             <a:srgbClr val="FFFFFF"/>
           </a:solidFill>
-          <a:ln w="19050">
+          <a:ln w="25400">
             <a:solidFill>
               <a:srgbClr val="C89B3C"/>
             </a:solidFill>
@@ -10770,8 +11585,8 @@
         </p:nvSpPr>
         <p:spPr>
           <a:xfrm>
-            <a:off x="274320" y="1234440"/>
-            <a:ext cx="475488" cy="475488"/>
+            <a:off x="228600" y="1170432"/>
+            <a:ext cx="438912" cy="438912"/>
           </a:xfrm>
           <a:prstGeom prst="rect">
             <a:avLst/>
@@ -10813,23 +11628,23 @@
         </p:nvSpPr>
         <p:spPr>
           <a:xfrm>
-            <a:off x="274320" y="1289304"/>
-            <a:ext cx="475488" cy="347472"/>
-          </a:xfrm>
-          <a:prstGeom prst="rect">
-            <a:avLst/>
-          </a:prstGeom>
-          <a:noFill/>
-        </p:spPr>
-        <p:txBody>
-          <a:bodyPr wrap="square">
-            <a:spAutoFit/>
-          </a:bodyPr>
-          <a:lstStyle/>
-          <a:p>
-            <a:pPr algn="ctr"/>
-            <a:r>
-              <a:rPr sz="1300" b="1" i="0">
+            <a:off x="228600" y="1225296"/>
+            <a:ext cx="438912" cy="329184"/>
+          </a:xfrm>
+          <a:prstGeom prst="rect">
+            <a:avLst/>
+          </a:prstGeom>
+          <a:noFill/>
+        </p:spPr>
+        <p:txBody>
+          <a:bodyPr wrap="square" tIns="0" bIns="0" lIns="25400" rIns="25400">
+            <a:spAutoFit/>
+          </a:bodyPr>
+          <a:lstStyle/>
+          <a:p>
+            <a:pPr algn="ctr"/>
+            <a:r>
+              <a:rPr sz="1200" b="1" i="0">
                 <a:solidFill>
                   <a:srgbClr val="FFFFFF"/>
                 </a:solidFill>
@@ -10847,8 +11662,8 @@
         </p:nvSpPr>
         <p:spPr>
           <a:xfrm>
-            <a:off x="4617720" y="1325880"/>
-            <a:ext cx="1234440" cy="274320"/>
+            <a:off x="4681728" y="1261872"/>
+            <a:ext cx="1097280" cy="256032"/>
           </a:xfrm>
           <a:prstGeom prst="rect">
             <a:avLst/>
@@ -10875,7 +11690,7 @@
           </a:fontRef>
         </p:style>
         <p:txBody>
-          <a:bodyPr rtlCol="0" anchor="ctr" wrap="none"/>
+          <a:bodyPr rtlCol="0" anchor="ctr" wrap="none" tIns="0" bIns="0"/>
           <a:lstStyle/>
           <a:p>
             <a:pPr algn="ctr"/>
@@ -10898,23 +11713,23 @@
         </p:nvSpPr>
         <p:spPr>
           <a:xfrm>
-            <a:off x="822959" y="1307592"/>
-            <a:ext cx="3657600" cy="384048"/>
-          </a:xfrm>
-          <a:prstGeom prst="rect">
-            <a:avLst/>
-          </a:prstGeom>
-          <a:noFill/>
-        </p:spPr>
-        <p:txBody>
-          <a:bodyPr wrap="square">
+            <a:off x="731520" y="1234440"/>
+            <a:ext cx="3931920" cy="347472"/>
+          </a:xfrm>
+          <a:prstGeom prst="rect">
+            <a:avLst/>
+          </a:prstGeom>
+          <a:noFill/>
+        </p:spPr>
+        <p:txBody>
+          <a:bodyPr wrap="square" tIns="0" bIns="0" lIns="25400" rIns="25400">
             <a:spAutoFit/>
           </a:bodyPr>
           <a:lstStyle/>
           <a:p>
             <a:pPr algn="l"/>
             <a:r>
-              <a:rPr sz="1300" b="1" i="0">
+              <a:rPr sz="1200" b="1" i="0">
                 <a:solidFill>
                   <a:srgbClr val="1A375E"/>
                 </a:solidFill>
@@ -10932,62 +11747,28 @@
         </p:nvSpPr>
         <p:spPr>
           <a:xfrm>
-            <a:off x="822959" y="1673352"/>
-            <a:ext cx="3657600" cy="256032"/>
-          </a:xfrm>
-          <a:prstGeom prst="rect">
-            <a:avLst/>
-          </a:prstGeom>
-          <a:noFill/>
-        </p:spPr>
-        <p:txBody>
-          <a:bodyPr wrap="square">
+            <a:off x="338328" y="1645920"/>
+            <a:ext cx="5404104" cy="822960"/>
+          </a:xfrm>
+          <a:prstGeom prst="rect">
+            <a:avLst/>
+          </a:prstGeom>
+          <a:noFill/>
+        </p:spPr>
+        <p:txBody>
+          <a:bodyPr wrap="square" tIns="0" bIns="0" lIns="25400" rIns="25400">
             <a:spAutoFit/>
           </a:bodyPr>
           <a:lstStyle/>
           <a:p>
             <a:pPr algn="l"/>
             <a:r>
-              <a:rPr sz="1000" b="0" i="1">
-                <a:solidFill>
-                  <a:srgbClr val="6C757D"/>
-                </a:solidFill>
-              </a:rPr>
-              <a:t>担当: 幹事</a:t>
-            </a:r>
-          </a:p>
-        </p:txBody>
-      </p:sp>
-      <p:sp>
-        <p:nvSpPr>
-          <p:cNvPr id="12" name="TextBox 11"/>
-          <p:cNvSpPr txBox="1"/>
-          <p:nvPr/>
-        </p:nvSpPr>
-        <p:spPr>
-          <a:xfrm>
-            <a:off x="365760" y="1984248"/>
-            <a:ext cx="5394960" cy="896112"/>
-          </a:xfrm>
-          <a:prstGeom prst="rect">
-            <a:avLst/>
-          </a:prstGeom>
-          <a:noFill/>
-        </p:spPr>
-        <p:txBody>
-          <a:bodyPr wrap="square">
-            <a:spAutoFit/>
-          </a:bodyPr>
-          <a:lstStyle/>
-          <a:p>
-            <a:pPr algn="l"/>
-            <a:r>
-              <a:rPr sz="1100" b="0" i="0">
+              <a:rPr sz="1000" b="0" i="0">
                 <a:solidFill>
                   <a:srgbClr val="1A1A2E"/>
                 </a:solidFill>
               </a:rPr>
-              <a:t>TEL: 079-421-6012（10:00〜17:00）
+              <a:t>TEL: 079-421-6012（受付 10:00〜17:00）
 1月3日・14名・小宴会場の空きと料金プランを確認</a:t>
             </a:r>
           </a:p>
@@ -10995,14 +11776,14 @@
       </p:sp>
       <p:sp>
         <p:nvSpPr>
-          <p:cNvPr id="13" name="Rectangle 12"/>
+          <p:cNvPr id="12" name="Rectangle 11"/>
           <p:cNvSpPr/>
           <p:nvPr/>
         </p:nvSpPr>
         <p:spPr>
           <a:xfrm>
-            <a:off x="6263640" y="1234440"/>
-            <a:ext cx="5669280" cy="1737360"/>
+            <a:off x="5989320" y="1170432"/>
+            <a:ext cx="5623560" cy="1554480"/>
           </a:xfrm>
           <a:prstGeom prst="rect">
             <a:avLst/>
@@ -11010,7 +11791,7 @@
           <a:solidFill>
             <a:srgbClr val="FFFFFF"/>
           </a:solidFill>
-          <a:ln w="19050">
+          <a:ln w="25400">
             <a:solidFill>
               <a:srgbClr val="C89B3C"/>
             </a:solidFill>
@@ -11040,14 +11821,14 @@
       </p:sp>
       <p:sp>
         <p:nvSpPr>
-          <p:cNvPr id="14" name="Rectangle 13"/>
+          <p:cNvPr id="13" name="Rectangle 12"/>
           <p:cNvSpPr/>
           <p:nvPr/>
         </p:nvSpPr>
         <p:spPr>
           <a:xfrm>
-            <a:off x="6263640" y="1234440"/>
-            <a:ext cx="475488" cy="475488"/>
+            <a:off x="5989320" y="1170432"/>
+            <a:ext cx="438912" cy="438912"/>
           </a:xfrm>
           <a:prstGeom prst="rect">
             <a:avLst/>
@@ -11083,29 +11864,29 @@
       </p:sp>
       <p:sp>
         <p:nvSpPr>
-          <p:cNvPr id="15" name="TextBox 14"/>
-          <p:cNvSpPr txBox="1"/>
-          <p:nvPr/>
-        </p:nvSpPr>
-        <p:spPr>
-          <a:xfrm>
-            <a:off x="6263640" y="1289304"/>
-            <a:ext cx="475488" cy="347472"/>
-          </a:xfrm>
-          <a:prstGeom prst="rect">
-            <a:avLst/>
-          </a:prstGeom>
-          <a:noFill/>
-        </p:spPr>
-        <p:txBody>
-          <a:bodyPr wrap="square">
-            <a:spAutoFit/>
-          </a:bodyPr>
-          <a:lstStyle/>
-          <a:p>
-            <a:pPr algn="ctr"/>
-            <a:r>
-              <a:rPr sz="1300" b="1" i="0">
+          <p:cNvPr id="14" name="TextBox 13"/>
+          <p:cNvSpPr txBox="1"/>
+          <p:nvPr/>
+        </p:nvSpPr>
+        <p:spPr>
+          <a:xfrm>
+            <a:off x="5989320" y="1225296"/>
+            <a:ext cx="438912" cy="329184"/>
+          </a:xfrm>
+          <a:prstGeom prst="rect">
+            <a:avLst/>
+          </a:prstGeom>
+          <a:noFill/>
+        </p:spPr>
+        <p:txBody>
+          <a:bodyPr wrap="square" tIns="0" bIns="0" lIns="25400" rIns="25400">
+            <a:spAutoFit/>
+          </a:bodyPr>
+          <a:lstStyle/>
+          <a:p>
+            <a:pPr algn="ctr"/>
+            <a:r>
+              <a:rPr sz="1200" b="1" i="0">
                 <a:solidFill>
                   <a:srgbClr val="FFFFFF"/>
                 </a:solidFill>
@@ -11117,14 +11898,14 @@
       </p:sp>
       <p:sp>
         <p:nvSpPr>
-          <p:cNvPr id="16" name="Rectangle 15"/>
+          <p:cNvPr id="15" name="Rectangle 14"/>
           <p:cNvSpPr/>
           <p:nvPr/>
         </p:nvSpPr>
         <p:spPr>
           <a:xfrm>
-            <a:off x="10607040" y="1325880"/>
-            <a:ext cx="1234440" cy="274320"/>
+            <a:off x="10442448" y="1261872"/>
+            <a:ext cx="1097280" cy="256032"/>
           </a:xfrm>
           <a:prstGeom prst="rect">
             <a:avLst/>
@@ -11151,7 +11932,7 @@
           </a:fontRef>
         </p:style>
         <p:txBody>
-          <a:bodyPr rtlCol="0" anchor="ctr" wrap="none"/>
+          <a:bodyPr rtlCol="0" anchor="ctr" wrap="none" tIns="0" bIns="0"/>
           <a:lstStyle/>
           <a:p>
             <a:pPr algn="ctr"/>
@@ -11168,117 +11949,83 @@
       </p:sp>
       <p:sp>
         <p:nvSpPr>
+          <p:cNvPr id="16" name="TextBox 15"/>
+          <p:cNvSpPr txBox="1"/>
+          <p:nvPr/>
+        </p:nvSpPr>
+        <p:spPr>
+          <a:xfrm>
+            <a:off x="6492240" y="1234440"/>
+            <a:ext cx="3931920" cy="347472"/>
+          </a:xfrm>
+          <a:prstGeom prst="rect">
+            <a:avLst/>
+          </a:prstGeom>
+          <a:noFill/>
+        </p:spPr>
+        <p:txBody>
+          <a:bodyPr wrap="square" tIns="0" bIns="0" lIns="25400" rIns="25400">
+            <a:spAutoFit/>
+          </a:bodyPr>
+          <a:lstStyle/>
+          <a:p>
+            <a:pPr algn="l"/>
+            <a:r>
+              <a:rPr sz="1200" b="1" i="0">
+                <a:solidFill>
+                  <a:srgbClr val="1A375E"/>
+                </a:solidFill>
+              </a:rPr>
+              <a:t>ジャンカラ キャンプルーム 空き確認</a:t>
+            </a:r>
+          </a:p>
+        </p:txBody>
+      </p:sp>
+      <p:sp>
+        <p:nvSpPr>
           <p:cNvPr id="17" name="TextBox 16"/>
           <p:cNvSpPr txBox="1"/>
           <p:nvPr/>
         </p:nvSpPr>
         <p:spPr>
           <a:xfrm>
-            <a:off x="6812279" y="1307592"/>
-            <a:ext cx="3657600" cy="384048"/>
-          </a:xfrm>
-          <a:prstGeom prst="rect">
-            <a:avLst/>
-          </a:prstGeom>
-          <a:noFill/>
-        </p:spPr>
-        <p:txBody>
-          <a:bodyPr wrap="square">
+            <a:off x="6099048" y="1645920"/>
+            <a:ext cx="5404104" cy="822960"/>
+          </a:xfrm>
+          <a:prstGeom prst="rect">
+            <a:avLst/>
+          </a:prstGeom>
+          <a:noFill/>
+        </p:spPr>
+        <p:txBody>
+          <a:bodyPr wrap="square" tIns="0" bIns="0" lIns="25400" rIns="25400">
             <a:spAutoFit/>
           </a:bodyPr>
           <a:lstStyle/>
           <a:p>
             <a:pPr algn="l"/>
             <a:r>
-              <a:rPr sz="1300" b="1" i="0">
-                <a:solidFill>
-                  <a:srgbClr val="1A375E"/>
-                </a:solidFill>
-              </a:rPr>
-              <a:t>ジャンカラ キャンプルーム 空き確認</a:t>
-            </a:r>
-          </a:p>
-        </p:txBody>
-      </p:sp>
-      <p:sp>
-        <p:nvSpPr>
-          <p:cNvPr id="18" name="TextBox 17"/>
-          <p:cNvSpPr txBox="1"/>
-          <p:nvPr/>
-        </p:nvSpPr>
-        <p:spPr>
-          <a:xfrm>
-            <a:off x="6812279" y="1673352"/>
-            <a:ext cx="3657600" cy="256032"/>
-          </a:xfrm>
-          <a:prstGeom prst="rect">
-            <a:avLst/>
-          </a:prstGeom>
-          <a:noFill/>
-        </p:spPr>
-        <p:txBody>
-          <a:bodyPr wrap="square">
-            <a:spAutoFit/>
-          </a:bodyPr>
-          <a:lstStyle/>
-          <a:p>
-            <a:pPr algn="l"/>
-            <a:r>
-              <a:rPr sz="1000" b="0" i="1">
-                <a:solidFill>
-                  <a:srgbClr val="6C757D"/>
-                </a:solidFill>
-              </a:rPr>
-              <a:t>担当: 幹事</a:t>
-            </a:r>
-          </a:p>
-        </p:txBody>
-      </p:sp>
-      <p:sp>
-        <p:nvSpPr>
-          <p:cNvPr id="19" name="TextBox 18"/>
-          <p:cNvSpPr txBox="1"/>
-          <p:nvPr/>
-        </p:nvSpPr>
-        <p:spPr>
-          <a:xfrm>
-            <a:off x="6355079" y="1984248"/>
-            <a:ext cx="5394960" cy="896112"/>
-          </a:xfrm>
-          <a:prstGeom prst="rect">
-            <a:avLst/>
-          </a:prstGeom>
-          <a:noFill/>
-        </p:spPr>
-        <p:txBody>
-          <a:bodyPr wrap="square">
-            <a:spAutoFit/>
-          </a:bodyPr>
-          <a:lstStyle/>
-          <a:p>
-            <a:pPr algn="l"/>
-            <a:r>
-              <a:rPr sz="1100" b="0" i="0">
+              <a:rPr sz="1000" b="0" i="0">
                 <a:solidFill>
                   <a:srgbClr val="1A1A2E"/>
                 </a:solidFill>
               </a:rPr>
-              <a:t>インスタベース（https://www.instabase.jp/space/6255281347）
-にアクセスし1月3日の空き状況・料金を確認</a:t>
-            </a:r>
-          </a:p>
-        </p:txBody>
-      </p:sp>
-      <p:sp>
-        <p:nvSpPr>
-          <p:cNvPr id="20" name="Rectangle 19"/>
+              <a:t>インスタベースで「加古川 キャンプルーム」を検索
+1月3日の空き状況・料金・予約方法を確認する</a:t>
+            </a:r>
+          </a:p>
+        </p:txBody>
+      </p:sp>
+      <p:sp>
+        <p:nvSpPr>
+          <p:cNvPr id="18" name="Rectangle 17"/>
           <p:cNvSpPr/>
           <p:nvPr/>
         </p:nvSpPr>
         <p:spPr>
           <a:xfrm>
-            <a:off x="274320" y="3154680"/>
-            <a:ext cx="5669280" cy="1737360"/>
+            <a:off x="228600" y="2834640"/>
+            <a:ext cx="5623560" cy="1554480"/>
           </a:xfrm>
           <a:prstGeom prst="rect">
             <a:avLst/>
@@ -11316,14 +12063,14 @@
       </p:sp>
       <p:sp>
         <p:nvSpPr>
-          <p:cNvPr id="21" name="Rectangle 20"/>
+          <p:cNvPr id="19" name="Rectangle 18"/>
           <p:cNvSpPr/>
           <p:nvPr/>
         </p:nvSpPr>
         <p:spPr>
           <a:xfrm>
-            <a:off x="274320" y="3154680"/>
-            <a:ext cx="475488" cy="475488"/>
+            <a:off x="228600" y="2834640"/>
+            <a:ext cx="438912" cy="438912"/>
           </a:xfrm>
           <a:prstGeom prst="rect">
             <a:avLst/>
@@ -11359,29 +12106,29 @@
       </p:sp>
       <p:sp>
         <p:nvSpPr>
-          <p:cNvPr id="22" name="TextBox 21"/>
-          <p:cNvSpPr txBox="1"/>
-          <p:nvPr/>
-        </p:nvSpPr>
-        <p:spPr>
-          <a:xfrm>
-            <a:off x="274320" y="3209544"/>
-            <a:ext cx="475488" cy="347472"/>
-          </a:xfrm>
-          <a:prstGeom prst="rect">
-            <a:avLst/>
-          </a:prstGeom>
-          <a:noFill/>
-        </p:spPr>
-        <p:txBody>
-          <a:bodyPr wrap="square">
-            <a:spAutoFit/>
-          </a:bodyPr>
-          <a:lstStyle/>
-          <a:p>
-            <a:pPr algn="ctr"/>
-            <a:r>
-              <a:rPr sz="1300" b="1" i="0">
+          <p:cNvPr id="20" name="TextBox 19"/>
+          <p:cNvSpPr txBox="1"/>
+          <p:nvPr/>
+        </p:nvSpPr>
+        <p:spPr>
+          <a:xfrm>
+            <a:off x="228600" y="2889504"/>
+            <a:ext cx="438912" cy="329184"/>
+          </a:xfrm>
+          <a:prstGeom prst="rect">
+            <a:avLst/>
+          </a:prstGeom>
+          <a:noFill/>
+        </p:spPr>
+        <p:txBody>
+          <a:bodyPr wrap="square" tIns="0" bIns="0" lIns="25400" rIns="25400">
+            <a:spAutoFit/>
+          </a:bodyPr>
+          <a:lstStyle/>
+          <a:p>
+            <a:pPr algn="ctr"/>
+            <a:r>
+              <a:rPr sz="1200" b="1" i="0">
                 <a:solidFill>
                   <a:srgbClr val="FFFFFF"/>
                 </a:solidFill>
@@ -11393,14 +12140,14 @@
       </p:sp>
       <p:sp>
         <p:nvSpPr>
-          <p:cNvPr id="23" name="Rectangle 22"/>
+          <p:cNvPr id="21" name="Rectangle 20"/>
           <p:cNvSpPr/>
           <p:nvPr/>
         </p:nvSpPr>
         <p:spPr>
           <a:xfrm>
-            <a:off x="4617720" y="3246120"/>
-            <a:ext cx="1234440" cy="274320"/>
+            <a:off x="4681728" y="2926080"/>
+            <a:ext cx="1097280" cy="256032"/>
           </a:xfrm>
           <a:prstGeom prst="rect">
             <a:avLst/>
@@ -11427,7 +12174,7 @@
           </a:fontRef>
         </p:style>
         <p:txBody>
-          <a:bodyPr rtlCol="0" anchor="ctr" wrap="none"/>
+          <a:bodyPr rtlCol="0" anchor="ctr" wrap="none" tIns="0" bIns="0"/>
           <a:lstStyle/>
           <a:p>
             <a:pPr algn="ctr"/>
@@ -11444,117 +12191,83 @@
       </p:sp>
       <p:sp>
         <p:nvSpPr>
-          <p:cNvPr id="24" name="TextBox 23"/>
-          <p:cNvSpPr txBox="1"/>
-          <p:nvPr/>
-        </p:nvSpPr>
-        <p:spPr>
-          <a:xfrm>
-            <a:off x="822959" y="3227832"/>
-            <a:ext cx="3657600" cy="384048"/>
-          </a:xfrm>
-          <a:prstGeom prst="rect">
-            <a:avLst/>
-          </a:prstGeom>
-          <a:noFill/>
-        </p:spPr>
-        <p:txBody>
-          <a:bodyPr wrap="square">
+          <p:cNvPr id="22" name="TextBox 21"/>
+          <p:cNvSpPr txBox="1"/>
+          <p:nvPr/>
+        </p:nvSpPr>
+        <p:spPr>
+          <a:xfrm>
+            <a:off x="731520" y="2898648"/>
+            <a:ext cx="3931920" cy="347472"/>
+          </a:xfrm>
+          <a:prstGeom prst="rect">
+            <a:avLst/>
+          </a:prstGeom>
+          <a:noFill/>
+        </p:spPr>
+        <p:txBody>
+          <a:bodyPr wrap="square" tIns="0" bIns="0" lIns="25400" rIns="25400">
             <a:spAutoFit/>
           </a:bodyPr>
           <a:lstStyle/>
           <a:p>
             <a:pPr algn="l"/>
             <a:r>
-              <a:rPr sz="1300" b="1" i="0">
+              <a:rPr sz="1200" b="1" i="0">
                 <a:solidFill>
                   <a:srgbClr val="1A375E"/>
                 </a:solidFill>
               </a:rPr>
-              <a:t>プランを1本に絞って予約</a:t>
-            </a:r>
-          </a:p>
-        </p:txBody>
-      </p:sp>
-      <p:sp>
-        <p:nvSpPr>
-          <p:cNvPr id="25" name="TextBox 24"/>
-          <p:cNvSpPr txBox="1"/>
-          <p:nvPr/>
-        </p:nvSpPr>
-        <p:spPr>
-          <a:xfrm>
-            <a:off x="822959" y="3593592"/>
-            <a:ext cx="3657600" cy="256032"/>
-          </a:xfrm>
-          <a:prstGeom prst="rect">
-            <a:avLst/>
-          </a:prstGeom>
-          <a:noFill/>
-        </p:spPr>
-        <p:txBody>
-          <a:bodyPr wrap="square">
+              <a:t>プランを1本に絞って即予約</a:t>
+            </a:r>
+          </a:p>
+        </p:txBody>
+      </p:sp>
+      <p:sp>
+        <p:nvSpPr>
+          <p:cNvPr id="23" name="TextBox 22"/>
+          <p:cNvSpPr txBox="1"/>
+          <p:nvPr/>
+        </p:nvSpPr>
+        <p:spPr>
+          <a:xfrm>
+            <a:off x="338328" y="3310128"/>
+            <a:ext cx="5404104" cy="822960"/>
+          </a:xfrm>
+          <a:prstGeom prst="rect">
+            <a:avLst/>
+          </a:prstGeom>
+          <a:noFill/>
+        </p:spPr>
+        <p:txBody>
+          <a:bodyPr wrap="square" tIns="0" bIns="0" lIns="25400" rIns="25400">
             <a:spAutoFit/>
           </a:bodyPr>
           <a:lstStyle/>
           <a:p>
             <a:pPr algn="l"/>
             <a:r>
-              <a:rPr sz="1000" b="0" i="1">
-                <a:solidFill>
-                  <a:srgbClr val="6C757D"/>
-                </a:solidFill>
-              </a:rPr>
-              <a:t>担当: 幹事</a:t>
-            </a:r>
-          </a:p>
-        </p:txBody>
-      </p:sp>
-      <p:sp>
-        <p:nvSpPr>
-          <p:cNvPr id="26" name="TextBox 25"/>
-          <p:cNvSpPr txBox="1"/>
-          <p:nvPr/>
-        </p:nvSpPr>
-        <p:spPr>
-          <a:xfrm>
-            <a:off x="365760" y="3904488"/>
-            <a:ext cx="5394960" cy="896112"/>
-          </a:xfrm>
-          <a:prstGeom prst="rect">
-            <a:avLst/>
-          </a:prstGeom>
-          <a:noFill/>
-        </p:spPr>
-        <p:txBody>
-          <a:bodyPr wrap="square">
-            <a:spAutoFit/>
-          </a:bodyPr>
-          <a:lstStyle/>
-          <a:p>
-            <a:pPr algn="l"/>
-            <a:r>
-              <a:rPr sz="1100" b="0" i="0">
+              <a:rPr sz="1000" b="0" i="0">
                 <a:solidFill>
                   <a:srgbClr val="1A1A2E"/>
                 </a:solidFill>
               </a:rPr>
               <a:t>AまたはBどちらかに決定し即予約
-（正月3日は人気日・早い者勝ち）</a:t>
-            </a:r>
-          </a:p>
-        </p:txBody>
-      </p:sp>
-      <p:sp>
-        <p:nvSpPr>
-          <p:cNvPr id="27" name="Rectangle 26"/>
+正月3日は人気日・早い者勝ち</a:t>
+            </a:r>
+          </a:p>
+        </p:txBody>
+      </p:sp>
+      <p:sp>
+        <p:nvSpPr>
+          <p:cNvPr id="24" name="Rectangle 23"/>
           <p:cNvSpPr/>
           <p:nvPr/>
         </p:nvSpPr>
         <p:spPr>
           <a:xfrm>
-            <a:off x="6263640" y="3154680"/>
-            <a:ext cx="5669280" cy="1737360"/>
+            <a:off x="5989320" y="2834640"/>
+            <a:ext cx="5623560" cy="1554480"/>
           </a:xfrm>
           <a:prstGeom prst="rect">
             <a:avLst/>
@@ -11592,14 +12305,14 @@
       </p:sp>
       <p:sp>
         <p:nvSpPr>
-          <p:cNvPr id="28" name="Rectangle 27"/>
+          <p:cNvPr id="25" name="Rectangle 24"/>
           <p:cNvSpPr/>
           <p:nvPr/>
         </p:nvSpPr>
         <p:spPr>
           <a:xfrm>
-            <a:off x="6263640" y="3154680"/>
-            <a:ext cx="475488" cy="475488"/>
+            <a:off x="5989320" y="2834640"/>
+            <a:ext cx="438912" cy="438912"/>
           </a:xfrm>
           <a:prstGeom prst="rect">
             <a:avLst/>
@@ -11635,29 +12348,29 @@
       </p:sp>
       <p:sp>
         <p:nvSpPr>
-          <p:cNvPr id="29" name="TextBox 28"/>
-          <p:cNvSpPr txBox="1"/>
-          <p:nvPr/>
-        </p:nvSpPr>
-        <p:spPr>
-          <a:xfrm>
-            <a:off x="6263640" y="3209544"/>
-            <a:ext cx="475488" cy="347472"/>
-          </a:xfrm>
-          <a:prstGeom prst="rect">
-            <a:avLst/>
-          </a:prstGeom>
-          <a:noFill/>
-        </p:spPr>
-        <p:txBody>
-          <a:bodyPr wrap="square">
-            <a:spAutoFit/>
-          </a:bodyPr>
-          <a:lstStyle/>
-          <a:p>
-            <a:pPr algn="ctr"/>
-            <a:r>
-              <a:rPr sz="1300" b="1" i="0">
+          <p:cNvPr id="26" name="TextBox 25"/>
+          <p:cNvSpPr txBox="1"/>
+          <p:nvPr/>
+        </p:nvSpPr>
+        <p:spPr>
+          <a:xfrm>
+            <a:off x="5989320" y="2889504"/>
+            <a:ext cx="438912" cy="329184"/>
+          </a:xfrm>
+          <a:prstGeom prst="rect">
+            <a:avLst/>
+          </a:prstGeom>
+          <a:noFill/>
+        </p:spPr>
+        <p:txBody>
+          <a:bodyPr wrap="square" tIns="0" bIns="0" lIns="25400" rIns="25400">
+            <a:spAutoFit/>
+          </a:bodyPr>
+          <a:lstStyle/>
+          <a:p>
+            <a:pPr algn="ctr"/>
+            <a:r>
+              <a:rPr sz="1200" b="1" i="0">
                 <a:solidFill>
                   <a:srgbClr val="FFFFFF"/>
                 </a:solidFill>
@@ -11669,14 +12382,14 @@
       </p:sp>
       <p:sp>
         <p:nvSpPr>
-          <p:cNvPr id="30" name="Rectangle 29"/>
+          <p:cNvPr id="27" name="Rectangle 26"/>
           <p:cNvSpPr/>
           <p:nvPr/>
         </p:nvSpPr>
         <p:spPr>
           <a:xfrm>
-            <a:off x="10607040" y="3246120"/>
-            <a:ext cx="1234440" cy="274320"/>
+            <a:off x="10442448" y="2926080"/>
+            <a:ext cx="1097280" cy="256032"/>
           </a:xfrm>
           <a:prstGeom prst="rect">
             <a:avLst/>
@@ -11703,7 +12416,7 @@
           </a:fontRef>
         </p:style>
         <p:txBody>
-          <a:bodyPr rtlCol="0" anchor="ctr" wrap="none"/>
+          <a:bodyPr rtlCol="0" anchor="ctr" wrap="none" tIns="0" bIns="0"/>
           <a:lstStyle/>
           <a:p>
             <a:pPr algn="ctr"/>
@@ -11720,29 +12433,29 @@
       </p:sp>
       <p:sp>
         <p:nvSpPr>
-          <p:cNvPr id="31" name="TextBox 30"/>
-          <p:cNvSpPr txBox="1"/>
-          <p:nvPr/>
-        </p:nvSpPr>
-        <p:spPr>
-          <a:xfrm>
-            <a:off x="6812279" y="3227832"/>
-            <a:ext cx="3657600" cy="384048"/>
-          </a:xfrm>
-          <a:prstGeom prst="rect">
-            <a:avLst/>
-          </a:prstGeom>
-          <a:noFill/>
-        </p:spPr>
-        <p:txBody>
-          <a:bodyPr wrap="square">
+          <p:cNvPr id="28" name="TextBox 27"/>
+          <p:cNvSpPr txBox="1"/>
+          <p:nvPr/>
+        </p:nvSpPr>
+        <p:spPr>
+          <a:xfrm>
+            <a:off x="6492240" y="2898648"/>
+            <a:ext cx="3931920" cy="347472"/>
+          </a:xfrm>
+          <a:prstGeom prst="rect">
+            <a:avLst/>
+          </a:prstGeom>
+          <a:noFill/>
+        </p:spPr>
+        <p:txBody>
+          <a:bodyPr wrap="square" tIns="0" bIns="0" lIns="25400" rIns="25400">
             <a:spAutoFit/>
           </a:bodyPr>
           <a:lstStyle/>
           <a:p>
             <a:pPr algn="l"/>
             <a:r>
-              <a:rPr sz="1300" b="1" i="0">
+              <a:rPr sz="1200" b="1" i="0">
                 <a:solidFill>
                   <a:srgbClr val="1A375E"/>
                 </a:solidFill>
@@ -11754,83 +12467,49 @@
       </p:sp>
       <p:sp>
         <p:nvSpPr>
-          <p:cNvPr id="32" name="TextBox 31"/>
-          <p:cNvSpPr txBox="1"/>
-          <p:nvPr/>
-        </p:nvSpPr>
-        <p:spPr>
-          <a:xfrm>
-            <a:off x="6812279" y="3593592"/>
-            <a:ext cx="3657600" cy="256032"/>
-          </a:xfrm>
-          <a:prstGeom prst="rect">
-            <a:avLst/>
-          </a:prstGeom>
-          <a:noFill/>
-        </p:spPr>
-        <p:txBody>
-          <a:bodyPr wrap="square">
+          <p:cNvPr id="29" name="TextBox 28"/>
+          <p:cNvSpPr txBox="1"/>
+          <p:nvPr/>
+        </p:nvSpPr>
+        <p:spPr>
+          <a:xfrm>
+            <a:off x="6099048" y="3310128"/>
+            <a:ext cx="5404104" cy="822960"/>
+          </a:xfrm>
+          <a:prstGeom prst="rect">
+            <a:avLst/>
+          </a:prstGeom>
+          <a:noFill/>
+        </p:spPr>
+        <p:txBody>
+          <a:bodyPr wrap="square" tIns="0" bIns="0" lIns="25400" rIns="25400">
             <a:spAutoFit/>
           </a:bodyPr>
           <a:lstStyle/>
           <a:p>
             <a:pPr algn="l"/>
             <a:r>
-              <a:rPr sz="1000" b="0" i="1">
-                <a:solidFill>
-                  <a:srgbClr val="6C757D"/>
-                </a:solidFill>
-              </a:rPr>
-              <a:t>担当: 全員</a:t>
-            </a:r>
-          </a:p>
-        </p:txBody>
-      </p:sp>
-      <p:sp>
-        <p:nvSpPr>
-          <p:cNvPr id="33" name="TextBox 32"/>
-          <p:cNvSpPr txBox="1"/>
-          <p:nvPr/>
-        </p:nvSpPr>
-        <p:spPr>
-          <a:xfrm>
-            <a:off x="6355079" y="3904488"/>
-            <a:ext cx="5394960" cy="896112"/>
-          </a:xfrm>
-          <a:prstGeom prst="rect">
-            <a:avLst/>
-          </a:prstGeom>
-          <a:noFill/>
-        </p:spPr>
-        <p:txBody>
-          <a:bodyPr wrap="square">
-            <a:spAutoFit/>
-          </a:bodyPr>
-          <a:lstStyle/>
-          <a:p>
-            <a:pPr algn="l"/>
-            <a:r>
-              <a:rPr sz="1100" b="0" i="0">
+              <a:rPr sz="1000" b="0" i="0">
                 <a:solidFill>
                   <a:srgbClr val="1A1A2E"/>
                 </a:solidFill>
               </a:rPr>
-              <a:t>確定人数を把握（子供の年齢も確認）
-LINEグループ等で確認</a:t>
-            </a:r>
-          </a:p>
-        </p:txBody>
-      </p:sp>
-      <p:sp>
-        <p:nvSpPr>
-          <p:cNvPr id="34" name="Rectangle 33"/>
+              <a:t>LINEグループ等で確定人数を確認
+子供の年齢・食べ物の好みも把握しておく</a:t>
+            </a:r>
+          </a:p>
+        </p:txBody>
+      </p:sp>
+      <p:sp>
+        <p:nvSpPr>
+          <p:cNvPr id="30" name="Rectangle 29"/>
           <p:cNvSpPr/>
           <p:nvPr/>
         </p:nvSpPr>
         <p:spPr>
           <a:xfrm>
-            <a:off x="3264408" y="5074920"/>
-            <a:ext cx="5669280" cy="1737360"/>
+            <a:off x="3282696" y="4498848"/>
+            <a:ext cx="5623560" cy="1554480"/>
           </a:xfrm>
           <a:prstGeom prst="rect">
             <a:avLst/>
@@ -11868,14 +12547,14 @@
       </p:sp>
       <p:sp>
         <p:nvSpPr>
-          <p:cNvPr id="35" name="Rectangle 34"/>
+          <p:cNvPr id="31" name="Rectangle 30"/>
           <p:cNvSpPr/>
           <p:nvPr/>
         </p:nvSpPr>
         <p:spPr>
           <a:xfrm>
-            <a:off x="3264408" y="5074920"/>
-            <a:ext cx="475488" cy="475488"/>
+            <a:off x="3282696" y="4498848"/>
+            <a:ext cx="438912" cy="438912"/>
           </a:xfrm>
           <a:prstGeom prst="rect">
             <a:avLst/>
@@ -11911,29 +12590,29 @@
       </p:sp>
       <p:sp>
         <p:nvSpPr>
-          <p:cNvPr id="36" name="TextBox 35"/>
-          <p:cNvSpPr txBox="1"/>
-          <p:nvPr/>
-        </p:nvSpPr>
-        <p:spPr>
-          <a:xfrm>
-            <a:off x="3264408" y="5129784"/>
-            <a:ext cx="475488" cy="347472"/>
-          </a:xfrm>
-          <a:prstGeom prst="rect">
-            <a:avLst/>
-          </a:prstGeom>
-          <a:noFill/>
-        </p:spPr>
-        <p:txBody>
-          <a:bodyPr wrap="square">
-            <a:spAutoFit/>
-          </a:bodyPr>
-          <a:lstStyle/>
-          <a:p>
-            <a:pPr algn="ctr"/>
-            <a:r>
-              <a:rPr sz="1300" b="1" i="0">
+          <p:cNvPr id="32" name="TextBox 31"/>
+          <p:cNvSpPr txBox="1"/>
+          <p:nvPr/>
+        </p:nvSpPr>
+        <p:spPr>
+          <a:xfrm>
+            <a:off x="3282696" y="4553712"/>
+            <a:ext cx="438912" cy="329184"/>
+          </a:xfrm>
+          <a:prstGeom prst="rect">
+            <a:avLst/>
+          </a:prstGeom>
+          <a:noFill/>
+        </p:spPr>
+        <p:txBody>
+          <a:bodyPr wrap="square" tIns="0" bIns="0" lIns="25400" rIns="25400">
+            <a:spAutoFit/>
+          </a:bodyPr>
+          <a:lstStyle/>
+          <a:p>
+            <a:pPr algn="ctr"/>
+            <a:r>
+              <a:rPr sz="1200" b="1" i="0">
                 <a:solidFill>
                   <a:srgbClr val="FFFFFF"/>
                 </a:solidFill>
@@ -11945,14 +12624,14 @@
       </p:sp>
       <p:sp>
         <p:nvSpPr>
-          <p:cNvPr id="37" name="Rectangle 36"/>
+          <p:cNvPr id="33" name="Rectangle 32"/>
           <p:cNvSpPr/>
           <p:nvPr/>
         </p:nvSpPr>
         <p:spPr>
           <a:xfrm>
-            <a:off x="7607808" y="5166360"/>
-            <a:ext cx="1234440" cy="274320"/>
+            <a:off x="7735824" y="4590288"/>
+            <a:ext cx="1097280" cy="256032"/>
           </a:xfrm>
           <a:prstGeom prst="rect">
             <a:avLst/>
@@ -11979,7 +12658,7 @@
           </a:fontRef>
         </p:style>
         <p:txBody>
-          <a:bodyPr rtlCol="0" anchor="ctr" wrap="none"/>
+          <a:bodyPr rtlCol="0" anchor="ctr" wrap="none" tIns="0" bIns="0"/>
           <a:lstStyle/>
           <a:p>
             <a:pPr algn="ctr"/>
@@ -11996,117 +12675,83 @@
       </p:sp>
       <p:sp>
         <p:nvSpPr>
-          <p:cNvPr id="38" name="TextBox 37"/>
-          <p:cNvSpPr txBox="1"/>
-          <p:nvPr/>
-        </p:nvSpPr>
-        <p:spPr>
-          <a:xfrm>
-            <a:off x="3813048" y="5148072"/>
-            <a:ext cx="3657600" cy="384048"/>
-          </a:xfrm>
-          <a:prstGeom prst="rect">
-            <a:avLst/>
-          </a:prstGeom>
-          <a:noFill/>
-        </p:spPr>
-        <p:txBody>
-          <a:bodyPr wrap="square">
+          <p:cNvPr id="34" name="TextBox 33"/>
+          <p:cNvSpPr txBox="1"/>
+          <p:nvPr/>
+        </p:nvSpPr>
+        <p:spPr>
+          <a:xfrm>
+            <a:off x="3785615" y="4562856"/>
+            <a:ext cx="3931920" cy="347472"/>
+          </a:xfrm>
+          <a:prstGeom prst="rect">
+            <a:avLst/>
+          </a:prstGeom>
+          <a:noFill/>
+        </p:spPr>
+        <p:txBody>
+          <a:bodyPr wrap="square" tIns="0" bIns="0" lIns="25400" rIns="25400">
             <a:spAutoFit/>
           </a:bodyPr>
           <a:lstStyle/>
           <a:p>
             <a:pPr algn="l"/>
             <a:r>
-              <a:rPr sz="1300" b="1" i="0">
+              <a:rPr sz="1200" b="1" i="0">
                 <a:solidFill>
                   <a:srgbClr val="1A375E"/>
                 </a:solidFill>
               </a:rPr>
-              <a:t>食事の手配（プランAの場合）</a:t>
-            </a:r>
-          </a:p>
-        </p:txBody>
-      </p:sp>
-      <p:sp>
-        <p:nvSpPr>
-          <p:cNvPr id="39" name="TextBox 38"/>
-          <p:cNvSpPr txBox="1"/>
-          <p:nvPr/>
-        </p:nvSpPr>
-        <p:spPr>
-          <a:xfrm>
-            <a:off x="3813048" y="5513832"/>
-            <a:ext cx="3657600" cy="256032"/>
-          </a:xfrm>
-          <a:prstGeom prst="rect">
-            <a:avLst/>
-          </a:prstGeom>
-          <a:noFill/>
-        </p:spPr>
-        <p:txBody>
-          <a:bodyPr wrap="square">
+              <a:t>食事の手配（プランA の場合）</a:t>
+            </a:r>
+          </a:p>
+        </p:txBody>
+      </p:sp>
+      <p:sp>
+        <p:nvSpPr>
+          <p:cNvPr id="35" name="TextBox 34"/>
+          <p:cNvSpPr txBox="1"/>
+          <p:nvPr/>
+        </p:nvSpPr>
+        <p:spPr>
+          <a:xfrm>
+            <a:off x="3392424" y="4974336"/>
+            <a:ext cx="5404104" cy="822960"/>
+          </a:xfrm>
+          <a:prstGeom prst="rect">
+            <a:avLst/>
+          </a:prstGeom>
+          <a:noFill/>
+        </p:spPr>
+        <p:txBody>
+          <a:bodyPr wrap="square" tIns="0" bIns="0" lIns="25400" rIns="25400">
             <a:spAutoFit/>
           </a:bodyPr>
           <a:lstStyle/>
           <a:p>
             <a:pPr algn="l"/>
             <a:r>
-              <a:rPr sz="1000" b="0" i="1">
-                <a:solidFill>
-                  <a:srgbClr val="6C757D"/>
-                </a:solidFill>
-              </a:rPr>
-              <a:t>担当: 幹事</a:t>
-            </a:r>
-          </a:p>
-        </p:txBody>
-      </p:sp>
-      <p:sp>
-        <p:nvSpPr>
-          <p:cNvPr id="40" name="TextBox 39"/>
-          <p:cNvSpPr txBox="1"/>
-          <p:nvPr/>
-        </p:nvSpPr>
-        <p:spPr>
-          <a:xfrm>
-            <a:off x="3355848" y="5824728"/>
-            <a:ext cx="5394960" cy="896112"/>
-          </a:xfrm>
-          <a:prstGeom prst="rect">
-            <a:avLst/>
-          </a:prstGeom>
-          <a:noFill/>
-        </p:spPr>
-        <p:txBody>
-          <a:bodyPr wrap="square">
-            <a:spAutoFit/>
-          </a:bodyPr>
-          <a:lstStyle/>
-          <a:p>
-            <a:pPr algn="l"/>
-            <a:r>
-              <a:rPr sz="1100" b="0" i="0">
+              <a:rPr sz="1000" b="0" i="0">
                 <a:solidFill>
                   <a:srgbClr val="1A1A2E"/>
                 </a:solidFill>
               </a:rPr>
-              <a:t>ごんた寿し・はま寿司テイクアウト予約
-正月テイクアウトは11月〜12月に早めに予約</a:t>
-            </a:r>
-          </a:p>
-        </p:txBody>
-      </p:sp>
-      <p:sp>
-        <p:nvSpPr>
-          <p:cNvPr id="41" name="Rectangle 40"/>
+              <a:t>ごんた寿し・はま寿司のテイクアウトを予約
+正月テイクアウトは 11〜12月に早めに予約</a:t>
+            </a:r>
+          </a:p>
+        </p:txBody>
+      </p:sp>
+      <p:sp>
+        <p:nvSpPr>
+          <p:cNvPr id="36" name="Rectangle 35"/>
           <p:cNvSpPr/>
           <p:nvPr/>
         </p:nvSpPr>
         <p:spPr>
           <a:xfrm>
-            <a:off x="274320" y="6263640"/>
-            <a:ext cx="11841480" cy="438912"/>
+            <a:off x="228600" y="6272784"/>
+            <a:ext cx="11932920" cy="420624"/>
           </a:xfrm>
           <a:prstGeom prst="rect">
             <a:avLst/>
@@ -12142,34 +12787,34 @@
       </p:sp>
       <p:sp>
         <p:nvSpPr>
-          <p:cNvPr id="42" name="TextBox 41"/>
-          <p:cNvSpPr txBox="1"/>
-          <p:nvPr/>
-        </p:nvSpPr>
-        <p:spPr>
-          <a:xfrm>
-            <a:off x="457200" y="6291072"/>
-            <a:ext cx="11612880" cy="384048"/>
-          </a:xfrm>
-          <a:prstGeom prst="rect">
-            <a:avLst/>
-          </a:prstGeom>
-          <a:noFill/>
-        </p:spPr>
-        <p:txBody>
-          <a:bodyPr wrap="square">
-            <a:spAutoFit/>
-          </a:bodyPr>
-          <a:lstStyle/>
-          <a:p>
-            <a:pPr algn="ctr"/>
-            <a:r>
-              <a:rPr sz="1200" b="1" i="0">
+          <p:cNvPr id="37" name="TextBox 36"/>
+          <p:cNvSpPr txBox="1"/>
+          <p:nvPr/>
+        </p:nvSpPr>
+        <p:spPr>
+          <a:xfrm>
+            <a:off x="411480" y="6327648"/>
+            <a:ext cx="11750040" cy="310896"/>
+          </a:xfrm>
+          <a:prstGeom prst="rect">
+            <a:avLst/>
+          </a:prstGeom>
+          <a:noFill/>
+        </p:spPr>
+        <p:txBody>
+          <a:bodyPr wrap="square" tIns="0" bIns="0" lIns="25400" rIns="25400">
+            <a:spAutoFit/>
+          </a:bodyPr>
+          <a:lstStyle/>
+          <a:p>
+            <a:pPr algn="ctr"/>
+            <a:r>
+              <a:rPr sz="1100" b="1" i="0">
                 <a:solidFill>
                   <a:srgbClr val="C89B3C"/>
                 </a:solidFill>
               </a:rPr>
-              <a:t>⚠  1月3日は正月繁忙期のため、場所確保は早期に。決まったらすぐ食事の手配へ進む。</a:t>
+              <a:t>⚠  1月3日は正月繁忙期。場所確保は今すぐ。決まったら食事手配に即移行する。</a:t>
             </a:r>
           </a:p>
         </p:txBody>
